--- a/docs/seminar/slides/세션0_환경구축과_큰그림.pptx
+++ b/docs/seminar/slides/세션0_환경구축과_큰그림.pptx
@@ -15,9 +15,11 @@
     <p:sldId id="263" r:id="rId9"/>
     <p:sldId id="264" r:id="rId10"/>
     <p:sldId id="265" r:id="rId11"/>
+    <p:sldId id="266" r:id="rId12"/>
+    <p:sldId id="267" r:id="rId13"/>
   </p:sldIdLst>
   <p:notesMasterIdLst>
-    <p:notesMasterId r:id="rId12"/>
+    <p:notesMasterId r:id="rId14"/>
   </p:notesMasterIdLst>
   <p:sldSz cx="12192000" cy="6858000"/>
   <p:notesSz cx="6858000" cy="12192000"/>
@@ -599,7 +601,7 @@
           <a:p>
             <a:r>
               <a:rPr lang="en-US" dirty="0"/>
-              <a:t/>
+              <a:t>소프트 오류는 산발적이라 '오래 돌려라'가 핵심 메시지. 안정성 검증은 스트레스 테스트임을 각인시키세요.</a:t>
             </a:r>
             <a:endParaRPr lang="en-US" dirty="0"/>
           </a:p>
@@ -623,6 +625,182 @@
             <a:fld id="{F7021451-1387-4CA6-816F-3879F97B5CBC}" type="slidenum">
               <a:rPr lang="en-US"/>
               <a:t>10</a:t>
+            </a:fld>
+            <a:endParaRPr lang="en-US"/>
+          </a:p>
+        </p:txBody>
+      </p:sp>
+    </p:spTree>
+    <p:extLst>
+      <p:ext uri="{BB962C8B-B14F-4D97-AF65-F5344CB8AC3E}">
+        <p14:creationId xmlns:p14="http://schemas.microsoft.com/office/powerpoint/2010/main" val="1024086991"/>
+      </p:ext>
+    </p:extLst>
+  </p:cSld>
+  <p:clrMapOvr>
+    <a:masterClrMapping/>
+  </p:clrMapOvr>
+</p:notes>
+</file>
+
+<file path=ppt/notesSlides/notesSlide11.xml><?xml version="1.0" encoding="utf-8"?>
+<p:notes xmlns:a="http://schemas.openxmlformats.org/drawingml/2006/main" xmlns:r="http://schemas.openxmlformats.org/officeDocument/2006/relationships" xmlns:p="http://schemas.openxmlformats.org/presentationml/2006/main">
+  <p:cSld>
+    <p:spTree>
+      <p:nvGrpSpPr>
+        <p:cNvPr id="1" name=""/>
+        <p:cNvGrpSpPr/>
+        <p:nvPr/>
+      </p:nvGrpSpPr>
+      <p:grpSpPr>
+        <a:xfrm>
+          <a:off x="0" y="0"/>
+          <a:ext cx="0" cy="0"/>
+          <a:chOff x="0" y="0"/>
+          <a:chExt cx="0" cy="0"/>
+        </a:xfrm>
+      </p:grpSpPr>
+      <p:sp>
+        <p:nvSpPr>
+          <p:cNvPr id="2" name="Slide Image Placeholder 1"/>
+          <p:cNvSpPr>
+            <a:spLocks noGrp="1" noRot="1" noChangeAspect="1"/>
+          </p:cNvSpPr>
+          <p:nvPr>
+            <p:ph type="sldImg"/>
+          </p:nvPr>
+        </p:nvSpPr>
+        <p:spPr/>
+      </p:sp>
+      <p:sp>
+        <p:nvSpPr>
+          <p:cNvPr id="3" name="Notes Placeholder 2"/>
+          <p:cNvSpPr>
+            <a:spLocks noGrp="1"/>
+          </p:cNvSpPr>
+          <p:nvPr>
+            <p:ph type="body" idx="1"/>
+          </p:nvPr>
+        </p:nvSpPr>
+        <p:spPr/>
+        <p:txBody>
+          <a:bodyPr/>
+          <a:lstStyle/>
+          <a:p>
+            <a:r>
+              <a:rPr lang="en-US" dirty="0"/>
+              <a:t>GPU가 없는 참석자는 Google Colab(무료 GPU)로 대체. 강사는 실행 로그를 미리 캡처해 두세요.</a:t>
+            </a:r>
+            <a:endParaRPr lang="en-US" dirty="0"/>
+          </a:p>
+        </p:txBody>
+      </p:sp>
+      <p:sp>
+        <p:nvSpPr>
+          <p:cNvPr id="4" name="Slide Number Placeholder 3"/>
+          <p:cNvSpPr>
+            <a:spLocks noGrp="1"/>
+          </p:cNvSpPr>
+          <p:nvPr>
+            <p:ph type="sldNum" sz="quarter" idx="10"/>
+          </p:nvPr>
+        </p:nvSpPr>
+        <p:spPr/>
+        <p:txBody>
+          <a:bodyPr/>
+          <a:lstStyle/>
+          <a:p>
+            <a:fld id="{F7021451-1387-4CA6-816F-3879F97B5CBC}" type="slidenum">
+              <a:rPr lang="en-US"/>
+              <a:t>11</a:t>
+            </a:fld>
+            <a:endParaRPr lang="en-US"/>
+          </a:p>
+        </p:txBody>
+      </p:sp>
+    </p:spTree>
+    <p:extLst>
+      <p:ext uri="{BB962C8B-B14F-4D97-AF65-F5344CB8AC3E}">
+        <p14:creationId xmlns:p14="http://schemas.microsoft.com/office/powerpoint/2010/main" val="1024086991"/>
+      </p:ext>
+    </p:extLst>
+  </p:cSld>
+  <p:clrMapOvr>
+    <a:masterClrMapping/>
+  </p:clrMapOvr>
+</p:notes>
+</file>
+
+<file path=ppt/notesSlides/notesSlide12.xml><?xml version="1.0" encoding="utf-8"?>
+<p:notes xmlns:a="http://schemas.openxmlformats.org/drawingml/2006/main" xmlns:r="http://schemas.openxmlformats.org/officeDocument/2006/relationships" xmlns:p="http://schemas.openxmlformats.org/presentationml/2006/main">
+  <p:cSld>
+    <p:spTree>
+      <p:nvGrpSpPr>
+        <p:cNvPr id="1" name=""/>
+        <p:cNvGrpSpPr/>
+        <p:nvPr/>
+      </p:nvGrpSpPr>
+      <p:grpSpPr>
+        <a:xfrm>
+          <a:off x="0" y="0"/>
+          <a:ext cx="0" cy="0"/>
+          <a:chOff x="0" y="0"/>
+          <a:chExt cx="0" cy="0"/>
+        </a:xfrm>
+      </p:grpSpPr>
+      <p:sp>
+        <p:nvSpPr>
+          <p:cNvPr id="2" name="Slide Image Placeholder 1"/>
+          <p:cNvSpPr>
+            <a:spLocks noGrp="1" noRot="1" noChangeAspect="1"/>
+          </p:cNvSpPr>
+          <p:nvPr>
+            <p:ph type="sldImg"/>
+          </p:nvPr>
+        </p:nvSpPr>
+        <p:spPr/>
+      </p:sp>
+      <p:sp>
+        <p:nvSpPr>
+          <p:cNvPr id="3" name="Notes Placeholder 2"/>
+          <p:cNvSpPr>
+            <a:spLocks noGrp="1"/>
+          </p:cNvSpPr>
+          <p:nvPr>
+            <p:ph type="body" idx="1"/>
+          </p:nvPr>
+        </p:nvSpPr>
+        <p:spPr/>
+        <p:txBody>
+          <a:bodyPr/>
+          <a:lstStyle/>
+          <a:p>
+            <a:r>
+              <a:rPr lang="en-US" dirty="0"/>
+              <a:t/>
+            </a:r>
+            <a:endParaRPr lang="en-US" dirty="0"/>
+          </a:p>
+        </p:txBody>
+      </p:sp>
+      <p:sp>
+        <p:nvSpPr>
+          <p:cNvPr id="4" name="Slide Number Placeholder 3"/>
+          <p:cNvSpPr>
+            <a:spLocks noGrp="1"/>
+          </p:cNvSpPr>
+          <p:nvPr>
+            <p:ph type="sldNum" sz="quarter" idx="10"/>
+          </p:nvPr>
+        </p:nvSpPr>
+        <p:spPr/>
+        <p:txBody>
+          <a:bodyPr/>
+          <a:lstStyle/>
+          <a:p>
+            <a:fld id="{F7021451-1387-4CA6-816F-3879F97B5CBC}" type="slidenum">
+              <a:rPr lang="en-US"/>
+              <a:t>12</a:t>
             </a:fld>
             <a:endParaRPr lang="en-US"/>
           </a:p>
@@ -863,7 +1041,7 @@
           <a:p>
             <a:r>
               <a:rPr lang="en-US" dirty="0"/>
-              <a:t>cuda_memtest와 달리 MemtestG80은 블록당 스레드가 512개 — 병렬 리덕션·coalescing이 이 도구의 특징. 세션 1·3에서 깊게 다룹니다.</a:t>
+              <a:t>호스트/디바이스가 분리된 메모리를 가진다는 점, 둘 사이 이동은 반드시 cudaMemcpy(PCIe)로 이뤄진다는 점이 핵심.</a:t>
             </a:r>
             <a:endParaRPr lang="en-US" dirty="0"/>
           </a:p>
@@ -951,7 +1129,7 @@
           <a:p>
             <a:r>
               <a:rPr lang="en-US" dirty="0"/>
-              <a:t>core.cu 하나에 커널·호스트·리덕션이 다 있음. 세션마다 이 지도를 다시 펴서 오늘 다룰 곳을 짚으세요.</a:t>
+              <a:t>cuda_memtest와 달리 MemtestG80은 블록당 스레드가 512개 — 병렬 리덕션·coalescing이 이 도구의 특징. 세션 1·3에서 깊게 다룹니다.</a:t>
             </a:r>
             <a:endParaRPr lang="en-US" dirty="0"/>
           </a:p>
@@ -1039,7 +1217,7 @@
           <a:p>
             <a:r>
               <a:rPr lang="en-US" dirty="0"/>
-              <a:t>빌드 실패 대부분은 CUDA_DIR 경로 문제. Makefile 상단의 CUDA_DIR를 자기 환경에 맞추라고 안내하세요.</a:t>
+              <a:t>core.cu 하나에 커널·호스트·리덕션이 다 있음. 세션마다 이 지도를 다시 펴서 오늘 다룰 곳을 짚으세요.</a:t>
             </a:r>
             <a:endParaRPr lang="en-US" dirty="0"/>
           </a:p>
@@ -1127,7 +1305,7 @@
           <a:p>
             <a:r>
               <a:rPr lang="en-US" dirty="0"/>
-              <a:t>첫 줄의 대역폭 측정 후 iteration 루프가 돈다는 구조를 보여주세요. 각 테스트는 세션 4에서 하나씩 해부합니다.</a:t>
+              <a:t>빌드 실패 대부분은 CUDA_DIR 경로 문제. Makefile 상단의 CUDA_DIR를 자기 환경에 맞추라고 안내하세요.</a:t>
             </a:r>
             <a:endParaRPr lang="en-US" dirty="0"/>
           </a:p>
@@ -1215,7 +1393,7 @@
           <a:p>
             <a:r>
               <a:rPr lang="en-US" dirty="0"/>
-              <a:t>소프트 오류는 산발적이라 '오래 돌려라'가 핵심 메시지. 안정성 검증은 스트레스 테스트임을 각인시키세요.</a:t>
+              <a:t>첫 줄의 대역폭 측정 후 iteration 루프가 돈다는 구조를 보여주세요. 각 테스트는 세션 4에서 하나씩 해부합니다.</a:t>
             </a:r>
             <a:endParaRPr lang="en-US" dirty="0"/>
           </a:p>
@@ -1303,7 +1481,7 @@
           <a:p>
             <a:r>
               <a:rPr lang="en-US" dirty="0"/>
-              <a:t>GPU가 없는 참석자는 Google Colab(무료 GPU)로 대체. 강사는 실행 로그를 미리 캡처해 두세요.</a:t>
+              <a:t>프로그램 전체 지도. 각 단계 옆에 '어느 세션에서 파고드는지'를 표기해 로드맵과 연결하세요.</a:t>
             </a:r>
             <a:endParaRPr lang="en-US" dirty="0"/>
           </a:p>
@@ -1964,6 +2142,1234 @@
         </p:nvSpPr>
         <p:spPr>
           <a:xfrm>
+            <a:off x="548640" y="411480"/>
+            <a:ext cx="658368" cy="658368"/>
+          </a:xfrm>
+          <a:prstGeom prst="roundRect">
+            <a:avLst>
+              <a:gd name="adj" fmla="val 13889"/>
+            </a:avLst>
+          </a:prstGeom>
+          <a:solidFill>
+            <a:srgbClr val="E8A33D"/>
+          </a:solidFill>
+          <a:ln/>
+        </p:spPr>
+        <p:txBody>
+          <a:bodyPr wrap="square" rtlCol="0" anchor="ctr"/>
+          <a:lstStyle/>
+          <a:p>
+            <a:pPr algn="ctr" indent="0" marL="0">
+              <a:buNone/>
+            </a:pPr>
+            <a:r>
+              <a:rPr lang="en-US" sz="2200" b="1" dirty="0">
+                <a:solidFill>
+                  <a:srgbClr val="101722"/>
+                </a:solidFill>
+                <a:latin typeface="Courier New" pitchFamily="34" charset="0"/>
+                <a:ea typeface="Courier New" pitchFamily="34" charset="-122"/>
+                <a:cs typeface="Courier New" pitchFamily="34" charset="-120"/>
+              </a:rPr>
+              <a:t>7</a:t>
+            </a:r>
+            <a:endParaRPr lang="en-US" sz="2200" dirty="0"/>
+          </a:p>
+        </p:txBody>
+      </p:sp>
+      <p:sp>
+        <p:nvSpPr>
+          <p:cNvPr id="3" name="Text 1"/>
+          <p:cNvSpPr/>
+          <p:nvPr/>
+        </p:nvSpPr>
+        <p:spPr>
+          <a:xfrm>
+            <a:off x="1371600" y="384048"/>
+            <a:ext cx="10241280" cy="713232"/>
+          </a:xfrm>
+          <a:prstGeom prst="rect">
+            <a:avLst/>
+          </a:prstGeom>
+          <a:noFill/>
+          <a:ln/>
+        </p:spPr>
+        <p:txBody>
+          <a:bodyPr wrap="square" lIns="0" tIns="0" rIns="0" bIns="0" rtlCol="0" anchor="ctr"/>
+          <a:lstStyle/>
+          <a:p>
+            <a:pPr algn="l" indent="0" marL="0">
+              <a:buNone/>
+            </a:pPr>
+            <a:r>
+              <a:rPr lang="en-US" sz="2900" b="1" dirty="0">
+                <a:solidFill>
+                  <a:srgbClr val="E7EDF5"/>
+                </a:solidFill>
+                <a:latin typeface="Malgun Gothic" pitchFamily="34" charset="0"/>
+                <a:ea typeface="Malgun Gothic" pitchFamily="34" charset="-122"/>
+                <a:cs typeface="Malgun Gothic" pitchFamily="34" charset="-120"/>
+              </a:rPr>
+              <a:t>이 도구가 찾는 것 · 하드 vs 소프트 오류</a:t>
+            </a:r>
+            <a:endParaRPr lang="en-US" sz="2900" dirty="0"/>
+          </a:p>
+        </p:txBody>
+      </p:sp>
+      <p:sp>
+        <p:nvSpPr>
+          <p:cNvPr id="4" name="Shape 2"/>
+          <p:cNvSpPr/>
+          <p:nvPr/>
+        </p:nvSpPr>
+        <p:spPr>
+          <a:xfrm>
+            <a:off x="548640" y="1645920"/>
+            <a:ext cx="5349240" cy="3931920"/>
+          </a:xfrm>
+          <a:prstGeom prst="roundRect">
+            <a:avLst>
+              <a:gd name="adj" fmla="val 1860"/>
+            </a:avLst>
+          </a:prstGeom>
+          <a:solidFill>
+            <a:srgbClr val="18212E"/>
+          </a:solidFill>
+          <a:ln w="19050">
+            <a:solidFill>
+              <a:srgbClr val="E6604F"/>
+            </a:solidFill>
+            <a:prstDash val="solid"/>
+          </a:ln>
+        </p:spPr>
+      </p:sp>
+      <p:sp>
+        <p:nvSpPr>
+          <p:cNvPr id="5" name="Text 3"/>
+          <p:cNvSpPr/>
+          <p:nvPr/>
+        </p:nvSpPr>
+        <p:spPr>
+          <a:xfrm>
+            <a:off x="822960" y="1828800"/>
+            <a:ext cx="4800600" cy="457200"/>
+          </a:xfrm>
+          <a:prstGeom prst="rect">
+            <a:avLst/>
+          </a:prstGeom>
+          <a:noFill/>
+          <a:ln/>
+        </p:spPr>
+        <p:txBody>
+          <a:bodyPr wrap="square" lIns="0" tIns="0" rIns="0" bIns="0" rtlCol="0" anchor="ctr"/>
+          <a:lstStyle/>
+          <a:p>
+            <a:pPr indent="0" marL="0">
+              <a:buNone/>
+            </a:pPr>
+            <a:r>
+              <a:rPr lang="en-US" sz="2000" b="1" dirty="0">
+                <a:solidFill>
+                  <a:srgbClr val="E6604F"/>
+                </a:solidFill>
+                <a:latin typeface="Malgun Gothic" pitchFamily="34" charset="0"/>
+                <a:ea typeface="Malgun Gothic" pitchFamily="34" charset="-122"/>
+                <a:cs typeface="Malgun Gothic" pitchFamily="34" charset="-120"/>
+              </a:rPr>
+              <a:t>하드 오류 (hard error)</a:t>
+            </a:r>
+            <a:endParaRPr lang="en-US" sz="2000" dirty="0"/>
+          </a:p>
+        </p:txBody>
+      </p:sp>
+      <p:sp>
+        <p:nvSpPr>
+          <p:cNvPr id="6" name="Text 4"/>
+          <p:cNvSpPr/>
+          <p:nvPr/>
+        </p:nvSpPr>
+        <p:spPr>
+          <a:xfrm>
+            <a:off x="822960" y="2423160"/>
+            <a:ext cx="4800600" cy="3017520"/>
+          </a:xfrm>
+          <a:prstGeom prst="rect">
+            <a:avLst/>
+          </a:prstGeom>
+          <a:noFill/>
+          <a:ln/>
+        </p:spPr>
+        <p:txBody>
+          <a:bodyPr wrap="square" lIns="0" tIns="0" rIns="0" bIns="0" rtlCol="0" anchor="t"/>
+          <a:lstStyle/>
+          <a:p>
+            <a:pPr marL="342900" indent="-342900">
+              <a:lnSpc>
+                <a:spcPct val="105000"/>
+              </a:lnSpc>
+              <a:spcAft>
+                <a:spcPts val="1000"/>
+              </a:spcAft>
+              <a:buSzPct val="100000"/>
+              <a:buChar char="•"/>
+            </a:pPr>
+            <a:r>
+              <a:rPr lang="en-US" sz="1500" dirty="0">
+                <a:solidFill>
+                  <a:srgbClr val="E7EDF5"/>
+                </a:solidFill>
+                <a:latin typeface="Malgun Gothic" pitchFamily="34" charset="0"/>
+                <a:ea typeface="Malgun Gothic" pitchFamily="34" charset="-122"/>
+                <a:cs typeface="Malgun Gothic" pitchFamily="34" charset="-120"/>
+              </a:rPr>
+              <a:t>항상 재현되는 물리적 결함</a:t>
+            </a:r>
+            <a:endParaRPr lang="en-US" sz="1500" dirty="0"/>
+          </a:p>
+          <a:p>
+            <a:pPr marL="342900" indent="-342900">
+              <a:lnSpc>
+                <a:spcPct val="105000"/>
+              </a:lnSpc>
+              <a:spcAft>
+                <a:spcPts val="1000"/>
+              </a:spcAft>
+              <a:buSzPct val="100000"/>
+              <a:buChar char="•"/>
+            </a:pPr>
+            <a:r>
+              <a:rPr lang="en-US" sz="1500" dirty="0">
+                <a:solidFill>
+                  <a:srgbClr val="E7EDF5"/>
+                </a:solidFill>
+                <a:latin typeface="Malgun Gothic" pitchFamily="34" charset="0"/>
+                <a:ea typeface="Malgun Gothic" pitchFamily="34" charset="-122"/>
+                <a:cs typeface="Malgun Gothic" pitchFamily="34" charset="-120"/>
+              </a:rPr>
+              <a:t>특정 셀이 stuck-at-0 / stuck-at-1</a:t>
+            </a:r>
+            <a:endParaRPr lang="en-US" sz="1500" dirty="0"/>
+          </a:p>
+          <a:p>
+            <a:pPr marL="342900" indent="-342900">
+              <a:lnSpc>
+                <a:spcPct val="105000"/>
+              </a:lnSpc>
+              <a:spcAft>
+                <a:spcPts val="1000"/>
+              </a:spcAft>
+              <a:buSzPct val="100000"/>
+              <a:buChar char="•"/>
+            </a:pPr>
+            <a:r>
+              <a:rPr lang="en-US" sz="1500" dirty="0">
+                <a:solidFill>
+                  <a:srgbClr val="E7EDF5"/>
+                </a:solidFill>
+                <a:latin typeface="Malgun Gothic" pitchFamily="34" charset="0"/>
+                <a:ea typeface="Malgun Gothic" pitchFamily="34" charset="-122"/>
+                <a:cs typeface="Malgun Gothic" pitchFamily="34" charset="-120"/>
+              </a:rPr>
+              <a:t>인접 셀·데이터 라인 단락</a:t>
+            </a:r>
+            <a:endParaRPr lang="en-US" sz="1500" dirty="0"/>
+          </a:p>
+          <a:p>
+            <a:pPr marL="342900" indent="-342900">
+              <a:lnSpc>
+                <a:spcPct val="105000"/>
+              </a:lnSpc>
+              <a:spcAft>
+                <a:spcPts val="1000"/>
+              </a:spcAft>
+              <a:buSzPct val="100000"/>
+              <a:buChar char="•"/>
+            </a:pPr>
+            <a:r>
+              <a:rPr lang="en-US" sz="1500" dirty="0">
+                <a:solidFill>
+                  <a:srgbClr val="E7EDF5"/>
+                </a:solidFill>
+                <a:latin typeface="Malgun Gothic" pitchFamily="34" charset="0"/>
+                <a:ea typeface="Malgun Gothic" pitchFamily="34" charset="-122"/>
+                <a:cs typeface="Malgun Gothic" pitchFamily="34" charset="-120"/>
+              </a:rPr>
+              <a:t>제조 결함, 영구 손상</a:t>
+            </a:r>
+            <a:endParaRPr lang="en-US" sz="1500" dirty="0"/>
+          </a:p>
+          <a:p>
+            <a:pPr marL="342900" indent="-342900">
+              <a:lnSpc>
+                <a:spcPct val="105000"/>
+              </a:lnSpc>
+              <a:spcAft>
+                <a:spcPts val="1000"/>
+              </a:spcAft>
+              <a:buSzPct val="100000"/>
+              <a:buChar char="•"/>
+            </a:pPr>
+            <a:r>
+              <a:rPr lang="en-US" sz="1500" dirty="0">
+                <a:solidFill>
+                  <a:srgbClr val="E7EDF5"/>
+                </a:solidFill>
+                <a:latin typeface="Malgun Gothic" pitchFamily="34" charset="0"/>
+                <a:ea typeface="Malgun Gothic" pitchFamily="34" charset="-122"/>
+                <a:cs typeface="Malgun Gothic" pitchFamily="34" charset="-120"/>
+              </a:rPr>
+              <a:t>→ Walking/Moving 패턴 테스트로 검출</a:t>
+            </a:r>
+            <a:endParaRPr lang="en-US" sz="1500" dirty="0"/>
+          </a:p>
+        </p:txBody>
+      </p:sp>
+      <p:sp>
+        <p:nvSpPr>
+          <p:cNvPr id="7" name="Shape 5"/>
+          <p:cNvSpPr/>
+          <p:nvPr/>
+        </p:nvSpPr>
+        <p:spPr>
+          <a:xfrm>
+            <a:off x="6263640" y="1645920"/>
+            <a:ext cx="5349240" cy="3931920"/>
+          </a:xfrm>
+          <a:prstGeom prst="roundRect">
+            <a:avLst>
+              <a:gd name="adj" fmla="val 1860"/>
+            </a:avLst>
+          </a:prstGeom>
+          <a:solidFill>
+            <a:srgbClr val="18212E"/>
+          </a:solidFill>
+          <a:ln w="19050">
+            <a:solidFill>
+              <a:srgbClr val="E8A33D"/>
+            </a:solidFill>
+            <a:prstDash val="solid"/>
+          </a:ln>
+        </p:spPr>
+      </p:sp>
+      <p:sp>
+        <p:nvSpPr>
+          <p:cNvPr id="8" name="Text 6"/>
+          <p:cNvSpPr/>
+          <p:nvPr/>
+        </p:nvSpPr>
+        <p:spPr>
+          <a:xfrm>
+            <a:off x="6537960" y="1828800"/>
+            <a:ext cx="4800600" cy="457200"/>
+          </a:xfrm>
+          <a:prstGeom prst="rect">
+            <a:avLst/>
+          </a:prstGeom>
+          <a:noFill/>
+          <a:ln/>
+        </p:spPr>
+        <p:txBody>
+          <a:bodyPr wrap="square" lIns="0" tIns="0" rIns="0" bIns="0" rtlCol="0" anchor="ctr"/>
+          <a:lstStyle/>
+          <a:p>
+            <a:pPr indent="0" marL="0">
+              <a:buNone/>
+            </a:pPr>
+            <a:r>
+              <a:rPr lang="en-US" sz="2000" b="1" dirty="0">
+                <a:solidFill>
+                  <a:srgbClr val="E8A33D"/>
+                </a:solidFill>
+                <a:latin typeface="Malgun Gothic" pitchFamily="34" charset="0"/>
+                <a:ea typeface="Malgun Gothic" pitchFamily="34" charset="-122"/>
+                <a:cs typeface="Malgun Gothic" pitchFamily="34" charset="-120"/>
+              </a:rPr>
+              <a:t>소프트 오류 (soft error)</a:t>
+            </a:r>
+            <a:endParaRPr lang="en-US" sz="2000" dirty="0"/>
+          </a:p>
+        </p:txBody>
+      </p:sp>
+      <p:sp>
+        <p:nvSpPr>
+          <p:cNvPr id="9" name="Text 7"/>
+          <p:cNvSpPr/>
+          <p:nvPr/>
+        </p:nvSpPr>
+        <p:spPr>
+          <a:xfrm>
+            <a:off x="6537960" y="2423160"/>
+            <a:ext cx="4800600" cy="3017520"/>
+          </a:xfrm>
+          <a:prstGeom prst="rect">
+            <a:avLst/>
+          </a:prstGeom>
+          <a:noFill/>
+          <a:ln/>
+        </p:spPr>
+        <p:txBody>
+          <a:bodyPr wrap="square" lIns="0" tIns="0" rIns="0" bIns="0" rtlCol="0" anchor="t"/>
+          <a:lstStyle/>
+          <a:p>
+            <a:pPr marL="342900" indent="-342900">
+              <a:lnSpc>
+                <a:spcPct val="105000"/>
+              </a:lnSpc>
+              <a:spcAft>
+                <a:spcPts val="1000"/>
+              </a:spcAft>
+              <a:buSzPct val="100000"/>
+              <a:buChar char="•"/>
+            </a:pPr>
+            <a:r>
+              <a:rPr lang="en-US" sz="1500" dirty="0">
+                <a:solidFill>
+                  <a:srgbClr val="E7EDF5"/>
+                </a:solidFill>
+                <a:latin typeface="Malgun Gothic" pitchFamily="34" charset="0"/>
+                <a:ea typeface="Malgun Gothic" pitchFamily="34" charset="-122"/>
+                <a:cs typeface="Malgun Gothic" pitchFamily="34" charset="-120"/>
+              </a:rPr>
+              <a:t>간헐적으로만 나타나는 오류</a:t>
+            </a:r>
+            <a:endParaRPr lang="en-US" sz="1500" dirty="0"/>
+          </a:p>
+          <a:p>
+            <a:pPr marL="342900" indent="-342900">
+              <a:lnSpc>
+                <a:spcPct val="105000"/>
+              </a:lnSpc>
+              <a:spcAft>
+                <a:spcPts val="1000"/>
+              </a:spcAft>
+              <a:buSzPct val="100000"/>
+              <a:buChar char="•"/>
+            </a:pPr>
+            <a:r>
+              <a:rPr lang="en-US" sz="1500" dirty="0">
+                <a:solidFill>
+                  <a:srgbClr val="E7EDF5"/>
+                </a:solidFill>
+                <a:latin typeface="Malgun Gothic" pitchFamily="34" charset="0"/>
+                <a:ea typeface="Malgun Gothic" pitchFamily="34" charset="-122"/>
+                <a:cs typeface="Malgun Gothic" pitchFamily="34" charset="-120"/>
+              </a:rPr>
+              <a:t>오버클럭·발열·전압 마진 부족</a:t>
+            </a:r>
+            <a:endParaRPr lang="en-US" sz="1500" dirty="0"/>
+          </a:p>
+          <a:p>
+            <a:pPr marL="342900" indent="-342900">
+              <a:lnSpc>
+                <a:spcPct val="105000"/>
+              </a:lnSpc>
+              <a:spcAft>
+                <a:spcPts val="1000"/>
+              </a:spcAft>
+              <a:buSzPct val="100000"/>
+              <a:buChar char="•"/>
+            </a:pPr>
+            <a:r>
+              <a:rPr lang="en-US" sz="1500" dirty="0">
+                <a:solidFill>
+                  <a:srgbClr val="E7EDF5"/>
+                </a:solidFill>
+                <a:latin typeface="Malgun Gothic" pitchFamily="34" charset="0"/>
+                <a:ea typeface="Malgun Gothic" pitchFamily="34" charset="-122"/>
+                <a:cs typeface="Malgun Gothic" pitchFamily="34" charset="-120"/>
+              </a:rPr>
+              <a:t>우주선(cosmic ray) 비트 플립</a:t>
+            </a:r>
+            <a:endParaRPr lang="en-US" sz="1500" dirty="0"/>
+          </a:p>
+          <a:p>
+            <a:pPr marL="342900" indent="-342900">
+              <a:lnSpc>
+                <a:spcPct val="105000"/>
+              </a:lnSpc>
+              <a:spcAft>
+                <a:spcPts val="1000"/>
+              </a:spcAft>
+              <a:buSzPct val="100000"/>
+              <a:buChar char="•"/>
+            </a:pPr>
+            <a:r>
+              <a:rPr lang="en-US" sz="1500" dirty="0">
+                <a:solidFill>
+                  <a:srgbClr val="E7EDF5"/>
+                </a:solidFill>
+                <a:latin typeface="Malgun Gothic" pitchFamily="34" charset="0"/>
+                <a:ea typeface="Malgun Gothic" pitchFamily="34" charset="-122"/>
+                <a:cs typeface="Malgun Gothic" pitchFamily="34" charset="-120"/>
+              </a:rPr>
+              <a:t>5만 번에 한 번 꼴로도 발생 가능</a:t>
+            </a:r>
+            <a:endParaRPr lang="en-US" sz="1500" dirty="0"/>
+          </a:p>
+          <a:p>
+            <a:pPr marL="342900" indent="-342900">
+              <a:lnSpc>
+                <a:spcPct val="105000"/>
+              </a:lnSpc>
+              <a:spcAft>
+                <a:spcPts val="1000"/>
+              </a:spcAft>
+              <a:buSzPct val="100000"/>
+              <a:buChar char="•"/>
+            </a:pPr>
+            <a:r>
+              <a:rPr lang="en-US" sz="1500" dirty="0">
+                <a:solidFill>
+                  <a:srgbClr val="E7EDF5"/>
+                </a:solidFill>
+                <a:latin typeface="Malgun Gothic" pitchFamily="34" charset="0"/>
+                <a:ea typeface="Malgun Gothic" pitchFamily="34" charset="-122"/>
+                <a:cs typeface="Malgun Gothic" pitchFamily="34" charset="-120"/>
+              </a:rPr>
+              <a:t>→ 크게·오래 반복해야 잡힘</a:t>
+            </a:r>
+            <a:endParaRPr lang="en-US" sz="1500" dirty="0"/>
+          </a:p>
+        </p:txBody>
+      </p:sp>
+    </p:spTree>
+  </p:cSld>
+  <p:clrMapOvr>
+    <a:masterClrMapping/>
+  </p:clrMapOvr>
+</p:sld>
+</file>
+
+<file path=ppt/slides/slide11.xml><?xml version="1.0" encoding="utf-8"?>
+<p:sld xmlns:a="http://schemas.openxmlformats.org/drawingml/2006/main" xmlns:r="http://schemas.openxmlformats.org/officeDocument/2006/relationships" xmlns:p="http://schemas.openxmlformats.org/presentationml/2006/main">
+  <p:cSld name="Slide 11">
+    <p:bg>
+      <p:bgPr>
+        <a:solidFill>
+          <a:srgbClr val="101722"/>
+        </a:solidFill>
+      </p:bgPr>
+    </p:bg>
+    <p:spTree>
+      <p:nvGrpSpPr>
+        <p:cNvPr id="1" name=""/>
+        <p:cNvGrpSpPr/>
+        <p:nvPr/>
+      </p:nvGrpSpPr>
+      <p:grpSpPr>
+        <a:xfrm>
+          <a:off x="0" y="0"/>
+          <a:ext cx="0" cy="0"/>
+          <a:chOff x="0" y="0"/>
+          <a:chExt cx="0" cy="0"/>
+        </a:xfrm>
+      </p:grpSpPr>
+      <p:sp>
+        <p:nvSpPr>
+          <p:cNvPr id="2" name="Text 0"/>
+          <p:cNvSpPr/>
+          <p:nvPr/>
+        </p:nvSpPr>
+        <p:spPr>
+          <a:xfrm>
+            <a:off x="548640" y="411480"/>
+            <a:ext cx="658368" cy="658368"/>
+          </a:xfrm>
+          <a:prstGeom prst="roundRect">
+            <a:avLst>
+              <a:gd name="adj" fmla="val 13889"/>
+            </a:avLst>
+          </a:prstGeom>
+          <a:solidFill>
+            <a:srgbClr val="E8A33D"/>
+          </a:solidFill>
+          <a:ln/>
+        </p:spPr>
+        <p:txBody>
+          <a:bodyPr wrap="square" rtlCol="0" anchor="ctr"/>
+          <a:lstStyle/>
+          <a:p>
+            <a:pPr algn="ctr" indent="0" marL="0">
+              <a:buNone/>
+            </a:pPr>
+            <a:r>
+              <a:rPr lang="en-US" sz="2200" b="1" dirty="0">
+                <a:solidFill>
+                  <a:srgbClr val="101722"/>
+                </a:solidFill>
+                <a:latin typeface="Courier New" pitchFamily="34" charset="0"/>
+                <a:ea typeface="Courier New" pitchFamily="34" charset="-122"/>
+                <a:cs typeface="Courier New" pitchFamily="34" charset="-120"/>
+              </a:rPr>
+              <a:t>8</a:t>
+            </a:r>
+            <a:endParaRPr lang="en-US" sz="2200" dirty="0"/>
+          </a:p>
+        </p:txBody>
+      </p:sp>
+      <p:sp>
+        <p:nvSpPr>
+          <p:cNvPr id="3" name="Text 1"/>
+          <p:cNvSpPr/>
+          <p:nvPr/>
+        </p:nvSpPr>
+        <p:spPr>
+          <a:xfrm>
+            <a:off x="1371600" y="384048"/>
+            <a:ext cx="10241280" cy="713232"/>
+          </a:xfrm>
+          <a:prstGeom prst="rect">
+            <a:avLst/>
+          </a:prstGeom>
+          <a:noFill/>
+          <a:ln/>
+        </p:spPr>
+        <p:txBody>
+          <a:bodyPr wrap="square" lIns="0" tIns="0" rIns="0" bIns="0" rtlCol="0" anchor="ctr"/>
+          <a:lstStyle/>
+          <a:p>
+            <a:pPr algn="l" indent="0" marL="0">
+              <a:buNone/>
+            </a:pPr>
+            <a:r>
+              <a:rPr lang="en-US" sz="2900" b="1" dirty="0">
+                <a:solidFill>
+                  <a:srgbClr val="E7EDF5"/>
+                </a:solidFill>
+                <a:latin typeface="Malgun Gothic" pitchFamily="34" charset="0"/>
+                <a:ea typeface="Malgun Gothic" pitchFamily="34" charset="-122"/>
+                <a:cs typeface="Malgun Gothic" pitchFamily="34" charset="-120"/>
+              </a:rPr>
+              <a:t>실습 미리보기 · Lab 0</a:t>
+            </a:r>
+            <a:endParaRPr lang="en-US" sz="2900" dirty="0"/>
+          </a:p>
+        </p:txBody>
+      </p:sp>
+      <p:sp>
+        <p:nvSpPr>
+          <p:cNvPr id="4" name="Shape 2"/>
+          <p:cNvSpPr/>
+          <p:nvPr/>
+        </p:nvSpPr>
+        <p:spPr>
+          <a:xfrm>
+            <a:off x="548640" y="1600200"/>
+            <a:ext cx="5303520" cy="1920240"/>
+          </a:xfrm>
+          <a:prstGeom prst="roundRect">
+            <a:avLst>
+              <a:gd name="adj" fmla="val 3810"/>
+            </a:avLst>
+          </a:prstGeom>
+          <a:solidFill>
+            <a:srgbClr val="18212E"/>
+          </a:solidFill>
+          <a:ln/>
+        </p:spPr>
+      </p:sp>
+      <p:sp>
+        <p:nvSpPr>
+          <p:cNvPr id="5" name="Text 3"/>
+          <p:cNvSpPr/>
+          <p:nvPr/>
+        </p:nvSpPr>
+        <p:spPr>
+          <a:xfrm>
+            <a:off x="804672" y="1801368"/>
+            <a:ext cx="1188720" cy="502920"/>
+          </a:xfrm>
+          <a:prstGeom prst="roundRect">
+            <a:avLst>
+              <a:gd name="adj" fmla="val 14545"/>
+            </a:avLst>
+          </a:prstGeom>
+          <a:solidFill>
+            <a:srgbClr val="E8A33D"/>
+          </a:solidFill>
+          <a:ln/>
+        </p:spPr>
+        <p:txBody>
+          <a:bodyPr wrap="square" rtlCol="0" anchor="ctr"/>
+          <a:lstStyle/>
+          <a:p>
+            <a:pPr algn="ctr" indent="0" marL="0">
+              <a:buNone/>
+            </a:pPr>
+            <a:r>
+              <a:rPr lang="en-US" sz="1700" b="1" dirty="0">
+                <a:solidFill>
+                  <a:srgbClr val="101722"/>
+                </a:solidFill>
+                <a:latin typeface="Courier New" pitchFamily="34" charset="0"/>
+                <a:ea typeface="Courier New" pitchFamily="34" charset="-122"/>
+                <a:cs typeface="Courier New" pitchFamily="34" charset="-120"/>
+              </a:rPr>
+              <a:t>Ex 1</a:t>
+            </a:r>
+            <a:endParaRPr lang="en-US" sz="1700" dirty="0"/>
+          </a:p>
+        </p:txBody>
+      </p:sp>
+      <p:sp>
+        <p:nvSpPr>
+          <p:cNvPr id="6" name="Text 4"/>
+          <p:cNvSpPr/>
+          <p:nvPr/>
+        </p:nvSpPr>
+        <p:spPr>
+          <a:xfrm>
+            <a:off x="2148840" y="1819656"/>
+            <a:ext cx="3474720" cy="822960"/>
+          </a:xfrm>
+          <a:prstGeom prst="rect">
+            <a:avLst/>
+          </a:prstGeom>
+          <a:noFill/>
+          <a:ln/>
+        </p:spPr>
+        <p:txBody>
+          <a:bodyPr wrap="square" lIns="0" tIns="0" rIns="0" bIns="0" rtlCol="0" anchor="t"/>
+          <a:lstStyle/>
+          <a:p>
+            <a:pPr indent="0" marL="0">
+              <a:buNone/>
+            </a:pPr>
+            <a:r>
+              <a:rPr lang="en-US" sz="1800" b="1" dirty="0">
+                <a:solidFill>
+                  <a:srgbClr val="E7EDF5"/>
+                </a:solidFill>
+                <a:latin typeface="Malgun Gothic" pitchFamily="34" charset="0"/>
+                <a:ea typeface="Malgun Gothic" pitchFamily="34" charset="-122"/>
+                <a:cs typeface="Malgun Gothic" pitchFamily="34" charset="-120"/>
+              </a:rPr>
+              <a:t>빌드하기</a:t>
+            </a:r>
+            <a:endParaRPr lang="en-US" sz="1800" dirty="0"/>
+          </a:p>
+        </p:txBody>
+      </p:sp>
+      <p:sp>
+        <p:nvSpPr>
+          <p:cNvPr id="7" name="Text 5"/>
+          <p:cNvSpPr/>
+          <p:nvPr/>
+        </p:nvSpPr>
+        <p:spPr>
+          <a:xfrm>
+            <a:off x="804672" y="2697480"/>
+            <a:ext cx="4791456" cy="731520"/>
+          </a:xfrm>
+          <a:prstGeom prst="rect">
+            <a:avLst/>
+          </a:prstGeom>
+          <a:noFill/>
+          <a:ln/>
+        </p:spPr>
+        <p:txBody>
+          <a:bodyPr wrap="square" lIns="0" tIns="0" rIns="0" bIns="0" rtlCol="0" anchor="t"/>
+          <a:lstStyle/>
+          <a:p>
+            <a:pPr indent="0" marL="0">
+              <a:lnSpc>
+                <a:spcPct val="110000"/>
+              </a:lnSpc>
+              <a:buNone/>
+            </a:pPr>
+            <a:r>
+              <a:rPr lang="en-US" sz="1400" dirty="0">
+                <a:solidFill>
+                  <a:srgbClr val="9FB0C4"/>
+                </a:solidFill>
+                <a:latin typeface="Malgun Gothic" pitchFamily="34" charset="0"/>
+                <a:ea typeface="Malgun Gothic" pitchFamily="34" charset="-122"/>
+                <a:cs typeface="Malgun Gothic" pitchFamily="34" charset="-120"/>
+              </a:rPr>
+              <a:t>Makefile로 memtestG80를 빌드한다</a:t>
+            </a:r>
+            <a:endParaRPr lang="en-US" sz="1400" dirty="0"/>
+          </a:p>
+        </p:txBody>
+      </p:sp>
+      <p:sp>
+        <p:nvSpPr>
+          <p:cNvPr id="8" name="Shape 6"/>
+          <p:cNvSpPr/>
+          <p:nvPr/>
+        </p:nvSpPr>
+        <p:spPr>
+          <a:xfrm>
+            <a:off x="6309360" y="1600200"/>
+            <a:ext cx="5303520" cy="1920240"/>
+          </a:xfrm>
+          <a:prstGeom prst="roundRect">
+            <a:avLst>
+              <a:gd name="adj" fmla="val 3810"/>
+            </a:avLst>
+          </a:prstGeom>
+          <a:solidFill>
+            <a:srgbClr val="18212E"/>
+          </a:solidFill>
+          <a:ln/>
+        </p:spPr>
+      </p:sp>
+      <p:sp>
+        <p:nvSpPr>
+          <p:cNvPr id="9" name="Text 7"/>
+          <p:cNvSpPr/>
+          <p:nvPr/>
+        </p:nvSpPr>
+        <p:spPr>
+          <a:xfrm>
+            <a:off x="6565392" y="1801368"/>
+            <a:ext cx="1188720" cy="502920"/>
+          </a:xfrm>
+          <a:prstGeom prst="roundRect">
+            <a:avLst>
+              <a:gd name="adj" fmla="val 14545"/>
+            </a:avLst>
+          </a:prstGeom>
+          <a:solidFill>
+            <a:srgbClr val="3FB8C4"/>
+          </a:solidFill>
+          <a:ln/>
+        </p:spPr>
+        <p:txBody>
+          <a:bodyPr wrap="square" rtlCol="0" anchor="ctr"/>
+          <a:lstStyle/>
+          <a:p>
+            <a:pPr algn="ctr" indent="0" marL="0">
+              <a:buNone/>
+            </a:pPr>
+            <a:r>
+              <a:rPr lang="en-US" sz="1700" b="1" dirty="0">
+                <a:solidFill>
+                  <a:srgbClr val="101722"/>
+                </a:solidFill>
+                <a:latin typeface="Courier New" pitchFamily="34" charset="0"/>
+                <a:ea typeface="Courier New" pitchFamily="34" charset="-122"/>
+                <a:cs typeface="Courier New" pitchFamily="34" charset="-120"/>
+              </a:rPr>
+              <a:t>Ex 2</a:t>
+            </a:r>
+            <a:endParaRPr lang="en-US" sz="1700" dirty="0"/>
+          </a:p>
+        </p:txBody>
+      </p:sp>
+      <p:sp>
+        <p:nvSpPr>
+          <p:cNvPr id="10" name="Text 8"/>
+          <p:cNvSpPr/>
+          <p:nvPr/>
+        </p:nvSpPr>
+        <p:spPr>
+          <a:xfrm>
+            <a:off x="7909560" y="1819656"/>
+            <a:ext cx="3474720" cy="822960"/>
+          </a:xfrm>
+          <a:prstGeom prst="rect">
+            <a:avLst/>
+          </a:prstGeom>
+          <a:noFill/>
+          <a:ln/>
+        </p:spPr>
+        <p:txBody>
+          <a:bodyPr wrap="square" lIns="0" tIns="0" rIns="0" bIns="0" rtlCol="0" anchor="t"/>
+          <a:lstStyle/>
+          <a:p>
+            <a:pPr indent="0" marL="0">
+              <a:buNone/>
+            </a:pPr>
+            <a:r>
+              <a:rPr lang="en-US" sz="1800" b="1" dirty="0">
+                <a:solidFill>
+                  <a:srgbClr val="E7EDF5"/>
+                </a:solidFill>
+                <a:latin typeface="Malgun Gothic" pitchFamily="34" charset="0"/>
+                <a:ea typeface="Malgun Gothic" pitchFamily="34" charset="-122"/>
+                <a:cs typeface="Malgun Gothic" pitchFamily="34" charset="-120"/>
+              </a:rPr>
+              <a:t>기본 실행</a:t>
+            </a:r>
+            <a:endParaRPr lang="en-US" sz="1800" dirty="0"/>
+          </a:p>
+        </p:txBody>
+      </p:sp>
+      <p:sp>
+        <p:nvSpPr>
+          <p:cNvPr id="11" name="Text 9"/>
+          <p:cNvSpPr/>
+          <p:nvPr/>
+        </p:nvSpPr>
+        <p:spPr>
+          <a:xfrm>
+            <a:off x="6565392" y="2697480"/>
+            <a:ext cx="4791456" cy="731520"/>
+          </a:xfrm>
+          <a:prstGeom prst="rect">
+            <a:avLst/>
+          </a:prstGeom>
+          <a:noFill/>
+          <a:ln/>
+        </p:spPr>
+        <p:txBody>
+          <a:bodyPr wrap="square" lIns="0" tIns="0" rIns="0" bIns="0" rtlCol="0" anchor="t"/>
+          <a:lstStyle/>
+          <a:p>
+            <a:pPr indent="0" marL="0">
+              <a:lnSpc>
+                <a:spcPct val="110000"/>
+              </a:lnSpc>
+              <a:buNone/>
+            </a:pPr>
+            <a:r>
+              <a:rPr lang="en-US" sz="1400" dirty="0">
+                <a:solidFill>
+                  <a:srgbClr val="9FB0C4"/>
+                </a:solidFill>
+                <a:latin typeface="Malgun Gothic" pitchFamily="34" charset="0"/>
+                <a:ea typeface="Malgun Gothic" pitchFamily="34" charset="-122"/>
+                <a:cs typeface="Malgun Gothic" pitchFamily="34" charset="-120"/>
+              </a:rPr>
+              <a:t>./memtestG80 로 128MB 테스트를 돌린다</a:t>
+            </a:r>
+            <a:endParaRPr lang="en-US" sz="1400" dirty="0"/>
+          </a:p>
+        </p:txBody>
+      </p:sp>
+      <p:sp>
+        <p:nvSpPr>
+          <p:cNvPr id="12" name="Shape 10"/>
+          <p:cNvSpPr/>
+          <p:nvPr/>
+        </p:nvSpPr>
+        <p:spPr>
+          <a:xfrm>
+            <a:off x="548640" y="3840480"/>
+            <a:ext cx="5303520" cy="1920240"/>
+          </a:xfrm>
+          <a:prstGeom prst="roundRect">
+            <a:avLst>
+              <a:gd name="adj" fmla="val 3810"/>
+            </a:avLst>
+          </a:prstGeom>
+          <a:solidFill>
+            <a:srgbClr val="18212E"/>
+          </a:solidFill>
+          <a:ln/>
+        </p:spPr>
+      </p:sp>
+      <p:sp>
+        <p:nvSpPr>
+          <p:cNvPr id="13" name="Text 11"/>
+          <p:cNvSpPr/>
+          <p:nvPr/>
+        </p:nvSpPr>
+        <p:spPr>
+          <a:xfrm>
+            <a:off x="804672" y="4041648"/>
+            <a:ext cx="1188720" cy="502920"/>
+          </a:xfrm>
+          <a:prstGeom prst="roundRect">
+            <a:avLst>
+              <a:gd name="adj" fmla="val 14545"/>
+            </a:avLst>
+          </a:prstGeom>
+          <a:solidFill>
+            <a:srgbClr val="E8A33D"/>
+          </a:solidFill>
+          <a:ln/>
+        </p:spPr>
+        <p:txBody>
+          <a:bodyPr wrap="square" rtlCol="0" anchor="ctr"/>
+          <a:lstStyle/>
+          <a:p>
+            <a:pPr algn="ctr" indent="0" marL="0">
+              <a:buNone/>
+            </a:pPr>
+            <a:r>
+              <a:rPr lang="en-US" sz="1700" b="1" dirty="0">
+                <a:solidFill>
+                  <a:srgbClr val="101722"/>
+                </a:solidFill>
+                <a:latin typeface="Courier New" pitchFamily="34" charset="0"/>
+                <a:ea typeface="Courier New" pitchFamily="34" charset="-122"/>
+                <a:cs typeface="Courier New" pitchFamily="34" charset="-120"/>
+              </a:rPr>
+              <a:t>Ex 3</a:t>
+            </a:r>
+            <a:endParaRPr lang="en-US" sz="1700" dirty="0"/>
+          </a:p>
+        </p:txBody>
+      </p:sp>
+      <p:sp>
+        <p:nvSpPr>
+          <p:cNvPr id="14" name="Text 12"/>
+          <p:cNvSpPr/>
+          <p:nvPr/>
+        </p:nvSpPr>
+        <p:spPr>
+          <a:xfrm>
+            <a:off x="2148840" y="4059936"/>
+            <a:ext cx="3474720" cy="822960"/>
+          </a:xfrm>
+          <a:prstGeom prst="rect">
+            <a:avLst/>
+          </a:prstGeom>
+          <a:noFill/>
+          <a:ln/>
+        </p:spPr>
+        <p:txBody>
+          <a:bodyPr wrap="square" lIns="0" tIns="0" rIns="0" bIns="0" rtlCol="0" anchor="t"/>
+          <a:lstStyle/>
+          <a:p>
+            <a:pPr indent="0" marL="0">
+              <a:buNone/>
+            </a:pPr>
+            <a:r>
+              <a:rPr lang="en-US" sz="1800" b="1" dirty="0">
+                <a:solidFill>
+                  <a:srgbClr val="E7EDF5"/>
+                </a:solidFill>
+                <a:latin typeface="Malgun Gothic" pitchFamily="34" charset="0"/>
+                <a:ea typeface="Malgun Gothic" pitchFamily="34" charset="-122"/>
+                <a:cs typeface="Malgun Gothic" pitchFamily="34" charset="-120"/>
+              </a:rPr>
+              <a:t>GPU 관찰</a:t>
+            </a:r>
+            <a:endParaRPr lang="en-US" sz="1800" dirty="0"/>
+          </a:p>
+        </p:txBody>
+      </p:sp>
+      <p:sp>
+        <p:nvSpPr>
+          <p:cNvPr id="15" name="Text 13"/>
+          <p:cNvSpPr/>
+          <p:nvPr/>
+        </p:nvSpPr>
+        <p:spPr>
+          <a:xfrm>
+            <a:off x="804672" y="4937760"/>
+            <a:ext cx="4791456" cy="731520"/>
+          </a:xfrm>
+          <a:prstGeom prst="rect">
+            <a:avLst/>
+          </a:prstGeom>
+          <a:noFill/>
+          <a:ln/>
+        </p:spPr>
+        <p:txBody>
+          <a:bodyPr wrap="square" lIns="0" tIns="0" rIns="0" bIns="0" rtlCol="0" anchor="t"/>
+          <a:lstStyle/>
+          <a:p>
+            <a:pPr indent="0" marL="0">
+              <a:lnSpc>
+                <a:spcPct val="110000"/>
+              </a:lnSpc>
+              <a:buNone/>
+            </a:pPr>
+            <a:r>
+              <a:rPr lang="en-US" sz="1400" dirty="0">
+                <a:solidFill>
+                  <a:srgbClr val="9FB0C4"/>
+                </a:solidFill>
+                <a:latin typeface="Malgun Gothic" pitchFamily="34" charset="0"/>
+                <a:ea typeface="Malgun Gothic" pitchFamily="34" charset="-122"/>
+                <a:cs typeface="Malgun Gothic" pitchFamily="34" charset="-120"/>
+              </a:rPr>
+              <a:t>nvidia-smi로 사용률·메모리를 관찰한다</a:t>
+            </a:r>
+            <a:endParaRPr lang="en-US" sz="1400" dirty="0"/>
+          </a:p>
+        </p:txBody>
+      </p:sp>
+      <p:sp>
+        <p:nvSpPr>
+          <p:cNvPr id="16" name="Shape 14"/>
+          <p:cNvSpPr/>
+          <p:nvPr/>
+        </p:nvSpPr>
+        <p:spPr>
+          <a:xfrm>
+            <a:off x="6309360" y="3840480"/>
+            <a:ext cx="5303520" cy="1920240"/>
+          </a:xfrm>
+          <a:prstGeom prst="roundRect">
+            <a:avLst>
+              <a:gd name="adj" fmla="val 3810"/>
+            </a:avLst>
+          </a:prstGeom>
+          <a:solidFill>
+            <a:srgbClr val="18212E"/>
+          </a:solidFill>
+          <a:ln/>
+        </p:spPr>
+      </p:sp>
+      <p:sp>
+        <p:nvSpPr>
+          <p:cNvPr id="17" name="Text 15"/>
+          <p:cNvSpPr/>
+          <p:nvPr/>
+        </p:nvSpPr>
+        <p:spPr>
+          <a:xfrm>
+            <a:off x="6565392" y="4041648"/>
+            <a:ext cx="1188720" cy="502920"/>
+          </a:xfrm>
+          <a:prstGeom prst="roundRect">
+            <a:avLst>
+              <a:gd name="adj" fmla="val 14545"/>
+            </a:avLst>
+          </a:prstGeom>
+          <a:solidFill>
+            <a:srgbClr val="3FB8C4"/>
+          </a:solidFill>
+          <a:ln/>
+        </p:spPr>
+        <p:txBody>
+          <a:bodyPr wrap="square" rtlCol="0" anchor="ctr"/>
+          <a:lstStyle/>
+          <a:p>
+            <a:pPr algn="ctr" indent="0" marL="0">
+              <a:buNone/>
+            </a:pPr>
+            <a:r>
+              <a:rPr lang="en-US" sz="1700" b="1" dirty="0">
+                <a:solidFill>
+                  <a:srgbClr val="101722"/>
+                </a:solidFill>
+                <a:latin typeface="Courier New" pitchFamily="34" charset="0"/>
+                <a:ea typeface="Courier New" pitchFamily="34" charset="-122"/>
+                <a:cs typeface="Courier New" pitchFamily="34" charset="-120"/>
+              </a:rPr>
+              <a:t>Ex 4</a:t>
+            </a:r>
+            <a:endParaRPr lang="en-US" sz="1700" dirty="0"/>
+          </a:p>
+        </p:txBody>
+      </p:sp>
+      <p:sp>
+        <p:nvSpPr>
+          <p:cNvPr id="18" name="Text 16"/>
+          <p:cNvSpPr/>
+          <p:nvPr/>
+        </p:nvSpPr>
+        <p:spPr>
+          <a:xfrm>
+            <a:off x="7909560" y="4059936"/>
+            <a:ext cx="3474720" cy="822960"/>
+          </a:xfrm>
+          <a:prstGeom prst="rect">
+            <a:avLst/>
+          </a:prstGeom>
+          <a:noFill/>
+          <a:ln/>
+        </p:spPr>
+        <p:txBody>
+          <a:bodyPr wrap="square" lIns="0" tIns="0" rIns="0" bIns="0" rtlCol="0" anchor="t"/>
+          <a:lstStyle/>
+          <a:p>
+            <a:pPr indent="0" marL="0">
+              <a:buNone/>
+            </a:pPr>
+            <a:r>
+              <a:rPr lang="en-US" sz="1800" b="1" dirty="0">
+                <a:solidFill>
+                  <a:srgbClr val="E7EDF5"/>
+                </a:solidFill>
+                <a:latin typeface="Malgun Gothic" pitchFamily="34" charset="0"/>
+                <a:ea typeface="Malgun Gothic" pitchFamily="34" charset="-122"/>
+                <a:cs typeface="Malgun Gothic" pitchFamily="34" charset="-120"/>
+              </a:rPr>
+              <a:t>인자 실험</a:t>
+            </a:r>
+            <a:endParaRPr lang="en-US" sz="1800" dirty="0"/>
+          </a:p>
+        </p:txBody>
+      </p:sp>
+      <p:sp>
+        <p:nvSpPr>
+          <p:cNvPr id="19" name="Text 17"/>
+          <p:cNvSpPr/>
+          <p:nvPr/>
+        </p:nvSpPr>
+        <p:spPr>
+          <a:xfrm>
+            <a:off x="6565392" y="4937760"/>
+            <a:ext cx="4791456" cy="731520"/>
+          </a:xfrm>
+          <a:prstGeom prst="rect">
+            <a:avLst/>
+          </a:prstGeom>
+          <a:noFill/>
+          <a:ln/>
+        </p:spPr>
+        <p:txBody>
+          <a:bodyPr wrap="square" lIns="0" tIns="0" rIns="0" bIns="0" rtlCol="0" anchor="t"/>
+          <a:lstStyle/>
+          <a:p>
+            <a:pPr indent="0" marL="0">
+              <a:lnSpc>
+                <a:spcPct val="110000"/>
+              </a:lnSpc>
+              <a:buNone/>
+            </a:pPr>
+            <a:r>
+              <a:rPr lang="en-US" sz="1400" dirty="0">
+                <a:solidFill>
+                  <a:srgbClr val="9FB0C4"/>
+                </a:solidFill>
+                <a:latin typeface="Malgun Gothic" pitchFamily="34" charset="0"/>
+                <a:ea typeface="Malgun Gothic" pitchFamily="34" charset="-122"/>
+                <a:cs typeface="Malgun Gothic" pitchFamily="34" charset="-120"/>
+              </a:rPr>
+              <a:t>메모리 크기·반복 수를 바꿔 실행 시간 비교</a:t>
+            </a:r>
+            <a:endParaRPr lang="en-US" sz="1400" dirty="0"/>
+          </a:p>
+        </p:txBody>
+      </p:sp>
+    </p:spTree>
+  </p:cSld>
+  <p:clrMapOvr>
+    <a:masterClrMapping/>
+  </p:clrMapOvr>
+</p:sld>
+</file>
+
+<file path=ppt/slides/slide12.xml><?xml version="1.0" encoding="utf-8"?>
+<p:sld xmlns:a="http://schemas.openxmlformats.org/drawingml/2006/main" xmlns:r="http://schemas.openxmlformats.org/officeDocument/2006/relationships" xmlns:p="http://schemas.openxmlformats.org/presentationml/2006/main">
+  <p:cSld name="Slide 12">
+    <p:bg>
+      <p:bgPr>
+        <a:solidFill>
+          <a:srgbClr val="101722"/>
+        </a:solidFill>
+      </p:bgPr>
+    </p:bg>
+    <p:spTree>
+      <p:nvGrpSpPr>
+        <p:cNvPr id="1" name=""/>
+        <p:cNvGrpSpPr/>
+        <p:nvPr/>
+      </p:nvGrpSpPr>
+      <p:grpSpPr>
+        <a:xfrm>
+          <a:off x="0" y="0"/>
+          <a:ext cx="0" cy="0"/>
+          <a:chOff x="0" y="0"/>
+          <a:chExt cx="0" cy="0"/>
+        </a:xfrm>
+      </p:grpSpPr>
+      <p:sp>
+        <p:nvSpPr>
+          <p:cNvPr id="2" name="Text 0"/>
+          <p:cNvSpPr/>
+          <p:nvPr/>
+        </p:nvSpPr>
+        <p:spPr>
+          <a:xfrm>
             <a:off x="548640" y="1463040"/>
             <a:ext cx="10058400" cy="457200"/>
           </a:xfrm>
@@ -3478,7 +4884,7 @@
             </a:avLst>
           </a:prstGeom>
           <a:solidFill>
-            <a:srgbClr val="E8A33D"/>
+            <a:srgbClr val="3FB8C4"/>
           </a:solidFill>
           <a:ln/>
         </p:spPr>
@@ -3498,7 +4904,7 @@
                 <a:ea typeface="Courier New" pitchFamily="34" charset="-122"/>
                 <a:cs typeface="Courier New" pitchFamily="34" charset="-120"/>
               </a:rPr>
-              <a:t>3</a:t>
+              <a:t>2</a:t>
             </a:r>
             <a:endParaRPr lang="en-US" sz="2200" dirty="0"/>
           </a:p>
@@ -3537,7 +4943,7 @@
                 <a:ea typeface="Malgun Gothic" pitchFamily="34" charset="-122"/>
                 <a:cs typeface="Malgun Gothic" pitchFamily="34" charset="-120"/>
               </a:rPr>
-              <a:t>MemtestG80이란</a:t>
+              <a:t>하드웨어 구조 · 호스트 ↔ 디바이스</a:t>
             </a:r>
             <a:endParaRPr lang="en-US" sz="2900" dirty="0"/>
           </a:p>
@@ -3551,8 +4957,8 @@
         </p:nvSpPr>
         <p:spPr>
           <a:xfrm>
-            <a:off x="548640" y="1463040"/>
-            <a:ext cx="11064240" cy="548640"/>
+            <a:off x="548640" y="1371600"/>
+            <a:ext cx="11064240" cy="411480"/>
           </a:xfrm>
           <a:prstGeom prst="rect">
             <a:avLst/>
@@ -3568,7 +4974,7 @@
               <a:buNone/>
             </a:pPr>
             <a:r>
-              <a:rPr lang="en-US" sz="1700" dirty="0">
+              <a:rPr lang="en-US" sz="1450" dirty="0">
                 <a:solidFill>
                   <a:srgbClr val="9FB0C4"/>
                 </a:solidFill>
@@ -3576,9 +4982,9 @@
                 <a:ea typeface="Malgun Gothic" pitchFamily="34" charset="-122"/>
                 <a:cs typeface="Malgun Gothic" pitchFamily="34" charset="-120"/>
               </a:rPr>
-              <a:t>Stanford Folding@home 팀이 만든, Memtest86의 메모리 테스트를 CUDA 커널로 이식한 도구 (2009, LGPL v3).</a:t>
-            </a:r>
-            <a:endParaRPr lang="en-US" sz="1700" dirty="0"/>
+              <a:t>CPU(호스트)와 GPU(디바이스)는 물리적으로 분리된 프로세서·메모리를 가지며, PCIe 버스로 연결됩니다.</a:t>
+            </a:r>
+            <a:endParaRPr lang="en-US" sz="1450" dirty="0"/>
           </a:p>
         </p:txBody>
       </p:sp>
@@ -3590,18 +4996,23 @@
         </p:nvSpPr>
         <p:spPr>
           <a:xfrm>
-            <a:off x="548640" y="2148840"/>
-            <a:ext cx="3444240" cy="1920240"/>
+            <a:off x="548640" y="1965960"/>
+            <a:ext cx="4206240" cy="3703320"/>
           </a:xfrm>
           <a:prstGeom prst="roundRect">
             <a:avLst>
-              <a:gd name="adj" fmla="val 3810"/>
+              <a:gd name="adj" fmla="val 1975"/>
             </a:avLst>
           </a:prstGeom>
           <a:solidFill>
             <a:srgbClr val="18212E"/>
           </a:solidFill>
-          <a:ln/>
+          <a:ln w="19050">
+            <a:solidFill>
+              <a:srgbClr val="3FB8C4"/>
+            </a:solidFill>
+            <a:prstDash val="solid"/>
+          </a:ln>
         </p:spPr>
       </p:sp>
       <p:sp>
@@ -3612,8 +5023,8 @@
         </p:nvSpPr>
         <p:spPr>
           <a:xfrm>
-            <a:off x="777240" y="2331720"/>
-            <a:ext cx="2987040" cy="457200"/>
+            <a:off x="777240" y="2103120"/>
+            <a:ext cx="3749040" cy="365760"/>
           </a:xfrm>
           <a:prstGeom prst="rect">
             <a:avLst/>
@@ -3629,7 +5040,7 @@
               <a:buNone/>
             </a:pPr>
             <a:r>
-              <a:rPr lang="en-US" sz="1800" b="1" dirty="0">
+              <a:rPr lang="en-US" sz="1500" b="1" dirty="0">
                 <a:solidFill>
                   <a:srgbClr val="3FB8C4"/>
                 </a:solidFill>
@@ -3637,86 +5048,418 @@
                 <a:ea typeface="Malgun Gothic" pitchFamily="34" charset="-122"/>
                 <a:cs typeface="Malgun Gothic" pitchFamily="34" charset="-120"/>
               </a:rPr>
-              <a:t>라이브러리 우선</a:t>
-            </a:r>
-            <a:endParaRPr lang="en-US" sz="1800" dirty="0"/>
-          </a:p>
-        </p:txBody>
-      </p:sp>
-      <p:sp>
-        <p:nvSpPr>
-          <p:cNvPr id="7" name="Text 5"/>
-          <p:cNvSpPr/>
-          <p:nvPr/>
-        </p:nvSpPr>
-        <p:spPr>
-          <a:xfrm>
-            <a:off x="777240" y="2834640"/>
-            <a:ext cx="2987040" cy="1143000"/>
-          </a:xfrm>
-          <a:prstGeom prst="rect">
-            <a:avLst/>
-          </a:prstGeom>
-          <a:noFill/>
-          <a:ln/>
-        </p:spPr>
-        <p:txBody>
-          <a:bodyPr wrap="square" lIns="0" tIns="0" rIns="0" bIns="0" rtlCol="0" anchor="t"/>
-          <a:lstStyle/>
-          <a:p>
-            <a:pPr indent="0" marL="0">
-              <a:lnSpc>
-                <a:spcPct val="115000"/>
-              </a:lnSpc>
-              <a:buNone/>
-            </a:pPr>
-            <a:r>
-              <a:rPr lang="en-US" sz="1400" dirty="0">
-                <a:solidFill>
-                  <a:srgbClr val="E7EDF5"/>
-                </a:solidFill>
-                <a:latin typeface="Malgun Gothic" pitchFamily="34" charset="0"/>
-                <a:ea typeface="Malgun Gothic" pitchFamily="34" charset="-122"/>
-                <a:cs typeface="Malgun Gothic" pitchFamily="34" charset="-120"/>
-              </a:rPr>
-              <a:t>개발자가 자기 코드에 링크해 실행 전 GPU 건전성 검증. 핵심 API = memtestG80_core.h</a:t>
-            </a:r>
-            <a:endParaRPr lang="en-US" sz="1400" dirty="0"/>
-          </a:p>
-        </p:txBody>
-      </p:sp>
-      <p:sp>
-        <p:nvSpPr>
-          <p:cNvPr id="8" name="Shape 6"/>
-          <p:cNvSpPr/>
-          <p:nvPr/>
-        </p:nvSpPr>
-        <p:spPr>
-          <a:xfrm>
-            <a:off x="4358640" y="2148840"/>
-            <a:ext cx="3444240" cy="1920240"/>
+              <a:t>호스트 (CPU)</a:t>
+            </a:r>
+            <a:endParaRPr lang="en-US" sz="1500" dirty="0"/>
+          </a:p>
+        </p:txBody>
+      </p:sp>
+      <p:sp>
+        <p:nvSpPr>
+          <p:cNvPr id="7" name="Shape 5"/>
+          <p:cNvSpPr/>
+          <p:nvPr/>
+        </p:nvSpPr>
+        <p:spPr>
+          <a:xfrm>
+            <a:off x="868680" y="2606040"/>
+            <a:ext cx="1691640" cy="731520"/>
           </a:xfrm>
           <a:prstGeom prst="roundRect">
             <a:avLst>
-              <a:gd name="adj" fmla="val 3810"/>
+              <a:gd name="adj" fmla="val 6250"/>
+            </a:avLst>
+          </a:prstGeom>
+          <a:solidFill>
+            <a:srgbClr val="0B1119"/>
+          </a:solidFill>
+          <a:ln w="19050">
+            <a:solidFill>
+              <a:srgbClr val="2C3A4E"/>
+            </a:solidFill>
+            <a:prstDash val="solid"/>
+          </a:ln>
+        </p:spPr>
+      </p:sp>
+      <p:sp>
+        <p:nvSpPr>
+          <p:cNvPr id="8" name="Text 6"/>
+          <p:cNvSpPr/>
+          <p:nvPr/>
+        </p:nvSpPr>
+        <p:spPr>
+          <a:xfrm>
+            <a:off x="978408" y="2697480"/>
+            <a:ext cx="1472184" cy="548640"/>
+          </a:xfrm>
+          <a:prstGeom prst="rect">
+            <a:avLst/>
+          </a:prstGeom>
+          <a:noFill/>
+          <a:ln/>
+        </p:spPr>
+        <p:txBody>
+          <a:bodyPr wrap="square" lIns="0" tIns="0" rIns="0" bIns="0" rtlCol="0" anchor="ctr"/>
+          <a:lstStyle/>
+          <a:p>
+            <a:pPr algn="ctr" indent="0" marL="0">
+              <a:buNone/>
+            </a:pPr>
+            <a:r>
+              <a:rPr lang="en-US" sz="1400" b="1" dirty="0">
+                <a:solidFill>
+                  <a:srgbClr val="2C3A4E"/>
+                </a:solidFill>
+                <a:latin typeface="Malgun Gothic" pitchFamily="34" charset="0"/>
+                <a:ea typeface="Malgun Gothic" pitchFamily="34" charset="-122"/>
+                <a:cs typeface="Malgun Gothic" pitchFamily="34" charset="-120"/>
+              </a:rPr>
+              <a:t>코어</a:t>
+            </a:r>
+            <a:endParaRPr lang="en-US" sz="1400" dirty="0"/>
+          </a:p>
+        </p:txBody>
+      </p:sp>
+      <p:sp>
+        <p:nvSpPr>
+          <p:cNvPr id="9" name="Shape 7"/>
+          <p:cNvSpPr/>
+          <p:nvPr/>
+        </p:nvSpPr>
+        <p:spPr>
+          <a:xfrm>
+            <a:off x="2743200" y="2606040"/>
+            <a:ext cx="1691640" cy="731520"/>
+          </a:xfrm>
+          <a:prstGeom prst="roundRect">
+            <a:avLst>
+              <a:gd name="adj" fmla="val 6250"/>
+            </a:avLst>
+          </a:prstGeom>
+          <a:solidFill>
+            <a:srgbClr val="0B1119"/>
+          </a:solidFill>
+          <a:ln w="19050">
+            <a:solidFill>
+              <a:srgbClr val="2C3A4E"/>
+            </a:solidFill>
+            <a:prstDash val="solid"/>
+          </a:ln>
+        </p:spPr>
+      </p:sp>
+      <p:sp>
+        <p:nvSpPr>
+          <p:cNvPr id="10" name="Text 8"/>
+          <p:cNvSpPr/>
+          <p:nvPr/>
+        </p:nvSpPr>
+        <p:spPr>
+          <a:xfrm>
+            <a:off x="2852928" y="2697480"/>
+            <a:ext cx="1472184" cy="548640"/>
+          </a:xfrm>
+          <a:prstGeom prst="rect">
+            <a:avLst/>
+          </a:prstGeom>
+          <a:noFill/>
+          <a:ln/>
+        </p:spPr>
+        <p:txBody>
+          <a:bodyPr wrap="square" lIns="0" tIns="0" rIns="0" bIns="0" rtlCol="0" anchor="ctr"/>
+          <a:lstStyle/>
+          <a:p>
+            <a:pPr algn="ctr" indent="0" marL="0">
+              <a:buNone/>
+            </a:pPr>
+            <a:r>
+              <a:rPr lang="en-US" sz="1400" b="1" dirty="0">
+                <a:solidFill>
+                  <a:srgbClr val="2C3A4E"/>
+                </a:solidFill>
+                <a:latin typeface="Malgun Gothic" pitchFamily="34" charset="0"/>
+                <a:ea typeface="Malgun Gothic" pitchFamily="34" charset="-122"/>
+                <a:cs typeface="Malgun Gothic" pitchFamily="34" charset="-120"/>
+              </a:rPr>
+              <a:t>코어</a:t>
+            </a:r>
+            <a:endParaRPr lang="en-US" sz="1400" dirty="0"/>
+          </a:p>
+        </p:txBody>
+      </p:sp>
+      <p:sp>
+        <p:nvSpPr>
+          <p:cNvPr id="11" name="Shape 9"/>
+          <p:cNvSpPr/>
+          <p:nvPr/>
+        </p:nvSpPr>
+        <p:spPr>
+          <a:xfrm>
+            <a:off x="868680" y="3474720"/>
+            <a:ext cx="1691640" cy="731520"/>
+          </a:xfrm>
+          <a:prstGeom prst="roundRect">
+            <a:avLst>
+              <a:gd name="adj" fmla="val 6250"/>
+            </a:avLst>
+          </a:prstGeom>
+          <a:solidFill>
+            <a:srgbClr val="0B1119"/>
+          </a:solidFill>
+          <a:ln w="19050">
+            <a:solidFill>
+              <a:srgbClr val="2C3A4E"/>
+            </a:solidFill>
+            <a:prstDash val="solid"/>
+          </a:ln>
+        </p:spPr>
+      </p:sp>
+      <p:sp>
+        <p:nvSpPr>
+          <p:cNvPr id="12" name="Text 10"/>
+          <p:cNvSpPr/>
+          <p:nvPr/>
+        </p:nvSpPr>
+        <p:spPr>
+          <a:xfrm>
+            <a:off x="978408" y="3566160"/>
+            <a:ext cx="1472184" cy="548640"/>
+          </a:xfrm>
+          <a:prstGeom prst="rect">
+            <a:avLst/>
+          </a:prstGeom>
+          <a:noFill/>
+          <a:ln/>
+        </p:spPr>
+        <p:txBody>
+          <a:bodyPr wrap="square" lIns="0" tIns="0" rIns="0" bIns="0" rtlCol="0" anchor="ctr"/>
+          <a:lstStyle/>
+          <a:p>
+            <a:pPr algn="ctr" indent="0" marL="0">
+              <a:buNone/>
+            </a:pPr>
+            <a:r>
+              <a:rPr lang="en-US" sz="1400" b="1" dirty="0">
+                <a:solidFill>
+                  <a:srgbClr val="2C3A4E"/>
+                </a:solidFill>
+                <a:latin typeface="Malgun Gothic" pitchFamily="34" charset="0"/>
+                <a:ea typeface="Malgun Gothic" pitchFamily="34" charset="-122"/>
+                <a:cs typeface="Malgun Gothic" pitchFamily="34" charset="-120"/>
+              </a:rPr>
+              <a:t>코어</a:t>
+            </a:r>
+            <a:endParaRPr lang="en-US" sz="1400" dirty="0"/>
+          </a:p>
+        </p:txBody>
+      </p:sp>
+      <p:sp>
+        <p:nvSpPr>
+          <p:cNvPr id="13" name="Shape 11"/>
+          <p:cNvSpPr/>
+          <p:nvPr/>
+        </p:nvSpPr>
+        <p:spPr>
+          <a:xfrm>
+            <a:off x="2743200" y="3474720"/>
+            <a:ext cx="1691640" cy="731520"/>
+          </a:xfrm>
+          <a:prstGeom prst="roundRect">
+            <a:avLst>
+              <a:gd name="adj" fmla="val 6250"/>
+            </a:avLst>
+          </a:prstGeom>
+          <a:solidFill>
+            <a:srgbClr val="0B1119"/>
+          </a:solidFill>
+          <a:ln w="19050">
+            <a:solidFill>
+              <a:srgbClr val="2C3A4E"/>
+            </a:solidFill>
+            <a:prstDash val="solid"/>
+          </a:ln>
+        </p:spPr>
+      </p:sp>
+      <p:sp>
+        <p:nvSpPr>
+          <p:cNvPr id="14" name="Text 12"/>
+          <p:cNvSpPr/>
+          <p:nvPr/>
+        </p:nvSpPr>
+        <p:spPr>
+          <a:xfrm>
+            <a:off x="2852928" y="3566160"/>
+            <a:ext cx="1472184" cy="548640"/>
+          </a:xfrm>
+          <a:prstGeom prst="rect">
+            <a:avLst/>
+          </a:prstGeom>
+          <a:noFill/>
+          <a:ln/>
+        </p:spPr>
+        <p:txBody>
+          <a:bodyPr wrap="square" lIns="0" tIns="0" rIns="0" bIns="0" rtlCol="0" anchor="ctr"/>
+          <a:lstStyle/>
+          <a:p>
+            <a:pPr algn="ctr" indent="0" marL="0">
+              <a:buNone/>
+            </a:pPr>
+            <a:r>
+              <a:rPr lang="en-US" sz="1400" b="1" dirty="0">
+                <a:solidFill>
+                  <a:srgbClr val="2C3A4E"/>
+                </a:solidFill>
+                <a:latin typeface="Malgun Gothic" pitchFamily="34" charset="0"/>
+                <a:ea typeface="Malgun Gothic" pitchFamily="34" charset="-122"/>
+                <a:cs typeface="Malgun Gothic" pitchFamily="34" charset="-120"/>
+              </a:rPr>
+              <a:t>코어</a:t>
+            </a:r>
+            <a:endParaRPr lang="en-US" sz="1400" dirty="0"/>
+          </a:p>
+        </p:txBody>
+      </p:sp>
+      <p:sp>
+        <p:nvSpPr>
+          <p:cNvPr id="15" name="Shape 13"/>
+          <p:cNvSpPr/>
+          <p:nvPr/>
+        </p:nvSpPr>
+        <p:spPr>
+          <a:xfrm>
+            <a:off x="868680" y="4434840"/>
+            <a:ext cx="3566160" cy="960120"/>
+          </a:xfrm>
+          <a:prstGeom prst="roundRect">
+            <a:avLst>
+              <a:gd name="adj" fmla="val 4762"/>
+            </a:avLst>
+          </a:prstGeom>
+          <a:solidFill>
+            <a:srgbClr val="0B1119"/>
+          </a:solidFill>
+          <a:ln w="19050">
+            <a:solidFill>
+              <a:srgbClr val="9FB0C4"/>
+            </a:solidFill>
+            <a:prstDash val="solid"/>
+          </a:ln>
+        </p:spPr>
+      </p:sp>
+      <p:sp>
+        <p:nvSpPr>
+          <p:cNvPr id="16" name="Text 14"/>
+          <p:cNvSpPr/>
+          <p:nvPr/>
+        </p:nvSpPr>
+        <p:spPr>
+          <a:xfrm>
+            <a:off x="978408" y="4526280"/>
+            <a:ext cx="3346704" cy="365760"/>
+          </a:xfrm>
+          <a:prstGeom prst="rect">
+            <a:avLst/>
+          </a:prstGeom>
+          <a:noFill/>
+          <a:ln/>
+        </p:spPr>
+        <p:txBody>
+          <a:bodyPr wrap="square" lIns="0" tIns="0" rIns="0" bIns="0" rtlCol="0" anchor="t"/>
+          <a:lstStyle/>
+          <a:p>
+            <a:pPr algn="ctr" indent="0" marL="0">
+              <a:buNone/>
+            </a:pPr>
+            <a:r>
+              <a:rPr lang="en-US" sz="1400" b="1" dirty="0">
+                <a:solidFill>
+                  <a:srgbClr val="9FB0C4"/>
+                </a:solidFill>
+                <a:latin typeface="Malgun Gothic" pitchFamily="34" charset="0"/>
+                <a:ea typeface="Malgun Gothic" pitchFamily="34" charset="-122"/>
+                <a:cs typeface="Malgun Gothic" pitchFamily="34" charset="-120"/>
+              </a:rPr>
+              <a:t>시스템 메모리 (RAM)</a:t>
+            </a:r>
+            <a:endParaRPr lang="en-US" sz="1400" dirty="0"/>
+          </a:p>
+        </p:txBody>
+      </p:sp>
+      <p:sp>
+        <p:nvSpPr>
+          <p:cNvPr id="17" name="Text 15"/>
+          <p:cNvSpPr/>
+          <p:nvPr/>
+        </p:nvSpPr>
+        <p:spPr>
+          <a:xfrm>
+            <a:off x="978408" y="4937760"/>
+            <a:ext cx="3346704" cy="384048"/>
+          </a:xfrm>
+          <a:prstGeom prst="rect">
+            <a:avLst/>
+          </a:prstGeom>
+          <a:noFill/>
+          <a:ln/>
+        </p:spPr>
+        <p:txBody>
+          <a:bodyPr wrap="square" lIns="0" tIns="0" rIns="0" bIns="0" rtlCol="0" anchor="ctr"/>
+          <a:lstStyle/>
+          <a:p>
+            <a:pPr algn="ctr" indent="0" marL="0">
+              <a:buNone/>
+            </a:pPr>
+            <a:r>
+              <a:rPr lang="en-US" sz="1050" dirty="0">
+                <a:solidFill>
+                  <a:srgbClr val="9FB0C4"/>
+                </a:solidFill>
+                <a:latin typeface="Courier New" pitchFamily="34" charset="0"/>
+                <a:ea typeface="Courier New" pitchFamily="34" charset="-122"/>
+                <a:cs typeface="Courier New" pitchFamily="34" charset="-120"/>
+              </a:rPr>
+              <a:t>malloc — hostTempMem</a:t>
+            </a:r>
+            <a:endParaRPr lang="en-US" sz="1050" dirty="0"/>
+          </a:p>
+        </p:txBody>
+      </p:sp>
+      <p:sp>
+        <p:nvSpPr>
+          <p:cNvPr id="18" name="Shape 16"/>
+          <p:cNvSpPr/>
+          <p:nvPr/>
+        </p:nvSpPr>
+        <p:spPr>
+          <a:xfrm>
+            <a:off x="6583680" y="1965960"/>
+            <a:ext cx="5029200" cy="3703320"/>
+          </a:xfrm>
+          <a:prstGeom prst="roundRect">
+            <a:avLst>
+              <a:gd name="adj" fmla="val 1975"/>
             </a:avLst>
           </a:prstGeom>
           <a:solidFill>
             <a:srgbClr val="18212E"/>
           </a:solidFill>
-          <a:ln/>
-        </p:spPr>
-      </p:sp>
-      <p:sp>
-        <p:nvSpPr>
-          <p:cNvPr id="9" name="Text 7"/>
-          <p:cNvSpPr/>
-          <p:nvPr/>
-        </p:nvSpPr>
-        <p:spPr>
-          <a:xfrm>
-            <a:off x="4587240" y="2331720"/>
-            <a:ext cx="2987040" cy="457200"/>
+          <a:ln w="19050">
+            <a:solidFill>
+              <a:srgbClr val="E8A33D"/>
+            </a:solidFill>
+            <a:prstDash val="solid"/>
+          </a:ln>
+        </p:spPr>
+      </p:sp>
+      <p:sp>
+        <p:nvSpPr>
+          <p:cNvPr id="19" name="Text 17"/>
+          <p:cNvSpPr/>
+          <p:nvPr/>
+        </p:nvSpPr>
+        <p:spPr>
+          <a:xfrm>
+            <a:off x="6812280" y="2103120"/>
+            <a:ext cx="4572000" cy="365760"/>
           </a:xfrm>
           <a:prstGeom prst="rect">
             <a:avLst/>
@@ -3732,7 +5475,7 @@
               <a:buNone/>
             </a:pPr>
             <a:r>
-              <a:rPr lang="en-US" sz="1800" b="1" dirty="0">
+              <a:rPr lang="en-US" sz="1500" b="1" dirty="0">
                 <a:solidFill>
                   <a:srgbClr val="E8A33D"/>
                 </a:solidFill>
@@ -3740,86 +5483,49 @@
                 <a:ea typeface="Malgun Gothic" pitchFamily="34" charset="-122"/>
                 <a:cs typeface="Malgun Gothic" pitchFamily="34" charset="-120"/>
               </a:rPr>
-              <a:t>+ CLI 프런트엔드</a:t>
-            </a:r>
-            <a:endParaRPr lang="en-US" sz="1800" dirty="0"/>
-          </a:p>
-        </p:txBody>
-      </p:sp>
-      <p:sp>
-        <p:nvSpPr>
-          <p:cNvPr id="10" name="Text 8"/>
-          <p:cNvSpPr/>
-          <p:nvPr/>
-        </p:nvSpPr>
-        <p:spPr>
-          <a:xfrm>
-            <a:off x="4587240" y="2834640"/>
-            <a:ext cx="2987040" cy="1143000"/>
-          </a:xfrm>
-          <a:prstGeom prst="rect">
-            <a:avLst/>
-          </a:prstGeom>
-          <a:noFill/>
-          <a:ln/>
-        </p:spPr>
-        <p:txBody>
-          <a:bodyPr wrap="square" lIns="0" tIns="0" rIns="0" bIns="0" rtlCol="0" anchor="t"/>
-          <a:lstStyle/>
-          <a:p>
-            <a:pPr indent="0" marL="0">
-              <a:lnSpc>
-                <a:spcPct val="115000"/>
-              </a:lnSpc>
-              <a:buNone/>
-            </a:pPr>
-            <a:r>
-              <a:rPr lang="en-US" sz="1400" dirty="0">
-                <a:solidFill>
-                  <a:srgbClr val="E7EDF5"/>
-                </a:solidFill>
-                <a:latin typeface="Malgun Gothic" pitchFamily="34" charset="0"/>
-                <a:ea typeface="Malgun Gothic" pitchFamily="34" charset="-122"/>
-                <a:cs typeface="Malgun Gothic" pitchFamily="34" charset="-120"/>
-              </a:rPr>
-              <a:t>memtestG80_cli.cu는 사용 예제이자 독립 실행형 테스터. 13종 테스트 순차 실행</a:t>
-            </a:r>
-            <a:endParaRPr lang="en-US" sz="1400" dirty="0"/>
-          </a:p>
-        </p:txBody>
-      </p:sp>
-      <p:sp>
-        <p:nvSpPr>
-          <p:cNvPr id="11" name="Shape 9"/>
-          <p:cNvSpPr/>
-          <p:nvPr/>
-        </p:nvSpPr>
-        <p:spPr>
-          <a:xfrm>
-            <a:off x="8168640" y="2148840"/>
-            <a:ext cx="3444240" cy="1920240"/>
+              <a:t>디바이스 (GPU)</a:t>
+            </a:r>
+            <a:endParaRPr lang="en-US" sz="1500" dirty="0"/>
+          </a:p>
+        </p:txBody>
+      </p:sp>
+      <p:sp>
+        <p:nvSpPr>
+          <p:cNvPr id="20" name="Shape 18"/>
+          <p:cNvSpPr/>
+          <p:nvPr/>
+        </p:nvSpPr>
+        <p:spPr>
+          <a:xfrm>
+            <a:off x="6903720" y="2606040"/>
+            <a:ext cx="1371600" cy="685800"/>
           </a:xfrm>
           <a:prstGeom prst="roundRect">
             <a:avLst>
-              <a:gd name="adj" fmla="val 3810"/>
+              <a:gd name="adj" fmla="val 6667"/>
             </a:avLst>
           </a:prstGeom>
           <a:solidFill>
-            <a:srgbClr val="18212E"/>
+            <a:srgbClr val="0B1119"/>
           </a:solidFill>
-          <a:ln/>
-        </p:spPr>
-      </p:sp>
-      <p:sp>
-        <p:nvSpPr>
-          <p:cNvPr id="12" name="Text 10"/>
-          <p:cNvSpPr/>
-          <p:nvPr/>
-        </p:nvSpPr>
-        <p:spPr>
-          <a:xfrm>
-            <a:off x="8397240" y="2331720"/>
-            <a:ext cx="2987040" cy="457200"/>
+          <a:ln w="19050">
+            <a:solidFill>
+              <a:srgbClr val="2C3A4E"/>
+            </a:solidFill>
+            <a:prstDash val="solid"/>
+          </a:ln>
+        </p:spPr>
+      </p:sp>
+      <p:sp>
+        <p:nvSpPr>
+          <p:cNvPr id="21" name="Text 19"/>
+          <p:cNvSpPr/>
+          <p:nvPr/>
+        </p:nvSpPr>
+        <p:spPr>
+          <a:xfrm>
+            <a:off x="7013448" y="2697480"/>
+            <a:ext cx="1152144" cy="502920"/>
           </a:xfrm>
           <a:prstGeom prst="rect">
             <a:avLst/>
@@ -3831,34 +5537,430 @@
           <a:bodyPr wrap="square" lIns="0" tIns="0" rIns="0" bIns="0" rtlCol="0" anchor="ctr"/>
           <a:lstStyle/>
           <a:p>
+            <a:pPr algn="ctr" indent="0" marL="0">
+              <a:buNone/>
+            </a:pPr>
+            <a:r>
+              <a:rPr lang="en-US" sz="1400" b="1" dirty="0">
+                <a:solidFill>
+                  <a:srgbClr val="2C3A4E"/>
+                </a:solidFill>
+                <a:latin typeface="Malgun Gothic" pitchFamily="34" charset="0"/>
+                <a:ea typeface="Malgun Gothic" pitchFamily="34" charset="-122"/>
+                <a:cs typeface="Malgun Gothic" pitchFamily="34" charset="-120"/>
+              </a:rPr>
+              <a:t>SM</a:t>
+            </a:r>
+            <a:endParaRPr lang="en-US" sz="1400" dirty="0"/>
+          </a:p>
+        </p:txBody>
+      </p:sp>
+      <p:sp>
+        <p:nvSpPr>
+          <p:cNvPr id="22" name="Shape 20"/>
+          <p:cNvSpPr/>
+          <p:nvPr/>
+        </p:nvSpPr>
+        <p:spPr>
+          <a:xfrm>
+            <a:off x="8394192" y="2606040"/>
+            <a:ext cx="1371600" cy="685800"/>
+          </a:xfrm>
+          <a:prstGeom prst="roundRect">
+            <a:avLst>
+              <a:gd name="adj" fmla="val 6667"/>
+            </a:avLst>
+          </a:prstGeom>
+          <a:solidFill>
+            <a:srgbClr val="0B1119"/>
+          </a:solidFill>
+          <a:ln w="19050">
+            <a:solidFill>
+              <a:srgbClr val="2C3A4E"/>
+            </a:solidFill>
+            <a:prstDash val="solid"/>
+          </a:ln>
+        </p:spPr>
+      </p:sp>
+      <p:sp>
+        <p:nvSpPr>
+          <p:cNvPr id="23" name="Text 21"/>
+          <p:cNvSpPr/>
+          <p:nvPr/>
+        </p:nvSpPr>
+        <p:spPr>
+          <a:xfrm>
+            <a:off x="8503920" y="2697480"/>
+            <a:ext cx="1152144" cy="502920"/>
+          </a:xfrm>
+          <a:prstGeom prst="rect">
+            <a:avLst/>
+          </a:prstGeom>
+          <a:noFill/>
+          <a:ln/>
+        </p:spPr>
+        <p:txBody>
+          <a:bodyPr wrap="square" lIns="0" tIns="0" rIns="0" bIns="0" rtlCol="0" anchor="ctr"/>
+          <a:lstStyle/>
+          <a:p>
+            <a:pPr algn="ctr" indent="0" marL="0">
+              <a:buNone/>
+            </a:pPr>
+            <a:r>
+              <a:rPr lang="en-US" sz="1400" b="1" dirty="0">
+                <a:solidFill>
+                  <a:srgbClr val="2C3A4E"/>
+                </a:solidFill>
+                <a:latin typeface="Malgun Gothic" pitchFamily="34" charset="0"/>
+                <a:ea typeface="Malgun Gothic" pitchFamily="34" charset="-122"/>
+                <a:cs typeface="Malgun Gothic" pitchFamily="34" charset="-120"/>
+              </a:rPr>
+              <a:t>SM</a:t>
+            </a:r>
+            <a:endParaRPr lang="en-US" sz="1400" dirty="0"/>
+          </a:p>
+        </p:txBody>
+      </p:sp>
+      <p:sp>
+        <p:nvSpPr>
+          <p:cNvPr id="24" name="Shape 22"/>
+          <p:cNvSpPr/>
+          <p:nvPr/>
+        </p:nvSpPr>
+        <p:spPr>
+          <a:xfrm>
+            <a:off x="9884664" y="2606040"/>
+            <a:ext cx="1371600" cy="685800"/>
+          </a:xfrm>
+          <a:prstGeom prst="roundRect">
+            <a:avLst>
+              <a:gd name="adj" fmla="val 6667"/>
+            </a:avLst>
+          </a:prstGeom>
+          <a:solidFill>
+            <a:srgbClr val="0B1119"/>
+          </a:solidFill>
+          <a:ln w="19050">
+            <a:solidFill>
+              <a:srgbClr val="2C3A4E"/>
+            </a:solidFill>
+            <a:prstDash val="solid"/>
+          </a:ln>
+        </p:spPr>
+      </p:sp>
+      <p:sp>
+        <p:nvSpPr>
+          <p:cNvPr id="25" name="Text 23"/>
+          <p:cNvSpPr/>
+          <p:nvPr/>
+        </p:nvSpPr>
+        <p:spPr>
+          <a:xfrm>
+            <a:off x="9994392" y="2697480"/>
+            <a:ext cx="1152144" cy="502920"/>
+          </a:xfrm>
+          <a:prstGeom prst="rect">
+            <a:avLst/>
+          </a:prstGeom>
+          <a:noFill/>
+          <a:ln/>
+        </p:spPr>
+        <p:txBody>
+          <a:bodyPr wrap="square" lIns="0" tIns="0" rIns="0" bIns="0" rtlCol="0" anchor="ctr"/>
+          <a:lstStyle/>
+          <a:p>
+            <a:pPr algn="ctr" indent="0" marL="0">
+              <a:buNone/>
+            </a:pPr>
+            <a:r>
+              <a:rPr lang="en-US" sz="1400" b="1" dirty="0">
+                <a:solidFill>
+                  <a:srgbClr val="2C3A4E"/>
+                </a:solidFill>
+                <a:latin typeface="Malgun Gothic" pitchFamily="34" charset="0"/>
+                <a:ea typeface="Malgun Gothic" pitchFamily="34" charset="-122"/>
+                <a:cs typeface="Malgun Gothic" pitchFamily="34" charset="-120"/>
+              </a:rPr>
+              <a:t>SM</a:t>
+            </a:r>
+            <a:endParaRPr lang="en-US" sz="1400" dirty="0"/>
+          </a:p>
+        </p:txBody>
+      </p:sp>
+      <p:sp>
+        <p:nvSpPr>
+          <p:cNvPr id="26" name="Shape 24"/>
+          <p:cNvSpPr/>
+          <p:nvPr/>
+        </p:nvSpPr>
+        <p:spPr>
+          <a:xfrm>
+            <a:off x="6903720" y="3429000"/>
+            <a:ext cx="1371600" cy="685800"/>
+          </a:xfrm>
+          <a:prstGeom prst="roundRect">
+            <a:avLst>
+              <a:gd name="adj" fmla="val 6667"/>
+            </a:avLst>
+          </a:prstGeom>
+          <a:solidFill>
+            <a:srgbClr val="0B1119"/>
+          </a:solidFill>
+          <a:ln w="19050">
+            <a:solidFill>
+              <a:srgbClr val="2C3A4E"/>
+            </a:solidFill>
+            <a:prstDash val="solid"/>
+          </a:ln>
+        </p:spPr>
+      </p:sp>
+      <p:sp>
+        <p:nvSpPr>
+          <p:cNvPr id="27" name="Text 25"/>
+          <p:cNvSpPr/>
+          <p:nvPr/>
+        </p:nvSpPr>
+        <p:spPr>
+          <a:xfrm>
+            <a:off x="7013448" y="3520440"/>
+            <a:ext cx="1152144" cy="502920"/>
+          </a:xfrm>
+          <a:prstGeom prst="rect">
+            <a:avLst/>
+          </a:prstGeom>
+          <a:noFill/>
+          <a:ln/>
+        </p:spPr>
+        <p:txBody>
+          <a:bodyPr wrap="square" lIns="0" tIns="0" rIns="0" bIns="0" rtlCol="0" anchor="ctr"/>
+          <a:lstStyle/>
+          <a:p>
+            <a:pPr algn="ctr" indent="0" marL="0">
+              <a:buNone/>
+            </a:pPr>
+            <a:r>
+              <a:rPr lang="en-US" sz="1400" b="1" dirty="0">
+                <a:solidFill>
+                  <a:srgbClr val="2C3A4E"/>
+                </a:solidFill>
+                <a:latin typeface="Malgun Gothic" pitchFamily="34" charset="0"/>
+                <a:ea typeface="Malgun Gothic" pitchFamily="34" charset="-122"/>
+                <a:cs typeface="Malgun Gothic" pitchFamily="34" charset="-120"/>
+              </a:rPr>
+              <a:t>SM</a:t>
+            </a:r>
+            <a:endParaRPr lang="en-US" sz="1400" dirty="0"/>
+          </a:p>
+        </p:txBody>
+      </p:sp>
+      <p:sp>
+        <p:nvSpPr>
+          <p:cNvPr id="28" name="Shape 26"/>
+          <p:cNvSpPr/>
+          <p:nvPr/>
+        </p:nvSpPr>
+        <p:spPr>
+          <a:xfrm>
+            <a:off x="8394192" y="3429000"/>
+            <a:ext cx="1371600" cy="685800"/>
+          </a:xfrm>
+          <a:prstGeom prst="roundRect">
+            <a:avLst>
+              <a:gd name="adj" fmla="val 6667"/>
+            </a:avLst>
+          </a:prstGeom>
+          <a:solidFill>
+            <a:srgbClr val="0B1119"/>
+          </a:solidFill>
+          <a:ln w="19050">
+            <a:solidFill>
+              <a:srgbClr val="2C3A4E"/>
+            </a:solidFill>
+            <a:prstDash val="solid"/>
+          </a:ln>
+        </p:spPr>
+      </p:sp>
+      <p:sp>
+        <p:nvSpPr>
+          <p:cNvPr id="29" name="Text 27"/>
+          <p:cNvSpPr/>
+          <p:nvPr/>
+        </p:nvSpPr>
+        <p:spPr>
+          <a:xfrm>
+            <a:off x="8503920" y="3520440"/>
+            <a:ext cx="1152144" cy="502920"/>
+          </a:xfrm>
+          <a:prstGeom prst="rect">
+            <a:avLst/>
+          </a:prstGeom>
+          <a:noFill/>
+          <a:ln/>
+        </p:spPr>
+        <p:txBody>
+          <a:bodyPr wrap="square" lIns="0" tIns="0" rIns="0" bIns="0" rtlCol="0" anchor="ctr"/>
+          <a:lstStyle/>
+          <a:p>
+            <a:pPr algn="ctr" indent="0" marL="0">
+              <a:buNone/>
+            </a:pPr>
+            <a:r>
+              <a:rPr lang="en-US" sz="1400" b="1" dirty="0">
+                <a:solidFill>
+                  <a:srgbClr val="2C3A4E"/>
+                </a:solidFill>
+                <a:latin typeface="Malgun Gothic" pitchFamily="34" charset="0"/>
+                <a:ea typeface="Malgun Gothic" pitchFamily="34" charset="-122"/>
+                <a:cs typeface="Malgun Gothic" pitchFamily="34" charset="-120"/>
+              </a:rPr>
+              <a:t>SM</a:t>
+            </a:r>
+            <a:endParaRPr lang="en-US" sz="1400" dirty="0"/>
+          </a:p>
+        </p:txBody>
+      </p:sp>
+      <p:sp>
+        <p:nvSpPr>
+          <p:cNvPr id="30" name="Shape 28"/>
+          <p:cNvSpPr/>
+          <p:nvPr/>
+        </p:nvSpPr>
+        <p:spPr>
+          <a:xfrm>
+            <a:off x="9884664" y="3429000"/>
+            <a:ext cx="1371600" cy="685800"/>
+          </a:xfrm>
+          <a:prstGeom prst="roundRect">
+            <a:avLst>
+              <a:gd name="adj" fmla="val 6667"/>
+            </a:avLst>
+          </a:prstGeom>
+          <a:solidFill>
+            <a:srgbClr val="0B1119"/>
+          </a:solidFill>
+          <a:ln w="19050">
+            <a:solidFill>
+              <a:srgbClr val="2C3A4E"/>
+            </a:solidFill>
+            <a:prstDash val="solid"/>
+          </a:ln>
+        </p:spPr>
+      </p:sp>
+      <p:sp>
+        <p:nvSpPr>
+          <p:cNvPr id="31" name="Text 29"/>
+          <p:cNvSpPr/>
+          <p:nvPr/>
+        </p:nvSpPr>
+        <p:spPr>
+          <a:xfrm>
+            <a:off x="9994392" y="3520440"/>
+            <a:ext cx="1152144" cy="502920"/>
+          </a:xfrm>
+          <a:prstGeom prst="rect">
+            <a:avLst/>
+          </a:prstGeom>
+          <a:noFill/>
+          <a:ln/>
+        </p:spPr>
+        <p:txBody>
+          <a:bodyPr wrap="square" lIns="0" tIns="0" rIns="0" bIns="0" rtlCol="0" anchor="ctr"/>
+          <a:lstStyle/>
+          <a:p>
+            <a:pPr algn="ctr" indent="0" marL="0">
+              <a:buNone/>
+            </a:pPr>
+            <a:r>
+              <a:rPr lang="en-US" sz="1400" b="1" dirty="0">
+                <a:solidFill>
+                  <a:srgbClr val="2C3A4E"/>
+                </a:solidFill>
+                <a:latin typeface="Malgun Gothic" pitchFamily="34" charset="0"/>
+                <a:ea typeface="Malgun Gothic" pitchFamily="34" charset="-122"/>
+                <a:cs typeface="Malgun Gothic" pitchFamily="34" charset="-120"/>
+              </a:rPr>
+              <a:t>SM</a:t>
+            </a:r>
+            <a:endParaRPr lang="en-US" sz="1400" dirty="0"/>
+          </a:p>
+        </p:txBody>
+      </p:sp>
+      <p:sp>
+        <p:nvSpPr>
+          <p:cNvPr id="32" name="Text 30"/>
+          <p:cNvSpPr/>
+          <p:nvPr/>
+        </p:nvSpPr>
+        <p:spPr>
+          <a:xfrm>
+            <a:off x="6903720" y="4087368"/>
+            <a:ext cx="4389120" cy="274320"/>
+          </a:xfrm>
+          <a:prstGeom prst="rect">
+            <a:avLst/>
+          </a:prstGeom>
+          <a:noFill/>
+          <a:ln/>
+        </p:spPr>
+        <p:txBody>
+          <a:bodyPr wrap="square" lIns="0" tIns="0" rIns="0" bIns="0" rtlCol="0" anchor="ctr"/>
+          <a:lstStyle/>
+          <a:p>
             <a:pPr indent="0" marL="0">
               <a:buNone/>
             </a:pPr>
             <a:r>
-              <a:rPr lang="en-US" sz="1800" b="1" dirty="0">
-                <a:solidFill>
-                  <a:srgbClr val="3FB8C4"/>
-                </a:solidFill>
-                <a:latin typeface="Malgun Gothic" pitchFamily="34" charset="0"/>
-                <a:ea typeface="Malgun Gothic" pitchFamily="34" charset="-122"/>
-                <a:cs typeface="Malgun Gothic" pitchFamily="34" charset="-120"/>
-              </a:rPr>
-              <a:t>단일 GPU · 이식성</a:t>
-            </a:r>
-            <a:endParaRPr lang="en-US" sz="1800" dirty="0"/>
-          </a:p>
-        </p:txBody>
-      </p:sp>
-      <p:sp>
-        <p:nvSpPr>
-          <p:cNvPr id="13" name="Text 11"/>
-          <p:cNvSpPr/>
-          <p:nvPr/>
-        </p:nvSpPr>
-        <p:spPr>
-          <a:xfrm>
-            <a:off x="8397240" y="2834640"/>
-            <a:ext cx="2987040" cy="1143000"/>
+              <a:rPr lang="en-US" sz="1050" i="1" dirty="0">
+                <a:solidFill>
+                  <a:srgbClr val="9FB0C4"/>
+                </a:solidFill>
+                <a:latin typeface="Malgun Gothic" pitchFamily="34" charset="0"/>
+                <a:ea typeface="Malgun Gothic" pitchFamily="34" charset="-122"/>
+                <a:cs typeface="Malgun Gothic" pitchFamily="34" charset="-120"/>
+              </a:rPr>
+              <a:t>… 수십 개의 SM (수천 코어)</a:t>
+            </a:r>
+            <a:endParaRPr lang="en-US" sz="1050" dirty="0"/>
+          </a:p>
+        </p:txBody>
+      </p:sp>
+      <p:sp>
+        <p:nvSpPr>
+          <p:cNvPr id="33" name="Shape 31"/>
+          <p:cNvSpPr/>
+          <p:nvPr/>
+        </p:nvSpPr>
+        <p:spPr>
+          <a:xfrm>
+            <a:off x="6903720" y="4434840"/>
+            <a:ext cx="4389120" cy="960120"/>
+          </a:xfrm>
+          <a:prstGeom prst="roundRect">
+            <a:avLst>
+              <a:gd name="adj" fmla="val 4762"/>
+            </a:avLst>
+          </a:prstGeom>
+          <a:solidFill>
+            <a:srgbClr val="241A16"/>
+          </a:solidFill>
+          <a:ln w="19050">
+            <a:solidFill>
+              <a:srgbClr val="E8A33D"/>
+            </a:solidFill>
+            <a:prstDash val="solid"/>
+          </a:ln>
+        </p:spPr>
+      </p:sp>
+      <p:sp>
+        <p:nvSpPr>
+          <p:cNvPr id="34" name="Text 32"/>
+          <p:cNvSpPr/>
+          <p:nvPr/>
+        </p:nvSpPr>
+        <p:spPr>
+          <a:xfrm>
+            <a:off x="7013448" y="4526280"/>
+            <a:ext cx="4169664" cy="365760"/>
           </a:xfrm>
           <a:prstGeom prst="rect">
             <a:avLst/>
@@ -3870,22 +5972,19 @@
           <a:bodyPr wrap="square" lIns="0" tIns="0" rIns="0" bIns="0" rtlCol="0" anchor="t"/>
           <a:lstStyle/>
           <a:p>
-            <a:pPr indent="0" marL="0">
-              <a:lnSpc>
-                <a:spcPct val="115000"/>
-              </a:lnSpc>
-              <a:buNone/>
-            </a:pPr>
-            <a:r>
-              <a:rPr lang="en-US" sz="1400" dirty="0">
-                <a:solidFill>
-                  <a:srgbClr val="E7EDF5"/>
-                </a:solidFill>
-                <a:latin typeface="Malgun Gothic" pitchFamily="34" charset="0"/>
-                <a:ea typeface="Malgun Gothic" pitchFamily="34" charset="-122"/>
-                <a:cs typeface="Malgun Gothic" pitchFamily="34" charset="-120"/>
-              </a:rPr>
-              <a:t>--gpu N 으로 카드 선택. Linux/macOS/Windows Makefile 제공</a:t>
+            <a:pPr algn="ctr" indent="0" marL="0">
+              <a:buNone/>
+            </a:pPr>
+            <a:r>
+              <a:rPr lang="en-US" sz="1400" b="1" dirty="0">
+                <a:solidFill>
+                  <a:srgbClr val="E8A33D"/>
+                </a:solidFill>
+                <a:latin typeface="Malgun Gothic" pitchFamily="34" charset="0"/>
+                <a:ea typeface="Malgun Gothic" pitchFamily="34" charset="-122"/>
+                <a:cs typeface="Malgun Gothic" pitchFamily="34" charset="-120"/>
+              </a:rPr>
+              <a:t>전역 메모리 (VRAM) — 테스트 대상</a:t>
             </a:r>
             <a:endParaRPr lang="en-US" sz="1400" dirty="0"/>
           </a:p>
@@ -3893,14 +5992,14 @@
       </p:sp>
       <p:sp>
         <p:nvSpPr>
-          <p:cNvPr id="14" name="Text 12"/>
-          <p:cNvSpPr/>
-          <p:nvPr/>
-        </p:nvSpPr>
-        <p:spPr>
-          <a:xfrm>
-            <a:off x="548640" y="4389120"/>
-            <a:ext cx="5532120" cy="640080"/>
+          <p:cNvPr id="35" name="Text 33"/>
+          <p:cNvSpPr/>
+          <p:nvPr/>
+        </p:nvSpPr>
+        <p:spPr>
+          <a:xfrm>
+            <a:off x="7013448" y="4937760"/>
+            <a:ext cx="4169664" cy="384048"/>
           </a:xfrm>
           <a:prstGeom prst="rect">
             <a:avLst/>
@@ -3912,50 +6011,75 @@
           <a:bodyPr wrap="square" lIns="0" tIns="0" rIns="0" bIns="0" rtlCol="0" anchor="ctr"/>
           <a:lstStyle/>
           <a:p>
-            <a:pPr indent="0" marL="0">
-              <a:buNone/>
-            </a:pPr>
-            <a:r>
-              <a:rPr lang="en-US" sz="3400" b="1" dirty="0">
-                <a:solidFill>
-                  <a:srgbClr val="E8A33D"/>
+            <a:pPr algn="ctr" indent="0" marL="0">
+              <a:buNone/>
+            </a:pPr>
+            <a:r>
+              <a:rPr lang="en-US" sz="1050" dirty="0">
+                <a:solidFill>
+                  <a:srgbClr val="9FB0C4"/>
                 </a:solidFill>
                 <a:latin typeface="Courier New" pitchFamily="34" charset="0"/>
                 <a:ea typeface="Courier New" pitchFamily="34" charset="-122"/>
                 <a:cs typeface="Courier New" pitchFamily="34" charset="-120"/>
               </a:rPr>
-              <a:t>1024 × 512</a:t>
-            </a:r>
-            <a:endParaRPr lang="en-US" sz="3400" dirty="0"/>
-          </a:p>
-        </p:txBody>
-      </p:sp>
-      <p:sp>
-        <p:nvSpPr>
-          <p:cNvPr id="15" name="Text 13"/>
-          <p:cNvSpPr/>
-          <p:nvPr/>
-        </p:nvSpPr>
-        <p:spPr>
-          <a:xfrm>
-            <a:off x="548640" y="5074920"/>
-            <a:ext cx="5257800" cy="640080"/>
-          </a:xfrm>
-          <a:prstGeom prst="rect">
-            <a:avLst/>
-          </a:prstGeom>
-          <a:noFill/>
-          <a:ln/>
-        </p:spPr>
-        <p:txBody>
-          <a:bodyPr wrap="square" lIns="0" tIns="0" rIns="0" bIns="0" rtlCol="0" anchor="t"/>
-          <a:lstStyle/>
-          <a:p>
-            <a:pPr indent="0" marL="0">
-              <a:buNone/>
-            </a:pPr>
-            <a:r>
-              <a:rPr lang="en-US" sz="1400" dirty="0">
+              <a:t>cudaMalloc — devTestMem</a:t>
+            </a:r>
+            <a:endParaRPr lang="en-US" sz="1050" dirty="0"/>
+          </a:p>
+        </p:txBody>
+      </p:sp>
+      <p:sp>
+        <p:nvSpPr>
+          <p:cNvPr id="36" name="Shape 34"/>
+          <p:cNvSpPr/>
+          <p:nvPr/>
+        </p:nvSpPr>
+        <p:spPr>
+          <a:xfrm>
+            <a:off x="4800600" y="3817620"/>
+            <a:ext cx="1737360" cy="0"/>
+          </a:xfrm>
+          <a:prstGeom prst="line">
+            <a:avLst/>
+          </a:prstGeom>
+          <a:noFill/>
+          <a:ln w="38100">
+            <a:solidFill>
+              <a:srgbClr val="3FB8C4"/>
+            </a:solidFill>
+            <a:prstDash val="solid"/>
+            <a:headEnd type="triangle"/>
+            <a:tailEnd type="triangle"/>
+          </a:ln>
+        </p:spPr>
+      </p:sp>
+      <p:sp>
+        <p:nvSpPr>
+          <p:cNvPr id="37" name="Text 35"/>
+          <p:cNvSpPr/>
+          <p:nvPr/>
+        </p:nvSpPr>
+        <p:spPr>
+          <a:xfrm>
+            <a:off x="4773168" y="3131820"/>
+            <a:ext cx="1828800" cy="548640"/>
+          </a:xfrm>
+          <a:prstGeom prst="rect">
+            <a:avLst/>
+          </a:prstGeom>
+          <a:noFill/>
+          <a:ln/>
+        </p:spPr>
+        <p:txBody>
+          <a:bodyPr wrap="square" lIns="0" tIns="0" rIns="0" bIns="0" rtlCol="0" anchor="ctr"/>
+          <a:lstStyle/>
+          <a:p>
+            <a:pPr algn="ctr" indent="0" marL="0">
+              <a:buNone/>
+            </a:pPr>
+            <a:r>
+              <a:rPr lang="en-US" sz="1100" dirty="0">
                 <a:solidFill>
                   <a:srgbClr val="9FB0C4"/>
                 </a:solidFill>
@@ -3963,22 +6087,39 @@
                 <a:ea typeface="Malgun Gothic" pitchFamily="34" charset="-122"/>
                 <a:cs typeface="Malgun Gothic" pitchFamily="34" charset="-120"/>
               </a:rPr>
-              <a:t>기본 그리드 — 블록 × 스레드 = 524,288 스레드</a:t>
-            </a:r>
-            <a:endParaRPr lang="en-US" sz="1400" dirty="0"/>
-          </a:p>
-        </p:txBody>
-      </p:sp>
-      <p:sp>
-        <p:nvSpPr>
-          <p:cNvPr id="16" name="Text 14"/>
-          <p:cNvSpPr/>
-          <p:nvPr/>
-        </p:nvSpPr>
-        <p:spPr>
-          <a:xfrm>
-            <a:off x="6080760" y="4389120"/>
-            <a:ext cx="5532120" cy="640080"/>
+              <a:t>PCIe</a:t>
+            </a:r>
+            <a:endParaRPr lang="en-US" sz="1100" dirty="0"/>
+          </a:p>
+          <a:p>
+            <a:pPr algn="ctr" indent="0" marL="0">
+              <a:buNone/>
+            </a:pPr>
+            <a:r>
+              <a:rPr lang="en-US" sz="1100" dirty="0">
+                <a:solidFill>
+                  <a:srgbClr val="9FB0C4"/>
+                </a:solidFill>
+                <a:latin typeface="Malgun Gothic" pitchFamily="34" charset="0"/>
+                <a:ea typeface="Malgun Gothic" pitchFamily="34" charset="-122"/>
+                <a:cs typeface="Malgun Gothic" pitchFamily="34" charset="-120"/>
+              </a:rPr>
+              <a:t>cudaMemcpy</a:t>
+            </a:r>
+            <a:endParaRPr lang="en-US" sz="1100" dirty="0"/>
+          </a:p>
+        </p:txBody>
+      </p:sp>
+      <p:sp>
+        <p:nvSpPr>
+          <p:cNvPr id="38" name="Text 36"/>
+          <p:cNvSpPr/>
+          <p:nvPr/>
+        </p:nvSpPr>
+        <p:spPr>
+          <a:xfrm>
+            <a:off x="548640" y="5852160"/>
+            <a:ext cx="11064240" cy="365760"/>
           </a:xfrm>
           <a:prstGeom prst="rect">
             <a:avLst/>
@@ -3990,50 +6131,11 @@
           <a:bodyPr wrap="square" lIns="0" tIns="0" rIns="0" bIns="0" rtlCol="0" anchor="ctr"/>
           <a:lstStyle/>
           <a:p>
-            <a:pPr indent="0" marL="0">
-              <a:buNone/>
-            </a:pPr>
-            <a:r>
-              <a:rPr lang="en-US" sz="3400" b="1" dirty="0">
-                <a:solidFill>
-                  <a:srgbClr val="3FB8C4"/>
-                </a:solidFill>
-                <a:latin typeface="Courier New" pitchFamily="34" charset="0"/>
-                <a:ea typeface="Courier New" pitchFamily="34" charset="-122"/>
-                <a:cs typeface="Courier New" pitchFamily="34" charset="-120"/>
-              </a:rPr>
-              <a:t>2·N MiB</a:t>
-            </a:r>
-            <a:endParaRPr lang="en-US" sz="3400" dirty="0"/>
-          </a:p>
-        </p:txBody>
-      </p:sp>
-      <p:sp>
-        <p:nvSpPr>
-          <p:cNvPr id="17" name="Text 15"/>
-          <p:cNvSpPr/>
-          <p:nvPr/>
-        </p:nvSpPr>
-        <p:spPr>
-          <a:xfrm>
-            <a:off x="6080760" y="5074920"/>
-            <a:ext cx="5257800" cy="640080"/>
-          </a:xfrm>
-          <a:prstGeom prst="rect">
-            <a:avLst/>
-          </a:prstGeom>
-          <a:noFill/>
-          <a:ln/>
-        </p:spPr>
-        <p:txBody>
-          <a:bodyPr wrap="square" lIns="0" tIns="0" rIns="0" bIns="0" rtlCol="0" anchor="t"/>
-          <a:lstStyle/>
-          <a:p>
-            <a:pPr indent="0" marL="0">
-              <a:buNone/>
-            </a:pPr>
-            <a:r>
-              <a:rPr lang="en-US" sz="1400" dirty="0">
+            <a:pPr algn="ctr" indent="0" marL="0">
+              <a:buNone/>
+            </a:pPr>
+            <a:r>
+              <a:rPr lang="en-US" sz="1300" i="1" dirty="0">
                 <a:solidFill>
                   <a:srgbClr val="9FB0C4"/>
                 </a:solidFill>
@@ -4041,9 +6143,9 @@
                 <a:ea typeface="Malgun Gothic" pitchFamily="34" charset="-122"/>
                 <a:cs typeface="Malgun Gothic" pitchFamily="34" charset="-120"/>
               </a:rPr>
-              <a:t>N words/스레드일 때 한 그리드가 덮는 메모리</a:t>
-            </a:r>
-            <a:endParaRPr lang="en-US" sz="1400" dirty="0"/>
+              <a:t>MemtestG80은 VRAM(전역 메모리)을 검사하고, 오류 수만 PCIe로 CPU에 가져와 합산합니다.</a:t>
+            </a:r>
+            <a:endParaRPr lang="en-US" sz="1300" dirty="0"/>
           </a:p>
         </p:txBody>
       </p:sp>
@@ -4116,7 +6218,7 @@
                 <a:ea typeface="Courier New" pitchFamily="34" charset="-122"/>
                 <a:cs typeface="Courier New" pitchFamily="34" charset="-120"/>
               </a:rPr>
-              <a:t>4</a:t>
+              <a:t>3</a:t>
             </a:r>
             <a:endParaRPr lang="en-US" sz="2200" dirty="0"/>
           </a:p>
@@ -4155,7 +6257,7 @@
                 <a:ea typeface="Malgun Gothic" pitchFamily="34" charset="-122"/>
                 <a:cs typeface="Malgun Gothic" pitchFamily="34" charset="-120"/>
               </a:rPr>
-              <a:t>코드베이스 지도 · 파일은 단 4개</a:t>
+              <a:t>MemtestG80이란</a:t>
             </a:r>
             <a:endParaRPr lang="en-US" sz="2900" dirty="0"/>
           </a:p>
@@ -4163,18 +6265,57 @@
       </p:sp>
       <p:sp>
         <p:nvSpPr>
-          <p:cNvPr id="4" name="Shape 2"/>
-          <p:cNvSpPr/>
-          <p:nvPr/>
-        </p:nvSpPr>
-        <p:spPr>
-          <a:xfrm>
-            <a:off x="548640" y="1645920"/>
-            <a:ext cx="11064240" cy="868680"/>
+          <p:cNvPr id="4" name="Text 2"/>
+          <p:cNvSpPr/>
+          <p:nvPr/>
+        </p:nvSpPr>
+        <p:spPr>
+          <a:xfrm>
+            <a:off x="548640" y="1463040"/>
+            <a:ext cx="11064240" cy="548640"/>
+          </a:xfrm>
+          <a:prstGeom prst="rect">
+            <a:avLst/>
+          </a:prstGeom>
+          <a:noFill/>
+          <a:ln/>
+        </p:spPr>
+        <p:txBody>
+          <a:bodyPr wrap="square" lIns="0" tIns="0" rIns="0" bIns="0" rtlCol="0" anchor="ctr"/>
+          <a:lstStyle/>
+          <a:p>
+            <a:pPr indent="0" marL="0">
+              <a:buNone/>
+            </a:pPr>
+            <a:r>
+              <a:rPr lang="en-US" sz="1700" dirty="0">
+                <a:solidFill>
+                  <a:srgbClr val="9FB0C4"/>
+                </a:solidFill>
+                <a:latin typeface="Malgun Gothic" pitchFamily="34" charset="0"/>
+                <a:ea typeface="Malgun Gothic" pitchFamily="34" charset="-122"/>
+                <a:cs typeface="Malgun Gothic" pitchFamily="34" charset="-120"/>
+              </a:rPr>
+              <a:t>Stanford Folding@home 팀이 만든, Memtest86의 메모리 테스트를 CUDA 커널로 이식한 도구 (2009, LGPL v3).</a:t>
+            </a:r>
+            <a:endParaRPr lang="en-US" sz="1700" dirty="0"/>
+          </a:p>
+        </p:txBody>
+      </p:sp>
+      <p:sp>
+        <p:nvSpPr>
+          <p:cNvPr id="5" name="Shape 3"/>
+          <p:cNvSpPr/>
+          <p:nvPr/>
+        </p:nvSpPr>
+        <p:spPr>
+          <a:xfrm>
+            <a:off x="548640" y="2148840"/>
+            <a:ext cx="3444240" cy="1920240"/>
           </a:xfrm>
           <a:prstGeom prst="roundRect">
             <a:avLst>
-              <a:gd name="adj" fmla="val 8421"/>
+              <a:gd name="adj" fmla="val 3810"/>
             </a:avLst>
           </a:prstGeom>
           <a:solidFill>
@@ -4185,14 +6326,14 @@
       </p:sp>
       <p:sp>
         <p:nvSpPr>
-          <p:cNvPr id="5" name="Text 3"/>
-          <p:cNvSpPr/>
-          <p:nvPr/>
-        </p:nvSpPr>
-        <p:spPr>
-          <a:xfrm>
-            <a:off x="822960" y="1737360"/>
-            <a:ext cx="3931920" cy="658368"/>
+          <p:cNvPr id="6" name="Text 4"/>
+          <p:cNvSpPr/>
+          <p:nvPr/>
+        </p:nvSpPr>
+        <p:spPr>
+          <a:xfrm>
+            <a:off x="777240" y="2331720"/>
+            <a:ext cx="2987040" cy="457200"/>
           </a:xfrm>
           <a:prstGeom prst="rect">
             <a:avLst/>
@@ -4208,7 +6349,294 @@
               <a:buNone/>
             </a:pPr>
             <a:r>
-              <a:rPr lang="en-US" sz="1600" b="1" dirty="0">
+              <a:rPr lang="en-US" sz="1800" b="1" dirty="0">
+                <a:solidFill>
+                  <a:srgbClr val="3FB8C4"/>
+                </a:solidFill>
+                <a:latin typeface="Malgun Gothic" pitchFamily="34" charset="0"/>
+                <a:ea typeface="Malgun Gothic" pitchFamily="34" charset="-122"/>
+                <a:cs typeface="Malgun Gothic" pitchFamily="34" charset="-120"/>
+              </a:rPr>
+              <a:t>라이브러리 우선</a:t>
+            </a:r>
+            <a:endParaRPr lang="en-US" sz="1800" dirty="0"/>
+          </a:p>
+        </p:txBody>
+      </p:sp>
+      <p:sp>
+        <p:nvSpPr>
+          <p:cNvPr id="7" name="Text 5"/>
+          <p:cNvSpPr/>
+          <p:nvPr/>
+        </p:nvSpPr>
+        <p:spPr>
+          <a:xfrm>
+            <a:off x="777240" y="2834640"/>
+            <a:ext cx="2987040" cy="1143000"/>
+          </a:xfrm>
+          <a:prstGeom prst="rect">
+            <a:avLst/>
+          </a:prstGeom>
+          <a:noFill/>
+          <a:ln/>
+        </p:spPr>
+        <p:txBody>
+          <a:bodyPr wrap="square" lIns="0" tIns="0" rIns="0" bIns="0" rtlCol="0" anchor="t"/>
+          <a:lstStyle/>
+          <a:p>
+            <a:pPr indent="0" marL="0">
+              <a:lnSpc>
+                <a:spcPct val="115000"/>
+              </a:lnSpc>
+              <a:buNone/>
+            </a:pPr>
+            <a:r>
+              <a:rPr lang="en-US" sz="1400" dirty="0">
+                <a:solidFill>
+                  <a:srgbClr val="E7EDF5"/>
+                </a:solidFill>
+                <a:latin typeface="Malgun Gothic" pitchFamily="34" charset="0"/>
+                <a:ea typeface="Malgun Gothic" pitchFamily="34" charset="-122"/>
+                <a:cs typeface="Malgun Gothic" pitchFamily="34" charset="-120"/>
+              </a:rPr>
+              <a:t>개발자가 자기 코드에 링크해 실행 전 GPU 건전성 검증. 핵심 API = memtestG80_core.h</a:t>
+            </a:r>
+            <a:endParaRPr lang="en-US" sz="1400" dirty="0"/>
+          </a:p>
+        </p:txBody>
+      </p:sp>
+      <p:sp>
+        <p:nvSpPr>
+          <p:cNvPr id="8" name="Shape 6"/>
+          <p:cNvSpPr/>
+          <p:nvPr/>
+        </p:nvSpPr>
+        <p:spPr>
+          <a:xfrm>
+            <a:off x="4358640" y="2148840"/>
+            <a:ext cx="3444240" cy="1920240"/>
+          </a:xfrm>
+          <a:prstGeom prst="roundRect">
+            <a:avLst>
+              <a:gd name="adj" fmla="val 3810"/>
+            </a:avLst>
+          </a:prstGeom>
+          <a:solidFill>
+            <a:srgbClr val="18212E"/>
+          </a:solidFill>
+          <a:ln/>
+        </p:spPr>
+      </p:sp>
+      <p:sp>
+        <p:nvSpPr>
+          <p:cNvPr id="9" name="Text 7"/>
+          <p:cNvSpPr/>
+          <p:nvPr/>
+        </p:nvSpPr>
+        <p:spPr>
+          <a:xfrm>
+            <a:off x="4587240" y="2331720"/>
+            <a:ext cx="2987040" cy="457200"/>
+          </a:xfrm>
+          <a:prstGeom prst="rect">
+            <a:avLst/>
+          </a:prstGeom>
+          <a:noFill/>
+          <a:ln/>
+        </p:spPr>
+        <p:txBody>
+          <a:bodyPr wrap="square" lIns="0" tIns="0" rIns="0" bIns="0" rtlCol="0" anchor="ctr"/>
+          <a:lstStyle/>
+          <a:p>
+            <a:pPr indent="0" marL="0">
+              <a:buNone/>
+            </a:pPr>
+            <a:r>
+              <a:rPr lang="en-US" sz="1800" b="1" dirty="0">
+                <a:solidFill>
+                  <a:srgbClr val="E8A33D"/>
+                </a:solidFill>
+                <a:latin typeface="Malgun Gothic" pitchFamily="34" charset="0"/>
+                <a:ea typeface="Malgun Gothic" pitchFamily="34" charset="-122"/>
+                <a:cs typeface="Malgun Gothic" pitchFamily="34" charset="-120"/>
+              </a:rPr>
+              <a:t>+ CLI 프런트엔드</a:t>
+            </a:r>
+            <a:endParaRPr lang="en-US" sz="1800" dirty="0"/>
+          </a:p>
+        </p:txBody>
+      </p:sp>
+      <p:sp>
+        <p:nvSpPr>
+          <p:cNvPr id="10" name="Text 8"/>
+          <p:cNvSpPr/>
+          <p:nvPr/>
+        </p:nvSpPr>
+        <p:spPr>
+          <a:xfrm>
+            <a:off x="4587240" y="2834640"/>
+            <a:ext cx="2987040" cy="1143000"/>
+          </a:xfrm>
+          <a:prstGeom prst="rect">
+            <a:avLst/>
+          </a:prstGeom>
+          <a:noFill/>
+          <a:ln/>
+        </p:spPr>
+        <p:txBody>
+          <a:bodyPr wrap="square" lIns="0" tIns="0" rIns="0" bIns="0" rtlCol="0" anchor="t"/>
+          <a:lstStyle/>
+          <a:p>
+            <a:pPr indent="0" marL="0">
+              <a:lnSpc>
+                <a:spcPct val="115000"/>
+              </a:lnSpc>
+              <a:buNone/>
+            </a:pPr>
+            <a:r>
+              <a:rPr lang="en-US" sz="1400" dirty="0">
+                <a:solidFill>
+                  <a:srgbClr val="E7EDF5"/>
+                </a:solidFill>
+                <a:latin typeface="Malgun Gothic" pitchFamily="34" charset="0"/>
+                <a:ea typeface="Malgun Gothic" pitchFamily="34" charset="-122"/>
+                <a:cs typeface="Malgun Gothic" pitchFamily="34" charset="-120"/>
+              </a:rPr>
+              <a:t>memtestG80_cli.cu는 사용 예제이자 독립 실행형 테스터. 13종 테스트 순차 실행</a:t>
+            </a:r>
+            <a:endParaRPr lang="en-US" sz="1400" dirty="0"/>
+          </a:p>
+        </p:txBody>
+      </p:sp>
+      <p:sp>
+        <p:nvSpPr>
+          <p:cNvPr id="11" name="Shape 9"/>
+          <p:cNvSpPr/>
+          <p:nvPr/>
+        </p:nvSpPr>
+        <p:spPr>
+          <a:xfrm>
+            <a:off x="8168640" y="2148840"/>
+            <a:ext cx="3444240" cy="1920240"/>
+          </a:xfrm>
+          <a:prstGeom prst="roundRect">
+            <a:avLst>
+              <a:gd name="adj" fmla="val 3810"/>
+            </a:avLst>
+          </a:prstGeom>
+          <a:solidFill>
+            <a:srgbClr val="18212E"/>
+          </a:solidFill>
+          <a:ln/>
+        </p:spPr>
+      </p:sp>
+      <p:sp>
+        <p:nvSpPr>
+          <p:cNvPr id="12" name="Text 10"/>
+          <p:cNvSpPr/>
+          <p:nvPr/>
+        </p:nvSpPr>
+        <p:spPr>
+          <a:xfrm>
+            <a:off x="8397240" y="2331720"/>
+            <a:ext cx="2987040" cy="457200"/>
+          </a:xfrm>
+          <a:prstGeom prst="rect">
+            <a:avLst/>
+          </a:prstGeom>
+          <a:noFill/>
+          <a:ln/>
+        </p:spPr>
+        <p:txBody>
+          <a:bodyPr wrap="square" lIns="0" tIns="0" rIns="0" bIns="0" rtlCol="0" anchor="ctr"/>
+          <a:lstStyle/>
+          <a:p>
+            <a:pPr indent="0" marL="0">
+              <a:buNone/>
+            </a:pPr>
+            <a:r>
+              <a:rPr lang="en-US" sz="1800" b="1" dirty="0">
+                <a:solidFill>
+                  <a:srgbClr val="3FB8C4"/>
+                </a:solidFill>
+                <a:latin typeface="Malgun Gothic" pitchFamily="34" charset="0"/>
+                <a:ea typeface="Malgun Gothic" pitchFamily="34" charset="-122"/>
+                <a:cs typeface="Malgun Gothic" pitchFamily="34" charset="-120"/>
+              </a:rPr>
+              <a:t>단일 GPU · 이식성</a:t>
+            </a:r>
+            <a:endParaRPr lang="en-US" sz="1800" dirty="0"/>
+          </a:p>
+        </p:txBody>
+      </p:sp>
+      <p:sp>
+        <p:nvSpPr>
+          <p:cNvPr id="13" name="Text 11"/>
+          <p:cNvSpPr/>
+          <p:nvPr/>
+        </p:nvSpPr>
+        <p:spPr>
+          <a:xfrm>
+            <a:off x="8397240" y="2834640"/>
+            <a:ext cx="2987040" cy="1143000"/>
+          </a:xfrm>
+          <a:prstGeom prst="rect">
+            <a:avLst/>
+          </a:prstGeom>
+          <a:noFill/>
+          <a:ln/>
+        </p:spPr>
+        <p:txBody>
+          <a:bodyPr wrap="square" lIns="0" tIns="0" rIns="0" bIns="0" rtlCol="0" anchor="t"/>
+          <a:lstStyle/>
+          <a:p>
+            <a:pPr indent="0" marL="0">
+              <a:lnSpc>
+                <a:spcPct val="115000"/>
+              </a:lnSpc>
+              <a:buNone/>
+            </a:pPr>
+            <a:r>
+              <a:rPr lang="en-US" sz="1400" dirty="0">
+                <a:solidFill>
+                  <a:srgbClr val="E7EDF5"/>
+                </a:solidFill>
+                <a:latin typeface="Malgun Gothic" pitchFamily="34" charset="0"/>
+                <a:ea typeface="Malgun Gothic" pitchFamily="34" charset="-122"/>
+                <a:cs typeface="Malgun Gothic" pitchFamily="34" charset="-120"/>
+              </a:rPr>
+              <a:t>--gpu N 으로 카드 선택. Linux/macOS/Windows Makefile 제공</a:t>
+            </a:r>
+            <a:endParaRPr lang="en-US" sz="1400" dirty="0"/>
+          </a:p>
+        </p:txBody>
+      </p:sp>
+      <p:sp>
+        <p:nvSpPr>
+          <p:cNvPr id="14" name="Text 12"/>
+          <p:cNvSpPr/>
+          <p:nvPr/>
+        </p:nvSpPr>
+        <p:spPr>
+          <a:xfrm>
+            <a:off x="548640" y="4389120"/>
+            <a:ext cx="5532120" cy="640080"/>
+          </a:xfrm>
+          <a:prstGeom prst="rect">
+            <a:avLst/>
+          </a:prstGeom>
+          <a:noFill/>
+          <a:ln/>
+        </p:spPr>
+        <p:txBody>
+          <a:bodyPr wrap="square" lIns="0" tIns="0" rIns="0" bIns="0" rtlCol="0" anchor="ctr"/>
+          <a:lstStyle/>
+          <a:p>
+            <a:pPr indent="0" marL="0">
+              <a:buNone/>
+            </a:pPr>
+            <a:r>
+              <a:rPr lang="en-US" sz="3400" b="1" dirty="0">
                 <a:solidFill>
                   <a:srgbClr val="E8A33D"/>
                 </a:solidFill>
@@ -4216,22 +6644,61 @@
                 <a:ea typeface="Courier New" pitchFamily="34" charset="-122"/>
                 <a:cs typeface="Courier New" pitchFamily="34" charset="-120"/>
               </a:rPr>
-              <a:t>memtestG80_core.h</a:t>
-            </a:r>
-            <a:endParaRPr lang="en-US" sz="1600" dirty="0"/>
-          </a:p>
-        </p:txBody>
-      </p:sp>
-      <p:sp>
-        <p:nvSpPr>
-          <p:cNvPr id="6" name="Text 4"/>
-          <p:cNvSpPr/>
-          <p:nvPr/>
-        </p:nvSpPr>
-        <p:spPr>
-          <a:xfrm>
-            <a:off x="4937760" y="1737360"/>
-            <a:ext cx="5029200" cy="658368"/>
+              <a:t>1024 × 512</a:t>
+            </a:r>
+            <a:endParaRPr lang="en-US" sz="3400" dirty="0"/>
+          </a:p>
+        </p:txBody>
+      </p:sp>
+      <p:sp>
+        <p:nvSpPr>
+          <p:cNvPr id="15" name="Text 13"/>
+          <p:cNvSpPr/>
+          <p:nvPr/>
+        </p:nvSpPr>
+        <p:spPr>
+          <a:xfrm>
+            <a:off x="548640" y="5074920"/>
+            <a:ext cx="5257800" cy="640080"/>
+          </a:xfrm>
+          <a:prstGeom prst="rect">
+            <a:avLst/>
+          </a:prstGeom>
+          <a:noFill/>
+          <a:ln/>
+        </p:spPr>
+        <p:txBody>
+          <a:bodyPr wrap="square" lIns="0" tIns="0" rIns="0" bIns="0" rtlCol="0" anchor="t"/>
+          <a:lstStyle/>
+          <a:p>
+            <a:pPr indent="0" marL="0">
+              <a:buNone/>
+            </a:pPr>
+            <a:r>
+              <a:rPr lang="en-US" sz="1400" dirty="0">
+                <a:solidFill>
+                  <a:srgbClr val="9FB0C4"/>
+                </a:solidFill>
+                <a:latin typeface="Malgun Gothic" pitchFamily="34" charset="0"/>
+                <a:ea typeface="Malgun Gothic" pitchFamily="34" charset="-122"/>
+                <a:cs typeface="Malgun Gothic" pitchFamily="34" charset="-120"/>
+              </a:rPr>
+              <a:t>기본 그리드 — 블록 × 스레드 = 524,288 스레드</a:t>
+            </a:r>
+            <a:endParaRPr lang="en-US" sz="1400" dirty="0"/>
+          </a:p>
+        </p:txBody>
+      </p:sp>
+      <p:sp>
+        <p:nvSpPr>
+          <p:cNvPr id="16" name="Text 14"/>
+          <p:cNvSpPr/>
+          <p:nvPr/>
+        </p:nvSpPr>
+        <p:spPr>
+          <a:xfrm>
+            <a:off x="6080760" y="4389120"/>
+            <a:ext cx="5532120" cy="640080"/>
           </a:xfrm>
           <a:prstGeom prst="rect">
             <a:avLst/>
@@ -4247,107 +6714,7 @@
               <a:buNone/>
             </a:pPr>
             <a:r>
-              <a:rPr lang="en-US" sz="1450" dirty="0">
-                <a:solidFill>
-                  <a:srgbClr val="E7EDF5"/>
-                </a:solidFill>
-                <a:latin typeface="Malgun Gothic" pitchFamily="34" charset="0"/>
-                <a:ea typeface="Malgun Gothic" pitchFamily="34" charset="-122"/>
-                <a:cs typeface="Malgun Gothic" pitchFamily="34" charset="-120"/>
-              </a:rPr>
-              <a:t>공개 API — memtestState 클래스, 매크로(THREAD_ADDRESS 등)</a:t>
-            </a:r>
-            <a:endParaRPr lang="en-US" sz="1450" dirty="0"/>
-          </a:p>
-        </p:txBody>
-      </p:sp>
-      <p:sp>
-        <p:nvSpPr>
-          <p:cNvPr id="7" name="Text 5"/>
-          <p:cNvSpPr/>
-          <p:nvPr/>
-        </p:nvSpPr>
-        <p:spPr>
-          <a:xfrm>
-            <a:off x="10058400" y="1737360"/>
-            <a:ext cx="1371600" cy="658368"/>
-          </a:xfrm>
-          <a:prstGeom prst="rect">
-            <a:avLst/>
-          </a:prstGeom>
-          <a:noFill/>
-          <a:ln/>
-        </p:spPr>
-        <p:txBody>
-          <a:bodyPr wrap="square" lIns="0" tIns="0" rIns="0" bIns="0" rtlCol="0" anchor="ctr"/>
-          <a:lstStyle/>
-          <a:p>
-            <a:pPr algn="r" indent="0" marL="0">
-              <a:buNone/>
-            </a:pPr>
-            <a:r>
-              <a:rPr lang="en-US" sz="1300" dirty="0">
-                <a:solidFill>
-                  <a:srgbClr val="9FB0C4"/>
-                </a:solidFill>
-                <a:latin typeface="Malgun Gothic" pitchFamily="34" charset="0"/>
-                <a:ea typeface="Malgun Gothic" pitchFamily="34" charset="-122"/>
-                <a:cs typeface="Malgun Gothic" pitchFamily="34" charset="-120"/>
-              </a:rPr>
-              <a:t>세션 1,5</a:t>
-            </a:r>
-            <a:endParaRPr lang="en-US" sz="1300" dirty="0"/>
-          </a:p>
-        </p:txBody>
-      </p:sp>
-      <p:sp>
-        <p:nvSpPr>
-          <p:cNvPr id="8" name="Shape 6"/>
-          <p:cNvSpPr/>
-          <p:nvPr/>
-        </p:nvSpPr>
-        <p:spPr>
-          <a:xfrm>
-            <a:off x="548640" y="2651760"/>
-            <a:ext cx="11064240" cy="868680"/>
-          </a:xfrm>
-          <a:prstGeom prst="roundRect">
-            <a:avLst>
-              <a:gd name="adj" fmla="val 8421"/>
-            </a:avLst>
-          </a:prstGeom>
-          <a:solidFill>
-            <a:srgbClr val="18212E"/>
-          </a:solidFill>
-          <a:ln/>
-        </p:spPr>
-      </p:sp>
-      <p:sp>
-        <p:nvSpPr>
-          <p:cNvPr id="9" name="Text 7"/>
-          <p:cNvSpPr/>
-          <p:nvPr/>
-        </p:nvSpPr>
-        <p:spPr>
-          <a:xfrm>
-            <a:off x="822960" y="2743200"/>
-            <a:ext cx="3931920" cy="658368"/>
-          </a:xfrm>
-          <a:prstGeom prst="rect">
-            <a:avLst/>
-          </a:prstGeom>
-          <a:noFill/>
-          <a:ln/>
-        </p:spPr>
-        <p:txBody>
-          <a:bodyPr wrap="square" lIns="0" tIns="0" rIns="0" bIns="0" rtlCol="0" anchor="ctr"/>
-          <a:lstStyle/>
-          <a:p>
-            <a:pPr indent="0" marL="0">
-              <a:buNone/>
-            </a:pPr>
-            <a:r>
-              <a:rPr lang="en-US" sz="1600" b="1" dirty="0">
+              <a:rPr lang="en-US" sz="3400" b="1" dirty="0">
                 <a:solidFill>
                   <a:srgbClr val="3FB8C4"/>
                 </a:solidFill>
@@ -4355,77 +6722,38 @@
                 <a:ea typeface="Courier New" pitchFamily="34" charset="-122"/>
                 <a:cs typeface="Courier New" pitchFamily="34" charset="-120"/>
               </a:rPr>
-              <a:t>memtestG80_core.cu</a:t>
-            </a:r>
-            <a:endParaRPr lang="en-US" sz="1600" dirty="0"/>
-          </a:p>
-        </p:txBody>
-      </p:sp>
-      <p:sp>
-        <p:nvSpPr>
-          <p:cNvPr id="10" name="Text 8"/>
-          <p:cNvSpPr/>
-          <p:nvPr/>
-        </p:nvSpPr>
-        <p:spPr>
-          <a:xfrm>
-            <a:off x="4937760" y="2743200"/>
-            <a:ext cx="5029200" cy="658368"/>
-          </a:xfrm>
-          <a:prstGeom prst="rect">
-            <a:avLst/>
-          </a:prstGeom>
-          <a:noFill/>
-          <a:ln/>
-        </p:spPr>
-        <p:txBody>
-          <a:bodyPr wrap="square" lIns="0" tIns="0" rIns="0" bIns="0" rtlCol="0" anchor="ctr"/>
+              <a:t>2·N MiB</a:t>
+            </a:r>
+            <a:endParaRPr lang="en-US" sz="3400" dirty="0"/>
+          </a:p>
+        </p:txBody>
+      </p:sp>
+      <p:sp>
+        <p:nvSpPr>
+          <p:cNvPr id="17" name="Text 15"/>
+          <p:cNvSpPr/>
+          <p:nvPr/>
+        </p:nvSpPr>
+        <p:spPr>
+          <a:xfrm>
+            <a:off x="6080760" y="5074920"/>
+            <a:ext cx="5257800" cy="640080"/>
+          </a:xfrm>
+          <a:prstGeom prst="rect">
+            <a:avLst/>
+          </a:prstGeom>
+          <a:noFill/>
+          <a:ln/>
+        </p:spPr>
+        <p:txBody>
+          <a:bodyPr wrap="square" lIns="0" tIns="0" rIns="0" bIns="0" rtlCol="0" anchor="t"/>
           <a:lstStyle/>
           <a:p>
             <a:pPr indent="0" marL="0">
               <a:buNone/>
             </a:pPr>
             <a:r>
-              <a:rPr lang="en-US" sz="1450" dirty="0">
-                <a:solidFill>
-                  <a:srgbClr val="E7EDF5"/>
-                </a:solidFill>
-                <a:latin typeface="Malgun Gothic" pitchFamily="34" charset="0"/>
-                <a:ea typeface="Malgun Gothic" pitchFamily="34" charset="-122"/>
-                <a:cs typeface="Malgun Gothic" pitchFamily="34" charset="-120"/>
-              </a:rPr>
-              <a:t>핵심 — 모든 커널·호스트 함수·리덕션·대역폭</a:t>
-            </a:r>
-            <a:endParaRPr lang="en-US" sz="1450" dirty="0"/>
-          </a:p>
-        </p:txBody>
-      </p:sp>
-      <p:sp>
-        <p:nvSpPr>
-          <p:cNvPr id="11" name="Text 9"/>
-          <p:cNvSpPr/>
-          <p:nvPr/>
-        </p:nvSpPr>
-        <p:spPr>
-          <a:xfrm>
-            <a:off x="10058400" y="2743200"/>
-            <a:ext cx="1371600" cy="658368"/>
-          </a:xfrm>
-          <a:prstGeom prst="rect">
-            <a:avLst/>
-          </a:prstGeom>
-          <a:noFill/>
-          <a:ln/>
-        </p:spPr>
-        <p:txBody>
-          <a:bodyPr wrap="square" lIns="0" tIns="0" rIns="0" bIns="0" rtlCol="0" anchor="ctr"/>
-          <a:lstStyle/>
-          <a:p>
-            <a:pPr algn="r" indent="0" marL="0">
-              <a:buNone/>
-            </a:pPr>
-            <a:r>
-              <a:rPr lang="en-US" sz="1300" dirty="0">
+              <a:rPr lang="en-US" sz="1400" dirty="0">
                 <a:solidFill>
                   <a:srgbClr val="9FB0C4"/>
                 </a:solidFill>
@@ -4433,326 +6761,9 @@
                 <a:ea typeface="Malgun Gothic" pitchFamily="34" charset="-122"/>
                 <a:cs typeface="Malgun Gothic" pitchFamily="34" charset="-120"/>
               </a:rPr>
-              <a:t>세션 1~4</a:t>
-            </a:r>
-            <a:endParaRPr lang="en-US" sz="1300" dirty="0"/>
-          </a:p>
-        </p:txBody>
-      </p:sp>
-      <p:sp>
-        <p:nvSpPr>
-          <p:cNvPr id="12" name="Shape 10"/>
-          <p:cNvSpPr/>
-          <p:nvPr/>
-        </p:nvSpPr>
-        <p:spPr>
-          <a:xfrm>
-            <a:off x="548640" y="3657600"/>
-            <a:ext cx="11064240" cy="868680"/>
-          </a:xfrm>
-          <a:prstGeom prst="roundRect">
-            <a:avLst>
-              <a:gd name="adj" fmla="val 8421"/>
-            </a:avLst>
-          </a:prstGeom>
-          <a:solidFill>
-            <a:srgbClr val="18212E"/>
-          </a:solidFill>
-          <a:ln/>
-        </p:spPr>
-      </p:sp>
-      <p:sp>
-        <p:nvSpPr>
-          <p:cNvPr id="13" name="Text 11"/>
-          <p:cNvSpPr/>
-          <p:nvPr/>
-        </p:nvSpPr>
-        <p:spPr>
-          <a:xfrm>
-            <a:off x="822960" y="3749040"/>
-            <a:ext cx="3931920" cy="658368"/>
-          </a:xfrm>
-          <a:prstGeom prst="rect">
-            <a:avLst/>
-          </a:prstGeom>
-          <a:noFill/>
-          <a:ln/>
-        </p:spPr>
-        <p:txBody>
-          <a:bodyPr wrap="square" lIns="0" tIns="0" rIns="0" bIns="0" rtlCol="0" anchor="ctr"/>
-          <a:lstStyle/>
-          <a:p>
-            <a:pPr indent="0" marL="0">
-              <a:buNone/>
-            </a:pPr>
-            <a:r>
-              <a:rPr lang="en-US" sz="1600" b="1" dirty="0">
-                <a:solidFill>
-                  <a:srgbClr val="E8A33D"/>
-                </a:solidFill>
-                <a:latin typeface="Courier New" pitchFamily="34" charset="0"/>
-                <a:ea typeface="Courier New" pitchFamily="34" charset="-122"/>
-                <a:cs typeface="Courier New" pitchFamily="34" charset="-120"/>
-              </a:rPr>
-              <a:t>memtestG80_cli.cu</a:t>
-            </a:r>
-            <a:endParaRPr lang="en-US" sz="1600" dirty="0"/>
-          </a:p>
-        </p:txBody>
-      </p:sp>
-      <p:sp>
-        <p:nvSpPr>
-          <p:cNvPr id="14" name="Text 12"/>
-          <p:cNvSpPr/>
-          <p:nvPr/>
-        </p:nvSpPr>
-        <p:spPr>
-          <a:xfrm>
-            <a:off x="4937760" y="3749040"/>
-            <a:ext cx="5029200" cy="658368"/>
-          </a:xfrm>
-          <a:prstGeom prst="rect">
-            <a:avLst/>
-          </a:prstGeom>
-          <a:noFill/>
-          <a:ln/>
-        </p:spPr>
-        <p:txBody>
-          <a:bodyPr wrap="square" lIns="0" tIns="0" rIns="0" bIns="0" rtlCol="0" anchor="ctr"/>
-          <a:lstStyle/>
-          <a:p>
-            <a:pPr indent="0" marL="0">
-              <a:buNone/>
-            </a:pPr>
-            <a:r>
-              <a:rPr lang="en-US" sz="1450" dirty="0">
-                <a:solidFill>
-                  <a:srgbClr val="E7EDF5"/>
-                </a:solidFill>
-                <a:latin typeface="Malgun Gothic" pitchFamily="34" charset="0"/>
-                <a:ea typeface="Malgun Gothic" pitchFamily="34" charset="-122"/>
-                <a:cs typeface="Malgun Gothic" pitchFamily="34" charset="-120"/>
-              </a:rPr>
-              <a:t>main() — 13종 테스트를 순차 실행하는 프런트엔드</a:t>
-            </a:r>
-            <a:endParaRPr lang="en-US" sz="1450" dirty="0"/>
-          </a:p>
-        </p:txBody>
-      </p:sp>
-      <p:sp>
-        <p:nvSpPr>
-          <p:cNvPr id="15" name="Text 13"/>
-          <p:cNvSpPr/>
-          <p:nvPr/>
-        </p:nvSpPr>
-        <p:spPr>
-          <a:xfrm>
-            <a:off x="10058400" y="3749040"/>
-            <a:ext cx="1371600" cy="658368"/>
-          </a:xfrm>
-          <a:prstGeom prst="rect">
-            <a:avLst/>
-          </a:prstGeom>
-          <a:noFill/>
-          <a:ln/>
-        </p:spPr>
-        <p:txBody>
-          <a:bodyPr wrap="square" lIns="0" tIns="0" rIns="0" bIns="0" rtlCol="0" anchor="ctr"/>
-          <a:lstStyle/>
-          <a:p>
-            <a:pPr algn="r" indent="0" marL="0">
-              <a:buNone/>
-            </a:pPr>
-            <a:r>
-              <a:rPr lang="en-US" sz="1300" dirty="0">
-                <a:solidFill>
-                  <a:srgbClr val="9FB0C4"/>
-                </a:solidFill>
-                <a:latin typeface="Malgun Gothic" pitchFamily="34" charset="0"/>
-                <a:ea typeface="Malgun Gothic" pitchFamily="34" charset="-122"/>
-                <a:cs typeface="Malgun Gothic" pitchFamily="34" charset="-120"/>
-              </a:rPr>
-              <a:t>세션 0,5</a:t>
-            </a:r>
-            <a:endParaRPr lang="en-US" sz="1300" dirty="0"/>
-          </a:p>
-        </p:txBody>
-      </p:sp>
-      <p:sp>
-        <p:nvSpPr>
-          <p:cNvPr id="16" name="Shape 14"/>
-          <p:cNvSpPr/>
-          <p:nvPr/>
-        </p:nvSpPr>
-        <p:spPr>
-          <a:xfrm>
-            <a:off x="548640" y="4663440"/>
-            <a:ext cx="11064240" cy="868680"/>
-          </a:xfrm>
-          <a:prstGeom prst="roundRect">
-            <a:avLst>
-              <a:gd name="adj" fmla="val 8421"/>
-            </a:avLst>
-          </a:prstGeom>
-          <a:solidFill>
-            <a:srgbClr val="18212E"/>
-          </a:solidFill>
-          <a:ln/>
-        </p:spPr>
-      </p:sp>
-      <p:sp>
-        <p:nvSpPr>
-          <p:cNvPr id="17" name="Text 15"/>
-          <p:cNvSpPr/>
-          <p:nvPr/>
-        </p:nvSpPr>
-        <p:spPr>
-          <a:xfrm>
-            <a:off x="822960" y="4754880"/>
-            <a:ext cx="3931920" cy="658368"/>
-          </a:xfrm>
-          <a:prstGeom prst="rect">
-            <a:avLst/>
-          </a:prstGeom>
-          <a:noFill/>
-          <a:ln/>
-        </p:spPr>
-        <p:txBody>
-          <a:bodyPr wrap="square" lIns="0" tIns="0" rIns="0" bIns="0" rtlCol="0" anchor="ctr"/>
-          <a:lstStyle/>
-          <a:p>
-            <a:pPr indent="0" marL="0">
-              <a:buNone/>
-            </a:pPr>
-            <a:r>
-              <a:rPr lang="en-US" sz="1600" b="1" dirty="0">
-                <a:solidFill>
-                  <a:srgbClr val="6B7D94"/>
-                </a:solidFill>
-                <a:latin typeface="Courier New" pitchFamily="34" charset="0"/>
-                <a:ea typeface="Courier New" pitchFamily="34" charset="-122"/>
-                <a:cs typeface="Courier New" pitchFamily="34" charset="-120"/>
-              </a:rPr>
-              <a:t>ezOptionParser.hpp</a:t>
-            </a:r>
-            <a:endParaRPr lang="en-US" sz="1600" dirty="0"/>
-          </a:p>
-        </p:txBody>
-      </p:sp>
-      <p:sp>
-        <p:nvSpPr>
-          <p:cNvPr id="18" name="Text 16"/>
-          <p:cNvSpPr/>
-          <p:nvPr/>
-        </p:nvSpPr>
-        <p:spPr>
-          <a:xfrm>
-            <a:off x="4937760" y="4754880"/>
-            <a:ext cx="5029200" cy="658368"/>
-          </a:xfrm>
-          <a:prstGeom prst="rect">
-            <a:avLst/>
-          </a:prstGeom>
-          <a:noFill/>
-          <a:ln/>
-        </p:spPr>
-        <p:txBody>
-          <a:bodyPr wrap="square" lIns="0" tIns="0" rIns="0" bIns="0" rtlCol="0" anchor="ctr"/>
-          <a:lstStyle/>
-          <a:p>
-            <a:pPr indent="0" marL="0">
-              <a:buNone/>
-            </a:pPr>
-            <a:r>
-              <a:rPr lang="en-US" sz="1450" dirty="0">
-                <a:solidFill>
-                  <a:srgbClr val="E7EDF5"/>
-                </a:solidFill>
-                <a:latin typeface="Malgun Gothic" pitchFamily="34" charset="0"/>
-                <a:ea typeface="Malgun Gothic" pitchFamily="34" charset="-122"/>
-                <a:cs typeface="Malgun Gothic" pitchFamily="34" charset="-120"/>
-              </a:rPr>
-              <a:t>헤더 전용 명령행 인자 파서 (보조)</a:t>
-            </a:r>
-            <a:endParaRPr lang="en-US" sz="1450" dirty="0"/>
-          </a:p>
-        </p:txBody>
-      </p:sp>
-      <p:sp>
-        <p:nvSpPr>
-          <p:cNvPr id="19" name="Text 17"/>
-          <p:cNvSpPr/>
-          <p:nvPr/>
-        </p:nvSpPr>
-        <p:spPr>
-          <a:xfrm>
-            <a:off x="10058400" y="4754880"/>
-            <a:ext cx="1371600" cy="658368"/>
-          </a:xfrm>
-          <a:prstGeom prst="rect">
-            <a:avLst/>
-          </a:prstGeom>
-          <a:noFill/>
-          <a:ln/>
-        </p:spPr>
-        <p:txBody>
-          <a:bodyPr wrap="square" lIns="0" tIns="0" rIns="0" bIns="0" rtlCol="0" anchor="ctr"/>
-          <a:lstStyle/>
-          <a:p>
-            <a:pPr algn="r" indent="0" marL="0">
-              <a:buNone/>
-            </a:pPr>
-            <a:r>
-              <a:rPr lang="en-US" sz="1300" dirty="0">
-                <a:solidFill>
-                  <a:srgbClr val="9FB0C4"/>
-                </a:solidFill>
-                <a:latin typeface="Malgun Gothic" pitchFamily="34" charset="0"/>
-                <a:ea typeface="Malgun Gothic" pitchFamily="34" charset="-122"/>
-                <a:cs typeface="Malgun Gothic" pitchFamily="34" charset="-120"/>
-              </a:rPr>
-              <a:t>—</a:t>
-            </a:r>
-            <a:endParaRPr lang="en-US" sz="1300" dirty="0"/>
-          </a:p>
-        </p:txBody>
-      </p:sp>
-      <p:sp>
-        <p:nvSpPr>
-          <p:cNvPr id="20" name="Text 18"/>
-          <p:cNvSpPr/>
-          <p:nvPr/>
-        </p:nvSpPr>
-        <p:spPr>
-          <a:xfrm>
-            <a:off x="548640" y="5943600"/>
-            <a:ext cx="11064240" cy="365760"/>
-          </a:xfrm>
-          <a:prstGeom prst="rect">
-            <a:avLst/>
-          </a:prstGeom>
-          <a:noFill/>
-          <a:ln/>
-        </p:spPr>
-        <p:txBody>
-          <a:bodyPr wrap="square" lIns="0" tIns="0" rIns="0" bIns="0" rtlCol="0" anchor="ctr"/>
-          <a:lstStyle/>
-          <a:p>
-            <a:pPr algn="ctr" indent="0" marL="0">
-              <a:buNone/>
-            </a:pPr>
-            <a:r>
-              <a:rPr lang="en-US" sz="1350" i="1" dirty="0">
-                <a:solidFill>
-                  <a:srgbClr val="9FB0C4"/>
-                </a:solidFill>
-                <a:latin typeface="Malgun Gothic" pitchFamily="34" charset="0"/>
-                <a:ea typeface="Malgun Gothic" pitchFamily="34" charset="-122"/>
-                <a:cs typeface="Malgun Gothic" pitchFamily="34" charset="-120"/>
-              </a:rPr>
-              <a:t>500여 줄의 프로덕션 CUDA 코드 — 장난감 예제가 아니라 실제로 GPU 오류를 찾는 도구를 교재로 삼습니다.</a:t>
-            </a:r>
-            <a:endParaRPr lang="en-US" sz="1350" dirty="0"/>
+              <a:t>N words/스레드일 때 한 그리드가 덮는 메모리</a:t>
+            </a:r>
+            <a:endParaRPr lang="en-US" sz="1400" dirty="0"/>
           </a:p>
         </p:txBody>
       </p:sp>
@@ -4825,7 +6836,7 @@
                 <a:ea typeface="Courier New" pitchFamily="34" charset="-122"/>
                 <a:cs typeface="Courier New" pitchFamily="34" charset="-120"/>
               </a:rPr>
-              <a:t>5</a:t>
+              <a:t>4</a:t>
             </a:r>
             <a:endParaRPr lang="en-US" sz="2200" dirty="0"/>
           </a:p>
@@ -4864,7 +6875,7 @@
                 <a:ea typeface="Malgun Gothic" pitchFamily="34" charset="-122"/>
                 <a:cs typeface="Malgun Gothic" pitchFamily="34" charset="-120"/>
               </a:rPr>
-              <a:t>빌드하기 · Makefile</a:t>
+              <a:t>코드베이스 지도 · 파일은 단 4개</a:t>
             </a:r>
             <a:endParaRPr lang="en-US" sz="2900" dirty="0"/>
           </a:p>
@@ -4872,340 +6883,531 @@
       </p:sp>
       <p:sp>
         <p:nvSpPr>
-          <p:cNvPr id="4" name="Text 2"/>
-          <p:cNvSpPr/>
-          <p:nvPr/>
-        </p:nvSpPr>
-        <p:spPr>
-          <a:xfrm>
-            <a:off x="548640" y="1463040"/>
-            <a:ext cx="11064240" cy="457200"/>
-          </a:xfrm>
-          <a:prstGeom prst="rect">
-            <a:avLst/>
-          </a:prstGeom>
-          <a:noFill/>
-          <a:ln/>
-        </p:spPr>
-        <p:txBody>
-          <a:bodyPr wrap="square" lIns="0" tIns="0" rIns="0" bIns="0" rtlCol="0" anchor="ctr"/>
-          <a:lstStyle/>
-          <a:p>
-            <a:pPr indent="0" marL="0">
-              <a:buNone/>
-            </a:pPr>
-            <a:r>
-              <a:rPr lang="en-US" sz="1600" dirty="0">
-                <a:solidFill>
-                  <a:srgbClr val="9FB0C4"/>
-                </a:solidFill>
-                <a:latin typeface="Malgun Gothic" pitchFamily="34" charset="0"/>
-                <a:ea typeface="Malgun Gothic" pitchFamily="34" charset="-122"/>
-                <a:cs typeface="Malgun Gothic" pitchFamily="34" charset="-120"/>
-              </a:rPr>
-              <a:t>CMake가 아니라 OS별 Makefile을 씁니다. nvcc 툴체인이 PATH에 있어야 합니다.</a:t>
-            </a:r>
-            <a:endParaRPr lang="en-US" sz="1600" dirty="0"/>
-          </a:p>
-        </p:txBody>
-      </p:sp>
-      <p:sp>
-        <p:nvSpPr>
-          <p:cNvPr id="5" name="Shape 3"/>
-          <p:cNvSpPr/>
-          <p:nvPr/>
-        </p:nvSpPr>
-        <p:spPr>
-          <a:xfrm>
-            <a:off x="548640" y="1965960"/>
-            <a:ext cx="11064240" cy="1554480"/>
+          <p:cNvPr id="4" name="Shape 2"/>
+          <p:cNvSpPr/>
+          <p:nvPr/>
+        </p:nvSpPr>
+        <p:spPr>
+          <a:xfrm>
+            <a:off x="548640" y="1645920"/>
+            <a:ext cx="11064240" cy="868680"/>
           </a:xfrm>
           <a:prstGeom prst="roundRect">
             <a:avLst>
-              <a:gd name="adj" fmla="val 2941"/>
+              <a:gd name="adj" fmla="val 8421"/>
             </a:avLst>
           </a:prstGeom>
           <a:solidFill>
-            <a:srgbClr val="0B1119"/>
+            <a:srgbClr val="18212E"/>
           </a:solidFill>
-          <a:ln w="12700">
-            <a:solidFill>
-              <a:srgbClr val="2C3A4E"/>
-            </a:solidFill>
-            <a:prstDash val="solid"/>
-          </a:ln>
-        </p:spPr>
-      </p:sp>
-      <p:sp>
-        <p:nvSpPr>
-          <p:cNvPr id="6" name="Text 4"/>
-          <p:cNvSpPr/>
-          <p:nvPr/>
-        </p:nvSpPr>
-        <p:spPr>
-          <a:xfrm>
-            <a:off x="768096" y="2112264"/>
-            <a:ext cx="10625328" cy="1261872"/>
-          </a:xfrm>
-          <a:prstGeom prst="rect">
-            <a:avLst/>
-          </a:prstGeom>
-          <a:noFill/>
-          <a:ln/>
-        </p:spPr>
-        <p:txBody>
-          <a:bodyPr wrap="square" lIns="0" tIns="0" rIns="0" bIns="0" rtlCol="0" anchor="t"/>
-          <a:lstStyle/>
-          <a:p>
-            <a:pPr algn="l" indent="0" marL="0">
-              <a:lnSpc>
-                <a:spcPct val="110000"/>
-              </a:lnSpc>
-              <a:buNone/>
-            </a:pPr>
-            <a:r>
-              <a:rPr lang="en-US" sz="1350" dirty="0">
-                <a:solidFill>
-                  <a:srgbClr val="6B7D94"/>
+          <a:ln/>
+        </p:spPr>
+      </p:sp>
+      <p:sp>
+        <p:nvSpPr>
+          <p:cNvPr id="5" name="Text 3"/>
+          <p:cNvSpPr/>
+          <p:nvPr/>
+        </p:nvSpPr>
+        <p:spPr>
+          <a:xfrm>
+            <a:off x="822960" y="1737360"/>
+            <a:ext cx="3931920" cy="658368"/>
+          </a:xfrm>
+          <a:prstGeom prst="rect">
+            <a:avLst/>
+          </a:prstGeom>
+          <a:noFill/>
+          <a:ln/>
+        </p:spPr>
+        <p:txBody>
+          <a:bodyPr wrap="square" lIns="0" tIns="0" rIns="0" bIns="0" rtlCol="0" anchor="ctr"/>
+          <a:lstStyle/>
+          <a:p>
+            <a:pPr indent="0" marL="0">
+              <a:buNone/>
+            </a:pPr>
+            <a:r>
+              <a:rPr lang="en-US" sz="1600" b="1" dirty="0">
+                <a:solidFill>
+                  <a:srgbClr val="E8A33D"/>
                 </a:solidFill>
                 <a:latin typeface="Courier New" pitchFamily="34" charset="0"/>
                 <a:ea typeface="Courier New" pitchFamily="34" charset="-122"/>
                 <a:cs typeface="Courier New" pitchFamily="34" charset="-120"/>
               </a:rPr>
-              <a:t># 저장소 루트에서 OS에 맞는 Makefile 선택</a:t>
-            </a:r>
-            <a:endParaRPr lang="en-US" sz="1350" dirty="0"/>
-          </a:p>
-          <a:p>
-            <a:pPr algn="l" indent="0" marL="0">
-              <a:lnSpc>
-                <a:spcPct val="110000"/>
-              </a:lnSpc>
-              <a:buNone/>
-            </a:pPr>
-            <a:r>
-              <a:rPr lang="en-US" sz="1350" dirty="0">
-                <a:solidFill>
-                  <a:srgbClr val="F2C079"/>
+              <a:t>memtestG80_core.h</a:t>
+            </a:r>
+            <a:endParaRPr lang="en-US" sz="1600" dirty="0"/>
+          </a:p>
+        </p:txBody>
+      </p:sp>
+      <p:sp>
+        <p:nvSpPr>
+          <p:cNvPr id="6" name="Text 4"/>
+          <p:cNvSpPr/>
+          <p:nvPr/>
+        </p:nvSpPr>
+        <p:spPr>
+          <a:xfrm>
+            <a:off x="4937760" y="1737360"/>
+            <a:ext cx="5029200" cy="658368"/>
+          </a:xfrm>
+          <a:prstGeom prst="rect">
+            <a:avLst/>
+          </a:prstGeom>
+          <a:noFill/>
+          <a:ln/>
+        </p:spPr>
+        <p:txBody>
+          <a:bodyPr wrap="square" lIns="0" tIns="0" rIns="0" bIns="0" rtlCol="0" anchor="ctr"/>
+          <a:lstStyle/>
+          <a:p>
+            <a:pPr indent="0" marL="0">
+              <a:buNone/>
+            </a:pPr>
+            <a:r>
+              <a:rPr lang="en-US" sz="1450" dirty="0">
+                <a:solidFill>
+                  <a:srgbClr val="E7EDF5"/>
+                </a:solidFill>
+                <a:latin typeface="Malgun Gothic" pitchFamily="34" charset="0"/>
+                <a:ea typeface="Malgun Gothic" pitchFamily="34" charset="-122"/>
+                <a:cs typeface="Malgun Gothic" pitchFamily="34" charset="-120"/>
+              </a:rPr>
+              <a:t>공개 API — memtestState 클래스, 매크로(THREAD_ADDRESS 등)</a:t>
+            </a:r>
+            <a:endParaRPr lang="en-US" sz="1450" dirty="0"/>
+          </a:p>
+        </p:txBody>
+      </p:sp>
+      <p:sp>
+        <p:nvSpPr>
+          <p:cNvPr id="7" name="Text 5"/>
+          <p:cNvSpPr/>
+          <p:nvPr/>
+        </p:nvSpPr>
+        <p:spPr>
+          <a:xfrm>
+            <a:off x="10058400" y="1737360"/>
+            <a:ext cx="1371600" cy="658368"/>
+          </a:xfrm>
+          <a:prstGeom prst="rect">
+            <a:avLst/>
+          </a:prstGeom>
+          <a:noFill/>
+          <a:ln/>
+        </p:spPr>
+        <p:txBody>
+          <a:bodyPr wrap="square" lIns="0" tIns="0" rIns="0" bIns="0" rtlCol="0" anchor="ctr"/>
+          <a:lstStyle/>
+          <a:p>
+            <a:pPr algn="r" indent="0" marL="0">
+              <a:buNone/>
+            </a:pPr>
+            <a:r>
+              <a:rPr lang="en-US" sz="1300" dirty="0">
+                <a:solidFill>
+                  <a:srgbClr val="9FB0C4"/>
+                </a:solidFill>
+                <a:latin typeface="Malgun Gothic" pitchFamily="34" charset="0"/>
+                <a:ea typeface="Malgun Gothic" pitchFamily="34" charset="-122"/>
+                <a:cs typeface="Malgun Gothic" pitchFamily="34" charset="-120"/>
+              </a:rPr>
+              <a:t>세션 1,5</a:t>
+            </a:r>
+            <a:endParaRPr lang="en-US" sz="1300" dirty="0"/>
+          </a:p>
+        </p:txBody>
+      </p:sp>
+      <p:sp>
+        <p:nvSpPr>
+          <p:cNvPr id="8" name="Shape 6"/>
+          <p:cNvSpPr/>
+          <p:nvPr/>
+        </p:nvSpPr>
+        <p:spPr>
+          <a:xfrm>
+            <a:off x="548640" y="2651760"/>
+            <a:ext cx="11064240" cy="868680"/>
+          </a:xfrm>
+          <a:prstGeom prst="roundRect">
+            <a:avLst>
+              <a:gd name="adj" fmla="val 8421"/>
+            </a:avLst>
+          </a:prstGeom>
+          <a:solidFill>
+            <a:srgbClr val="18212E"/>
+          </a:solidFill>
+          <a:ln/>
+        </p:spPr>
+      </p:sp>
+      <p:sp>
+        <p:nvSpPr>
+          <p:cNvPr id="9" name="Text 7"/>
+          <p:cNvSpPr/>
+          <p:nvPr/>
+        </p:nvSpPr>
+        <p:spPr>
+          <a:xfrm>
+            <a:off x="822960" y="2743200"/>
+            <a:ext cx="3931920" cy="658368"/>
+          </a:xfrm>
+          <a:prstGeom prst="rect">
+            <a:avLst/>
+          </a:prstGeom>
+          <a:noFill/>
+          <a:ln/>
+        </p:spPr>
+        <p:txBody>
+          <a:bodyPr wrap="square" lIns="0" tIns="0" rIns="0" bIns="0" rtlCol="0" anchor="ctr"/>
+          <a:lstStyle/>
+          <a:p>
+            <a:pPr indent="0" marL="0">
+              <a:buNone/>
+            </a:pPr>
+            <a:r>
+              <a:rPr lang="en-US" sz="1600" b="1" dirty="0">
+                <a:solidFill>
+                  <a:srgbClr val="3FB8C4"/>
                 </a:solidFill>
                 <a:latin typeface="Courier New" pitchFamily="34" charset="0"/>
                 <a:ea typeface="Courier New" pitchFamily="34" charset="-122"/>
                 <a:cs typeface="Courier New" pitchFamily="34" charset="-120"/>
               </a:rPr>
-              <a:t>make -f Makefiles/Makefile.linux64     # linux32 / osx / windows 도 있음</a:t>
-            </a:r>
-            <a:endParaRPr lang="en-US" sz="1350" dirty="0"/>
-          </a:p>
-          <a:p>
-            <a:pPr algn="l" indent="0" marL="0">
-              <a:lnSpc>
-                <a:spcPct val="110000"/>
-              </a:lnSpc>
-              <a:buNone/>
-            </a:pPr>
-            <a:endParaRPr lang="en-US" sz="1350" dirty="0"/>
-          </a:p>
-          <a:p>
-            <a:pPr algn="l" indent="0" marL="0">
-              <a:lnSpc>
-                <a:spcPct val="110000"/>
-              </a:lnSpc>
-              <a:buNone/>
-            </a:pPr>
-            <a:r>
-              <a:rPr lang="en-US" sz="1350" dirty="0">
-                <a:solidFill>
-                  <a:srgbClr val="6B7D94"/>
+              <a:t>memtestG80_core.cu</a:t>
+            </a:r>
+            <a:endParaRPr lang="en-US" sz="1600" dirty="0"/>
+          </a:p>
+        </p:txBody>
+      </p:sp>
+      <p:sp>
+        <p:nvSpPr>
+          <p:cNvPr id="10" name="Text 8"/>
+          <p:cNvSpPr/>
+          <p:nvPr/>
+        </p:nvSpPr>
+        <p:spPr>
+          <a:xfrm>
+            <a:off x="4937760" y="2743200"/>
+            <a:ext cx="5029200" cy="658368"/>
+          </a:xfrm>
+          <a:prstGeom prst="rect">
+            <a:avLst/>
+          </a:prstGeom>
+          <a:noFill/>
+          <a:ln/>
+        </p:spPr>
+        <p:txBody>
+          <a:bodyPr wrap="square" lIns="0" tIns="0" rIns="0" bIns="0" rtlCol="0" anchor="ctr"/>
+          <a:lstStyle/>
+          <a:p>
+            <a:pPr indent="0" marL="0">
+              <a:buNone/>
+            </a:pPr>
+            <a:r>
+              <a:rPr lang="en-US" sz="1450" dirty="0">
+                <a:solidFill>
+                  <a:srgbClr val="E7EDF5"/>
+                </a:solidFill>
+                <a:latin typeface="Malgun Gothic" pitchFamily="34" charset="0"/>
+                <a:ea typeface="Malgun Gothic" pitchFamily="34" charset="-122"/>
+                <a:cs typeface="Malgun Gothic" pitchFamily="34" charset="-120"/>
+              </a:rPr>
+              <a:t>핵심 — 모든 커널·호스트 함수·리덕션·대역폭</a:t>
+            </a:r>
+            <a:endParaRPr lang="en-US" sz="1450" dirty="0"/>
+          </a:p>
+        </p:txBody>
+      </p:sp>
+      <p:sp>
+        <p:nvSpPr>
+          <p:cNvPr id="11" name="Text 9"/>
+          <p:cNvSpPr/>
+          <p:nvPr/>
+        </p:nvSpPr>
+        <p:spPr>
+          <a:xfrm>
+            <a:off x="10058400" y="2743200"/>
+            <a:ext cx="1371600" cy="658368"/>
+          </a:xfrm>
+          <a:prstGeom prst="rect">
+            <a:avLst/>
+          </a:prstGeom>
+          <a:noFill/>
+          <a:ln/>
+        </p:spPr>
+        <p:txBody>
+          <a:bodyPr wrap="square" lIns="0" tIns="0" rIns="0" bIns="0" rtlCol="0" anchor="ctr"/>
+          <a:lstStyle/>
+          <a:p>
+            <a:pPr algn="r" indent="0" marL="0">
+              <a:buNone/>
+            </a:pPr>
+            <a:r>
+              <a:rPr lang="en-US" sz="1300" dirty="0">
+                <a:solidFill>
+                  <a:srgbClr val="9FB0C4"/>
+                </a:solidFill>
+                <a:latin typeface="Malgun Gothic" pitchFamily="34" charset="0"/>
+                <a:ea typeface="Malgun Gothic" pitchFamily="34" charset="-122"/>
+                <a:cs typeface="Malgun Gothic" pitchFamily="34" charset="-120"/>
+              </a:rPr>
+              <a:t>세션 1~4</a:t>
+            </a:r>
+            <a:endParaRPr lang="en-US" sz="1300" dirty="0"/>
+          </a:p>
+        </p:txBody>
+      </p:sp>
+      <p:sp>
+        <p:nvSpPr>
+          <p:cNvPr id="12" name="Shape 10"/>
+          <p:cNvSpPr/>
+          <p:nvPr/>
+        </p:nvSpPr>
+        <p:spPr>
+          <a:xfrm>
+            <a:off x="548640" y="3657600"/>
+            <a:ext cx="11064240" cy="868680"/>
+          </a:xfrm>
+          <a:prstGeom prst="roundRect">
+            <a:avLst>
+              <a:gd name="adj" fmla="val 8421"/>
+            </a:avLst>
+          </a:prstGeom>
+          <a:solidFill>
+            <a:srgbClr val="18212E"/>
+          </a:solidFill>
+          <a:ln/>
+        </p:spPr>
+      </p:sp>
+      <p:sp>
+        <p:nvSpPr>
+          <p:cNvPr id="13" name="Text 11"/>
+          <p:cNvSpPr/>
+          <p:nvPr/>
+        </p:nvSpPr>
+        <p:spPr>
+          <a:xfrm>
+            <a:off x="822960" y="3749040"/>
+            <a:ext cx="3931920" cy="658368"/>
+          </a:xfrm>
+          <a:prstGeom prst="rect">
+            <a:avLst/>
+          </a:prstGeom>
+          <a:noFill/>
+          <a:ln/>
+        </p:spPr>
+        <p:txBody>
+          <a:bodyPr wrap="square" lIns="0" tIns="0" rIns="0" bIns="0" rtlCol="0" anchor="ctr"/>
+          <a:lstStyle/>
+          <a:p>
+            <a:pPr indent="0" marL="0">
+              <a:buNone/>
+            </a:pPr>
+            <a:r>
+              <a:rPr lang="en-US" sz="1600" b="1" dirty="0">
+                <a:solidFill>
+                  <a:srgbClr val="E8A33D"/>
                 </a:solidFill>
                 <a:latin typeface="Courier New" pitchFamily="34" charset="0"/>
                 <a:ea typeface="Courier New" pitchFamily="34" charset="-122"/>
                 <a:cs typeface="Courier New" pitchFamily="34" charset="-120"/>
               </a:rPr>
-              <a:t># 산출물</a:t>
-            </a:r>
-            <a:endParaRPr lang="en-US" sz="1350" dirty="0"/>
-          </a:p>
-          <a:p>
-            <a:pPr algn="l" indent="0" marL="0">
-              <a:lnSpc>
-                <a:spcPct val="110000"/>
-              </a:lnSpc>
-              <a:buNone/>
-            </a:pPr>
-            <a:r>
-              <a:rPr lang="en-US" sz="1350" dirty="0">
-                <a:solidFill>
-                  <a:srgbClr val="3FB8C4"/>
+              <a:t>memtestG80_cli.cu</a:t>
+            </a:r>
+            <a:endParaRPr lang="en-US" sz="1600" dirty="0"/>
+          </a:p>
+        </p:txBody>
+      </p:sp>
+      <p:sp>
+        <p:nvSpPr>
+          <p:cNvPr id="14" name="Text 12"/>
+          <p:cNvSpPr/>
+          <p:nvPr/>
+        </p:nvSpPr>
+        <p:spPr>
+          <a:xfrm>
+            <a:off x="4937760" y="3749040"/>
+            <a:ext cx="5029200" cy="658368"/>
+          </a:xfrm>
+          <a:prstGeom prst="rect">
+            <a:avLst/>
+          </a:prstGeom>
+          <a:noFill/>
+          <a:ln/>
+        </p:spPr>
+        <p:txBody>
+          <a:bodyPr wrap="square" lIns="0" tIns="0" rIns="0" bIns="0" rtlCol="0" anchor="ctr"/>
+          <a:lstStyle/>
+          <a:p>
+            <a:pPr indent="0" marL="0">
+              <a:buNone/>
+            </a:pPr>
+            <a:r>
+              <a:rPr lang="en-US" sz="1450" dirty="0">
+                <a:solidFill>
+                  <a:srgbClr val="E7EDF5"/>
+                </a:solidFill>
+                <a:latin typeface="Malgun Gothic" pitchFamily="34" charset="0"/>
+                <a:ea typeface="Malgun Gothic" pitchFamily="34" charset="-122"/>
+                <a:cs typeface="Malgun Gothic" pitchFamily="34" charset="-120"/>
+              </a:rPr>
+              <a:t>main() — 13종 테스트를 순차 실행하는 프런트엔드</a:t>
+            </a:r>
+            <a:endParaRPr lang="en-US" sz="1450" dirty="0"/>
+          </a:p>
+        </p:txBody>
+      </p:sp>
+      <p:sp>
+        <p:nvSpPr>
+          <p:cNvPr id="15" name="Text 13"/>
+          <p:cNvSpPr/>
+          <p:nvPr/>
+        </p:nvSpPr>
+        <p:spPr>
+          <a:xfrm>
+            <a:off x="10058400" y="3749040"/>
+            <a:ext cx="1371600" cy="658368"/>
+          </a:xfrm>
+          <a:prstGeom prst="rect">
+            <a:avLst/>
+          </a:prstGeom>
+          <a:noFill/>
+          <a:ln/>
+        </p:spPr>
+        <p:txBody>
+          <a:bodyPr wrap="square" lIns="0" tIns="0" rIns="0" bIns="0" rtlCol="0" anchor="ctr"/>
+          <a:lstStyle/>
+          <a:p>
+            <a:pPr algn="r" indent="0" marL="0">
+              <a:buNone/>
+            </a:pPr>
+            <a:r>
+              <a:rPr lang="en-US" sz="1300" dirty="0">
+                <a:solidFill>
+                  <a:srgbClr val="9FB0C4"/>
+                </a:solidFill>
+                <a:latin typeface="Malgun Gothic" pitchFamily="34" charset="0"/>
+                <a:ea typeface="Malgun Gothic" pitchFamily="34" charset="-122"/>
+                <a:cs typeface="Malgun Gothic" pitchFamily="34" charset="-120"/>
+              </a:rPr>
+              <a:t>세션 0,5</a:t>
+            </a:r>
+            <a:endParaRPr lang="en-US" sz="1300" dirty="0"/>
+          </a:p>
+        </p:txBody>
+      </p:sp>
+      <p:sp>
+        <p:nvSpPr>
+          <p:cNvPr id="16" name="Shape 14"/>
+          <p:cNvSpPr/>
+          <p:nvPr/>
+        </p:nvSpPr>
+        <p:spPr>
+          <a:xfrm>
+            <a:off x="548640" y="4663440"/>
+            <a:ext cx="11064240" cy="868680"/>
+          </a:xfrm>
+          <a:prstGeom prst="roundRect">
+            <a:avLst>
+              <a:gd name="adj" fmla="val 8421"/>
+            </a:avLst>
+          </a:prstGeom>
+          <a:solidFill>
+            <a:srgbClr val="18212E"/>
+          </a:solidFill>
+          <a:ln/>
+        </p:spPr>
+      </p:sp>
+      <p:sp>
+        <p:nvSpPr>
+          <p:cNvPr id="17" name="Text 15"/>
+          <p:cNvSpPr/>
+          <p:nvPr/>
+        </p:nvSpPr>
+        <p:spPr>
+          <a:xfrm>
+            <a:off x="822960" y="4754880"/>
+            <a:ext cx="3931920" cy="658368"/>
+          </a:xfrm>
+          <a:prstGeom prst="rect">
+            <a:avLst/>
+          </a:prstGeom>
+          <a:noFill/>
+          <a:ln/>
+        </p:spPr>
+        <p:txBody>
+          <a:bodyPr wrap="square" lIns="0" tIns="0" rIns="0" bIns="0" rtlCol="0" anchor="ctr"/>
+          <a:lstStyle/>
+          <a:p>
+            <a:pPr indent="0" marL="0">
+              <a:buNone/>
+            </a:pPr>
+            <a:r>
+              <a:rPr lang="en-US" sz="1600" b="1" dirty="0">
+                <a:solidFill>
+                  <a:srgbClr val="6B7D94"/>
                 </a:solidFill>
                 <a:latin typeface="Courier New" pitchFamily="34" charset="0"/>
                 <a:ea typeface="Courier New" pitchFamily="34" charset="-122"/>
                 <a:cs typeface="Courier New" pitchFamily="34" charset="-120"/>
               </a:rPr>
-              <a:t>./memtestG80                            # 즉시 실행 가능</a:t>
-            </a:r>
-            <a:endParaRPr lang="en-US" sz="1350" dirty="0"/>
-          </a:p>
-        </p:txBody>
-      </p:sp>
-      <p:sp>
-        <p:nvSpPr>
-          <p:cNvPr id="7" name="Shape 5"/>
-          <p:cNvSpPr/>
-          <p:nvPr/>
-        </p:nvSpPr>
-        <p:spPr>
-          <a:xfrm>
-            <a:off x="548640" y="3794760"/>
-            <a:ext cx="11064240" cy="1554480"/>
-          </a:xfrm>
-          <a:prstGeom prst="roundRect">
-            <a:avLst>
-              <a:gd name="adj" fmla="val 2941"/>
-            </a:avLst>
-          </a:prstGeom>
-          <a:solidFill>
-            <a:srgbClr val="0B1119"/>
-          </a:solidFill>
-          <a:ln w="12700">
-            <a:solidFill>
-              <a:srgbClr val="2C3A4E"/>
-            </a:solidFill>
-            <a:prstDash val="solid"/>
-          </a:ln>
-        </p:spPr>
-      </p:sp>
-      <p:sp>
-        <p:nvSpPr>
-          <p:cNvPr id="8" name="Text 6"/>
-          <p:cNvSpPr/>
-          <p:nvPr/>
-        </p:nvSpPr>
-        <p:spPr>
-          <a:xfrm>
-            <a:off x="768096" y="3941064"/>
-            <a:ext cx="10625328" cy="1261872"/>
-          </a:xfrm>
-          <a:prstGeom prst="rect">
-            <a:avLst/>
-          </a:prstGeom>
-          <a:noFill/>
-          <a:ln/>
-        </p:spPr>
-        <p:txBody>
-          <a:bodyPr wrap="square" lIns="0" tIns="0" rIns="0" bIns="0" rtlCol="0" anchor="t"/>
-          <a:lstStyle/>
-          <a:p>
-            <a:pPr algn="l" indent="0" marL="0">
-              <a:lnSpc>
-                <a:spcPct val="110000"/>
-              </a:lnSpc>
-              <a:buNone/>
-            </a:pPr>
-            <a:r>
-              <a:rPr lang="en-US" sz="1250" dirty="0">
-                <a:solidFill>
-                  <a:srgbClr val="6B7D94"/>
-                </a:solidFill>
-                <a:latin typeface="Courier New" pitchFamily="34" charset="0"/>
-                <a:ea typeface="Courier New" pitchFamily="34" charset="-122"/>
-                <a:cs typeface="Courier New" pitchFamily="34" charset="-120"/>
-              </a:rPr>
-              <a:t># Makefile.linux64 핵심</a:t>
-            </a:r>
-            <a:endParaRPr lang="en-US" sz="1250" dirty="0"/>
-          </a:p>
-          <a:p>
-            <a:pPr algn="l" indent="0" marL="0">
-              <a:lnSpc>
-                <a:spcPct val="110000"/>
-              </a:lnSpc>
-              <a:buNone/>
-            </a:pPr>
-            <a:r>
-              <a:rPr lang="en-US" sz="1250" dirty="0">
+              <a:t>ezOptionParser.hpp</a:t>
+            </a:r>
+            <a:endParaRPr lang="en-US" sz="1600" dirty="0"/>
+          </a:p>
+        </p:txBody>
+      </p:sp>
+      <p:sp>
+        <p:nvSpPr>
+          <p:cNvPr id="18" name="Text 16"/>
+          <p:cNvSpPr/>
+          <p:nvPr/>
+        </p:nvSpPr>
+        <p:spPr>
+          <a:xfrm>
+            <a:off x="4937760" y="4754880"/>
+            <a:ext cx="5029200" cy="658368"/>
+          </a:xfrm>
+          <a:prstGeom prst="rect">
+            <a:avLst/>
+          </a:prstGeom>
+          <a:noFill/>
+          <a:ln/>
+        </p:spPr>
+        <p:txBody>
+          <a:bodyPr wrap="square" lIns="0" tIns="0" rIns="0" bIns="0" rtlCol="0" anchor="ctr"/>
+          <a:lstStyle/>
+          <a:p>
+            <a:pPr indent="0" marL="0">
+              <a:buNone/>
+            </a:pPr>
+            <a:r>
+              <a:rPr lang="en-US" sz="1450" dirty="0">
                 <a:solidFill>
                   <a:srgbClr val="E7EDF5"/>
                 </a:solidFill>
-                <a:latin typeface="Courier New" pitchFamily="34" charset="0"/>
-                <a:ea typeface="Courier New" pitchFamily="34" charset="-122"/>
-                <a:cs typeface="Courier New" pitchFamily="34" charset="-120"/>
-              </a:rPr>
-              <a:t>NVCC = nvcc</a:t>
-            </a:r>
-            <a:endParaRPr lang="en-US" sz="1250" dirty="0"/>
-          </a:p>
-          <a:p>
-            <a:pPr algn="l" indent="0" marL="0">
-              <a:lnSpc>
-                <a:spcPct val="110000"/>
-              </a:lnSpc>
-              <a:buNone/>
-            </a:pPr>
-            <a:r>
-              <a:rPr lang="en-US" sz="1250" dirty="0">
-                <a:solidFill>
-                  <a:srgbClr val="F2C079"/>
-                </a:solidFill>
-                <a:latin typeface="Courier New" pitchFamily="34" charset="0"/>
-                <a:ea typeface="Courier New" pitchFamily="34" charset="-122"/>
-                <a:cs typeface="Courier New" pitchFamily="34" charset="-120"/>
-              </a:rPr>
-              <a:t>NVCCFLAGS = -DLINUX -O2 -Xptxas -v -m64   # -Xptxas -v = 레지스터/shmem 사용량 출력</a:t>
-            </a:r>
-            <a:endParaRPr lang="en-US" sz="1250" dirty="0"/>
-          </a:p>
-          <a:p>
-            <a:pPr algn="l" indent="0" marL="0">
-              <a:lnSpc>
-                <a:spcPct val="110000"/>
-              </a:lnSpc>
-              <a:buNone/>
-            </a:pPr>
-            <a:r>
-              <a:rPr lang="en-US" sz="1250" dirty="0">
-                <a:solidFill>
-                  <a:srgbClr val="E7EDF5"/>
-                </a:solidFill>
-                <a:latin typeface="Courier New" pitchFamily="34" charset="0"/>
-                <a:ea typeface="Courier New" pitchFamily="34" charset="-122"/>
-                <a:cs typeface="Courier New" pitchFamily="34" charset="-120"/>
-              </a:rPr>
-              <a:t>memtestG80: memtestG80_core.o memtestG80_cli.cu</a:t>
-            </a:r>
-            <a:endParaRPr lang="en-US" sz="1250" dirty="0"/>
-          </a:p>
-          <a:p>
-            <a:pPr algn="l" indent="0" marL="0">
-              <a:lnSpc>
-                <a:spcPct val="110000"/>
-              </a:lnSpc>
-              <a:buNone/>
-            </a:pPr>
-            <a:r>
-              <a:rPr lang="en-US" sz="1250" dirty="0">
-                <a:solidFill>
-                  <a:srgbClr val="E7EDF5"/>
-                </a:solidFill>
-                <a:latin typeface="Courier New" pitchFamily="34" charset="0"/>
-                <a:ea typeface="Courier New" pitchFamily="34" charset="-122"/>
-                <a:cs typeface="Courier New" pitchFamily="34" charset="-120"/>
-              </a:rPr>
-              <a:t>        $(NVCC) $(NVCCFLAGS) -o memtestG80 memtestG80_core.o memtestG80_cli.cu</a:t>
-            </a:r>
-            <a:endParaRPr lang="en-US" sz="1250" dirty="0"/>
-          </a:p>
-        </p:txBody>
-      </p:sp>
-      <p:sp>
-        <p:nvSpPr>
-          <p:cNvPr id="9" name="Text 7"/>
-          <p:cNvSpPr/>
-          <p:nvPr/>
-        </p:nvSpPr>
-        <p:spPr>
-          <a:xfrm>
-            <a:off x="548640" y="5577840"/>
-            <a:ext cx="11064240" cy="457200"/>
+                <a:latin typeface="Malgun Gothic" pitchFamily="34" charset="0"/>
+                <a:ea typeface="Malgun Gothic" pitchFamily="34" charset="-122"/>
+                <a:cs typeface="Malgun Gothic" pitchFamily="34" charset="-120"/>
+              </a:rPr>
+              <a:t>헤더 전용 명령행 인자 파서 (보조)</a:t>
+            </a:r>
+            <a:endParaRPr lang="en-US" sz="1450" dirty="0"/>
+          </a:p>
+        </p:txBody>
+      </p:sp>
+      <p:sp>
+        <p:nvSpPr>
+          <p:cNvPr id="19" name="Text 17"/>
+          <p:cNvSpPr/>
+          <p:nvPr/>
+        </p:nvSpPr>
+        <p:spPr>
+          <a:xfrm>
+            <a:off x="10058400" y="4754880"/>
+            <a:ext cx="1371600" cy="658368"/>
           </a:xfrm>
           <a:prstGeom prst="rect">
             <a:avLst/>
@@ -5217,7 +7419,46 @@
           <a:bodyPr wrap="square" lIns="0" tIns="0" rIns="0" bIns="0" rtlCol="0" anchor="ctr"/>
           <a:lstStyle/>
           <a:p>
-            <a:pPr indent="0" marL="0">
+            <a:pPr algn="r" indent="0" marL="0">
+              <a:buNone/>
+            </a:pPr>
+            <a:r>
+              <a:rPr lang="en-US" sz="1300" dirty="0">
+                <a:solidFill>
+                  <a:srgbClr val="9FB0C4"/>
+                </a:solidFill>
+                <a:latin typeface="Malgun Gothic" pitchFamily="34" charset="0"/>
+                <a:ea typeface="Malgun Gothic" pitchFamily="34" charset="-122"/>
+                <a:cs typeface="Malgun Gothic" pitchFamily="34" charset="-120"/>
+              </a:rPr>
+              <a:t>—</a:t>
+            </a:r>
+            <a:endParaRPr lang="en-US" sz="1300" dirty="0"/>
+          </a:p>
+        </p:txBody>
+      </p:sp>
+      <p:sp>
+        <p:nvSpPr>
+          <p:cNvPr id="20" name="Text 18"/>
+          <p:cNvSpPr/>
+          <p:nvPr/>
+        </p:nvSpPr>
+        <p:spPr>
+          <a:xfrm>
+            <a:off x="548640" y="5943600"/>
+            <a:ext cx="11064240" cy="365760"/>
+          </a:xfrm>
+          <a:prstGeom prst="rect">
+            <a:avLst/>
+          </a:prstGeom>
+          <a:noFill/>
+          <a:ln/>
+        </p:spPr>
+        <p:txBody>
+          <a:bodyPr wrap="square" lIns="0" tIns="0" rIns="0" bIns="0" rtlCol="0" anchor="ctr"/>
+          <a:lstStyle/>
+          <a:p>
+            <a:pPr algn="ctr" indent="0" marL="0">
               <a:buNone/>
             </a:pPr>
             <a:r>
@@ -5229,7 +7470,7 @@
                 <a:ea typeface="Malgun Gothic" pitchFamily="34" charset="-122"/>
                 <a:cs typeface="Malgun Gothic" pitchFamily="34" charset="-120"/>
               </a:rPr>
-              <a:t>-Xptxas -v 플래그는 커널의 레지스터·공유 메모리 사용량을 보여줍니다 — 세션 3에서 유용합니다.</a:t>
+              <a:t>500여 줄의 프로덕션 CUDA 코드 — 장난감 예제가 아니라 실제로 GPU 오류를 찾는 도구를 교재로 삼습니다.</a:t>
             </a:r>
             <a:endParaRPr lang="en-US" sz="1350" dirty="0"/>
           </a:p>
@@ -5304,7 +7545,7 @@
                 <a:ea typeface="Courier New" pitchFamily="34" charset="-122"/>
                 <a:cs typeface="Courier New" pitchFamily="34" charset="-120"/>
               </a:rPr>
-              <a:t>6</a:t>
+              <a:t>5</a:t>
             </a:r>
             <a:endParaRPr lang="en-US" sz="2200" dirty="0"/>
           </a:p>
@@ -5343,7 +7584,7 @@
                 <a:ea typeface="Malgun Gothic" pitchFamily="34" charset="-122"/>
                 <a:cs typeface="Malgun Gothic" pitchFamily="34" charset="-120"/>
               </a:rPr>
-              <a:t>실행하고 출력 읽기</a:t>
+              <a:t>빌드하기 · Makefile</a:t>
             </a:r>
             <a:endParaRPr lang="en-US" sz="2900" dirty="0"/>
           </a:p>
@@ -5351,18 +7592,57 @@
       </p:sp>
       <p:sp>
         <p:nvSpPr>
-          <p:cNvPr id="4" name="Shape 2"/>
-          <p:cNvSpPr/>
-          <p:nvPr/>
-        </p:nvSpPr>
-        <p:spPr>
-          <a:xfrm>
-            <a:off x="548640" y="1508760"/>
-            <a:ext cx="11064240" cy="1234440"/>
+          <p:cNvPr id="4" name="Text 2"/>
+          <p:cNvSpPr/>
+          <p:nvPr/>
+        </p:nvSpPr>
+        <p:spPr>
+          <a:xfrm>
+            <a:off x="548640" y="1463040"/>
+            <a:ext cx="11064240" cy="457200"/>
+          </a:xfrm>
+          <a:prstGeom prst="rect">
+            <a:avLst/>
+          </a:prstGeom>
+          <a:noFill/>
+          <a:ln/>
+        </p:spPr>
+        <p:txBody>
+          <a:bodyPr wrap="square" lIns="0" tIns="0" rIns="0" bIns="0" rtlCol="0" anchor="ctr"/>
+          <a:lstStyle/>
+          <a:p>
+            <a:pPr indent="0" marL="0">
+              <a:buNone/>
+            </a:pPr>
+            <a:r>
+              <a:rPr lang="en-US" sz="1600" dirty="0">
+                <a:solidFill>
+                  <a:srgbClr val="9FB0C4"/>
+                </a:solidFill>
+                <a:latin typeface="Malgun Gothic" pitchFamily="34" charset="0"/>
+                <a:ea typeface="Malgun Gothic" pitchFamily="34" charset="-122"/>
+                <a:cs typeface="Malgun Gothic" pitchFamily="34" charset="-120"/>
+              </a:rPr>
+              <a:t>CMake가 아니라 OS별 Makefile을 씁니다. nvcc 툴체인이 PATH에 있어야 합니다.</a:t>
+            </a:r>
+            <a:endParaRPr lang="en-US" sz="1600" dirty="0"/>
+          </a:p>
+        </p:txBody>
+      </p:sp>
+      <p:sp>
+        <p:nvSpPr>
+          <p:cNvPr id="5" name="Shape 3"/>
+          <p:cNvSpPr/>
+          <p:nvPr/>
+        </p:nvSpPr>
+        <p:spPr>
+          <a:xfrm>
+            <a:off x="548640" y="1965960"/>
+            <a:ext cx="11064240" cy="1554480"/>
           </a:xfrm>
           <a:prstGeom prst="roundRect">
             <a:avLst>
-              <a:gd name="adj" fmla="val 3704"/>
+              <a:gd name="adj" fmla="val 2941"/>
             </a:avLst>
           </a:prstGeom>
           <a:solidFill>
@@ -5378,14 +7658,14 @@
       </p:sp>
       <p:sp>
         <p:nvSpPr>
-          <p:cNvPr id="5" name="Text 3"/>
-          <p:cNvSpPr/>
-          <p:nvPr/>
-        </p:nvSpPr>
-        <p:spPr>
-          <a:xfrm>
-            <a:off x="768096" y="1655064"/>
-            <a:ext cx="10625328" cy="941832"/>
+          <p:cNvPr id="6" name="Text 4"/>
+          <p:cNvSpPr/>
+          <p:nvPr/>
+        </p:nvSpPr>
+        <p:spPr>
+          <a:xfrm>
+            <a:off x="768096" y="2112264"/>
+            <a:ext cx="10625328" cy="1261872"/>
           </a:xfrm>
           <a:prstGeom prst="rect">
             <a:avLst/>
@@ -5406,13 +7686,13 @@
             <a:r>
               <a:rPr lang="en-US" sz="1350" dirty="0">
                 <a:solidFill>
-                  <a:srgbClr val="F2C079"/>
+                  <a:srgbClr val="6B7D94"/>
                 </a:solidFill>
                 <a:latin typeface="Courier New" pitchFamily="34" charset="0"/>
                 <a:ea typeface="Courier New" pitchFamily="34" charset="-122"/>
                 <a:cs typeface="Courier New" pitchFamily="34" charset="-120"/>
               </a:rPr>
-              <a:t>./memtestG80                 # 기본: GPU 0, 128MB, 50 iters</a:t>
+              <a:t># 저장소 루트에서 OS에 맞는 Makefile 선택</a:t>
             </a:r>
             <a:endParaRPr lang="en-US" sz="1350" dirty="0"/>
           </a:p>
@@ -5426,13 +7706,13 @@
             <a:r>
               <a:rPr lang="en-US" sz="1350" dirty="0">
                 <a:solidFill>
-                  <a:srgbClr val="E7EDF5"/>
+                  <a:srgbClr val="F2C079"/>
                 </a:solidFill>
                 <a:latin typeface="Courier New" pitchFamily="34" charset="0"/>
                 <a:ea typeface="Courier New" pitchFamily="34" charset="-122"/>
                 <a:cs typeface="Courier New" pitchFamily="34" charset="-120"/>
               </a:rPr>
-              <a:t>./memtestG80 256 100         # 256MB를 100회</a:t>
+              <a:t>make -f Makefiles/Makefile.linux64     # linux32 / osx / windows 도 있음</a:t>
             </a:r>
             <a:endParaRPr lang="en-US" sz="1350" dirty="0"/>
           </a:p>
@@ -5443,35 +7723,64 @@
               </a:lnSpc>
               <a:buNone/>
             </a:pPr>
+            <a:endParaRPr lang="en-US" sz="1350" dirty="0"/>
+          </a:p>
+          <a:p>
+            <a:pPr algn="l" indent="0" marL="0">
+              <a:lnSpc>
+                <a:spcPct val="110000"/>
+              </a:lnSpc>
+              <a:buNone/>
+            </a:pPr>
             <a:r>
               <a:rPr lang="en-US" sz="1350" dirty="0">
                 <a:solidFill>
-                  <a:srgbClr val="3FB8C4"/>
+                  <a:srgbClr val="6B7D94"/>
                 </a:solidFill>
                 <a:latin typeface="Courier New" pitchFamily="34" charset="0"/>
                 <a:ea typeface="Courier New" pitchFamily="34" charset="-122"/>
                 <a:cs typeface="Courier New" pitchFamily="34" charset="-120"/>
               </a:rPr>
-              <a:t>./memtestG80 --gpu 2 512 20  # 3번째 GPU, 512MB, 20회</a:t>
+              <a:t># 산출물</a:t>
             </a:r>
             <a:endParaRPr lang="en-US" sz="1350" dirty="0"/>
           </a:p>
-        </p:txBody>
-      </p:sp>
-      <p:sp>
-        <p:nvSpPr>
-          <p:cNvPr id="6" name="Shape 4"/>
-          <p:cNvSpPr/>
-          <p:nvPr/>
-        </p:nvSpPr>
-        <p:spPr>
-          <a:xfrm>
-            <a:off x="548640" y="2926080"/>
-            <a:ext cx="11064240" cy="2743200"/>
+          <a:p>
+            <a:pPr algn="l" indent="0" marL="0">
+              <a:lnSpc>
+                <a:spcPct val="110000"/>
+              </a:lnSpc>
+              <a:buNone/>
+            </a:pPr>
+            <a:r>
+              <a:rPr lang="en-US" sz="1350" dirty="0">
+                <a:solidFill>
+                  <a:srgbClr val="3FB8C4"/>
+                </a:solidFill>
+                <a:latin typeface="Courier New" pitchFamily="34" charset="0"/>
+                <a:ea typeface="Courier New" pitchFamily="34" charset="-122"/>
+                <a:cs typeface="Courier New" pitchFamily="34" charset="-120"/>
+              </a:rPr>
+              <a:t>./memtestG80                            # 즉시 실행 가능</a:t>
+            </a:r>
+            <a:endParaRPr lang="en-US" sz="1350" dirty="0"/>
+          </a:p>
+        </p:txBody>
+      </p:sp>
+      <p:sp>
+        <p:nvSpPr>
+          <p:cNvPr id="7" name="Shape 5"/>
+          <p:cNvSpPr/>
+          <p:nvPr/>
+        </p:nvSpPr>
+        <p:spPr>
+          <a:xfrm>
+            <a:off x="548640" y="3794760"/>
+            <a:ext cx="11064240" cy="1554480"/>
           </a:xfrm>
           <a:prstGeom prst="roundRect">
             <a:avLst>
-              <a:gd name="adj" fmla="val 1667"/>
+              <a:gd name="adj" fmla="val 2941"/>
             </a:avLst>
           </a:prstGeom>
           <a:solidFill>
@@ -5487,14 +7796,14 @@
       </p:sp>
       <p:sp>
         <p:nvSpPr>
-          <p:cNvPr id="7" name="Text 5"/>
-          <p:cNvSpPr/>
-          <p:nvPr/>
-        </p:nvSpPr>
-        <p:spPr>
-          <a:xfrm>
-            <a:off x="768096" y="3072384"/>
-            <a:ext cx="10625328" cy="2450592"/>
+          <p:cNvPr id="8" name="Text 6"/>
+          <p:cNvSpPr/>
+          <p:nvPr/>
+        </p:nvSpPr>
+        <p:spPr>
+          <a:xfrm>
+            <a:off x="768096" y="3941064"/>
+            <a:ext cx="10625328" cy="1261872"/>
           </a:xfrm>
           <a:prstGeom prst="rect">
             <a:avLst/>
@@ -5513,7 +7822,7 @@
               <a:buNone/>
             </a:pPr>
             <a:r>
-              <a:rPr lang="en-US" sz="1300" dirty="0">
+              <a:rPr lang="en-US" sz="1250" dirty="0">
                 <a:solidFill>
                   <a:srgbClr val="6B7D94"/>
                 </a:solidFill>
@@ -5521,9 +7830,9 @@
                 <a:ea typeface="Courier New" pitchFamily="34" charset="-122"/>
                 <a:cs typeface="Courier New" pitchFamily="34" charset="-120"/>
               </a:rPr>
-              <a:t>Running 50 iterations of tests over 128 MB ...</a:t>
-            </a:r>
-            <a:endParaRPr lang="en-US" sz="1300" dirty="0"/>
+              <a:t># Makefile.linux64 핵심</a:t>
+            </a:r>
+            <a:endParaRPr lang="en-US" sz="1250" dirty="0"/>
           </a:p>
           <a:p>
             <a:pPr algn="l" indent="0" marL="0">
@@ -5533,17 +7842,17 @@
               <a:buNone/>
             </a:pPr>
             <a:r>
-              <a:rPr lang="en-US" sz="1300" dirty="0">
-                <a:solidFill>
-                  <a:srgbClr val="3FB8C4"/>
+              <a:rPr lang="en-US" sz="1250" dirty="0">
+                <a:solidFill>
+                  <a:srgbClr val="E7EDF5"/>
                 </a:solidFill>
                 <a:latin typeface="Courier New" pitchFamily="34" charset="0"/>
                 <a:ea typeface="Courier New" pitchFamily="34" charset="-122"/>
                 <a:cs typeface="Courier New" pitchFamily="34" charset="-120"/>
               </a:rPr>
-              <a:t>  Estimated bandwidth 142000.00 MB/s</a:t>
-            </a:r>
-            <a:endParaRPr lang="en-US" sz="1300" dirty="0"/>
+              <a:t>NVCC = nvcc</a:t>
+            </a:r>
+            <a:endParaRPr lang="en-US" sz="1250" dirty="0"/>
           </a:p>
           <a:p>
             <a:pPr algn="l" indent="0" marL="0">
@@ -5553,17 +7862,17 @@
               <a:buNone/>
             </a:pPr>
             <a:r>
-              <a:rPr lang="en-US" sz="1300" dirty="0">
-                <a:solidFill>
-                  <a:srgbClr val="E7EDF5"/>
+              <a:rPr lang="en-US" sz="1250" dirty="0">
+                <a:solidFill>
+                  <a:srgbClr val="F2C079"/>
                 </a:solidFill>
                 <a:latin typeface="Courier New" pitchFamily="34" charset="0"/>
                 <a:ea typeface="Courier New" pitchFamily="34" charset="-122"/>
                 <a:cs typeface="Courier New" pitchFamily="34" charset="-120"/>
               </a:rPr>
-              <a:t>Test iteration 1 (GPU 0, 128 MiB): 0 errors so far</a:t>
-            </a:r>
-            <a:endParaRPr lang="en-US" sz="1300" dirty="0"/>
+              <a:t>NVCCFLAGS = -DLINUX -O2 -Xptxas -v -m64   # -Xptxas -v = 레지스터/shmem 사용량 출력</a:t>
+            </a:r>
+            <a:endParaRPr lang="en-US" sz="1250" dirty="0"/>
           </a:p>
           <a:p>
             <a:pPr algn="l" indent="0" marL="0">
@@ -5573,7 +7882,7 @@
               <a:buNone/>
             </a:pPr>
             <a:r>
-              <a:rPr lang="en-US" sz="1300" dirty="0">
+              <a:rPr lang="en-US" sz="1250" dirty="0">
                 <a:solidFill>
                   <a:srgbClr val="E7EDF5"/>
                 </a:solidFill>
@@ -5581,9 +7890,9 @@
                 <a:ea typeface="Courier New" pitchFamily="34" charset="-122"/>
                 <a:cs typeface="Courier New" pitchFamily="34" charset="-120"/>
               </a:rPr>
-              <a:t>  Moving Inversions (ones and zeros): 0 errors (12 ms)</a:t>
-            </a:r>
-            <a:endParaRPr lang="en-US" sz="1300" dirty="0"/>
+              <a:t>memtestG80: memtestG80_core.o memtestG80_cli.cu</a:t>
+            </a:r>
+            <a:endParaRPr lang="en-US" sz="1250" dirty="0"/>
           </a:p>
           <a:p>
             <a:pPr algn="l" indent="0" marL="0">
@@ -5593,7 +7902,7 @@
               <a:buNone/>
             </a:pPr>
             <a:r>
-              <a:rPr lang="en-US" sz="1300" dirty="0">
+              <a:rPr lang="en-US" sz="1250" dirty="0">
                 <a:solidFill>
                   <a:srgbClr val="E7EDF5"/>
                 </a:solidFill>
@@ -5601,61 +7910,21 @@
                 <a:ea typeface="Courier New" pitchFamily="34" charset="-122"/>
                 <a:cs typeface="Courier New" pitchFamily="34" charset="-120"/>
               </a:rPr>
-              <a:t>  Memtest86 Walking 8-bit: 0 errors (85 ms)</a:t>
-            </a:r>
-            <a:endParaRPr lang="en-US" sz="1300" dirty="0"/>
-          </a:p>
-          <a:p>
-            <a:pPr algn="l" indent="0" marL="0">
-              <a:lnSpc>
-                <a:spcPct val="110000"/>
-              </a:lnSpc>
-              <a:buNone/>
-            </a:pPr>
-            <a:r>
-              <a:rPr lang="en-US" sz="1300" dirty="0">
-                <a:solidFill>
-                  <a:srgbClr val="6B7D94"/>
-                </a:solidFill>
-                <a:latin typeface="Courier New" pitchFamily="34" charset="0"/>
-                <a:ea typeface="Courier New" pitchFamily="34" charset="-122"/>
-                <a:cs typeface="Courier New" pitchFamily="34" charset="-120"/>
-              </a:rPr>
-              <a:t>  ...  (한 iteration 당 13종 테스트)</a:t>
-            </a:r>
-            <a:endParaRPr lang="en-US" sz="1300" dirty="0"/>
-          </a:p>
-          <a:p>
-            <a:pPr algn="l" indent="0" marL="0">
-              <a:lnSpc>
-                <a:spcPct val="110000"/>
-              </a:lnSpc>
-              <a:buNone/>
-            </a:pPr>
-            <a:r>
-              <a:rPr lang="en-US" sz="1300" dirty="0">
-                <a:solidFill>
-                  <a:srgbClr val="F2C079"/>
-                </a:solidFill>
-                <a:latin typeface="Courier New" pitchFamily="34" charset="0"/>
-                <a:ea typeface="Courier New" pitchFamily="34" charset="-122"/>
-                <a:cs typeface="Courier New" pitchFamily="34" charset="-120"/>
-              </a:rPr>
-              <a:t>Final error count after 50 iterations ...: 0 errors</a:t>
-            </a:r>
-            <a:endParaRPr lang="en-US" sz="1300" dirty="0"/>
-          </a:p>
-        </p:txBody>
-      </p:sp>
-      <p:sp>
-        <p:nvSpPr>
-          <p:cNvPr id="8" name="Text 6"/>
-          <p:cNvSpPr/>
-          <p:nvPr/>
-        </p:nvSpPr>
-        <p:spPr>
-          <a:xfrm>
-            <a:off x="548640" y="5852160"/>
+              <a:t>        $(NVCC) $(NVCCFLAGS) -o memtestG80 memtestG80_core.o memtestG80_cli.cu</a:t>
+            </a:r>
+            <a:endParaRPr lang="en-US" sz="1250" dirty="0"/>
+          </a:p>
+        </p:txBody>
+      </p:sp>
+      <p:sp>
+        <p:nvSpPr>
+          <p:cNvPr id="9" name="Text 7"/>
+          <p:cNvSpPr/>
+          <p:nvPr/>
+        </p:nvSpPr>
+        <p:spPr>
+          <a:xfrm>
+            <a:off x="548640" y="5577840"/>
             <a:ext cx="11064240" cy="457200"/>
           </a:xfrm>
           <a:prstGeom prst="rect">
@@ -5680,7 +7949,7 @@
                 <a:ea typeface="Malgun Gothic" pitchFamily="34" charset="-122"/>
                 <a:cs typeface="Malgun Gothic" pitchFamily="34" charset="-120"/>
               </a:rPr>
-              <a:t>테스트 영역은 2MB 단위로 반올림. 오류가 있으면 종료 코드가 non-zero → 스크립트 연동이 쉽습니다.</a:t>
+              <a:t>-Xptxas -v 플래그는 커널의 레지스터·공유 메모리 사용량을 보여줍니다 — 세션 3에서 유용합니다.</a:t>
             </a:r>
             <a:endParaRPr lang="en-US" sz="1350" dirty="0"/>
           </a:p>
@@ -5755,7 +8024,7 @@
                 <a:ea typeface="Courier New" pitchFamily="34" charset="-122"/>
                 <a:cs typeface="Courier New" pitchFamily="34" charset="-120"/>
               </a:rPr>
-              <a:t>7</a:t>
+              <a:t>6</a:t>
             </a:r>
             <a:endParaRPr lang="en-US" sz="2200" dirty="0"/>
           </a:p>
@@ -5794,7 +8063,7 @@
                 <a:ea typeface="Malgun Gothic" pitchFamily="34" charset="-122"/>
                 <a:cs typeface="Malgun Gothic" pitchFamily="34" charset="-120"/>
               </a:rPr>
-              <a:t>이 도구가 찾는 것 · 하드 vs 소프트 오류</a:t>
+              <a:t>실행하고 출력 읽기</a:t>
             </a:r>
             <a:endParaRPr lang="en-US" sz="2900" dirty="0"/>
           </a:p>
@@ -5808,20 +8077,20 @@
         </p:nvSpPr>
         <p:spPr>
           <a:xfrm>
-            <a:off x="548640" y="1645920"/>
-            <a:ext cx="5349240" cy="3931920"/>
+            <a:off x="548640" y="1508760"/>
+            <a:ext cx="11064240" cy="1234440"/>
           </a:xfrm>
           <a:prstGeom prst="roundRect">
             <a:avLst>
-              <a:gd name="adj" fmla="val 1860"/>
+              <a:gd name="adj" fmla="val 3704"/>
             </a:avLst>
           </a:prstGeom>
           <a:solidFill>
-            <a:srgbClr val="18212E"/>
+            <a:srgbClr val="0B1119"/>
           </a:solidFill>
-          <a:ln w="19050">
+          <a:ln w="12700">
             <a:solidFill>
-              <a:srgbClr val="E6604F"/>
+              <a:srgbClr val="2C3A4E"/>
             </a:solidFill>
             <a:prstDash val="solid"/>
           </a:ln>
@@ -5835,47 +8104,8 @@
         </p:nvSpPr>
         <p:spPr>
           <a:xfrm>
-            <a:off x="822960" y="1828800"/>
-            <a:ext cx="4800600" cy="457200"/>
-          </a:xfrm>
-          <a:prstGeom prst="rect">
-            <a:avLst/>
-          </a:prstGeom>
-          <a:noFill/>
-          <a:ln/>
-        </p:spPr>
-        <p:txBody>
-          <a:bodyPr wrap="square" lIns="0" tIns="0" rIns="0" bIns="0" rtlCol="0" anchor="ctr"/>
-          <a:lstStyle/>
-          <a:p>
-            <a:pPr indent="0" marL="0">
-              <a:buNone/>
-            </a:pPr>
-            <a:r>
-              <a:rPr lang="en-US" sz="2000" b="1" dirty="0">
-                <a:solidFill>
-                  <a:srgbClr val="E6604F"/>
-                </a:solidFill>
-                <a:latin typeface="Malgun Gothic" pitchFamily="34" charset="0"/>
-                <a:ea typeface="Malgun Gothic" pitchFamily="34" charset="-122"/>
-                <a:cs typeface="Malgun Gothic" pitchFamily="34" charset="-120"/>
-              </a:rPr>
-              <a:t>하드 오류 (hard error)</a:t>
-            </a:r>
-            <a:endParaRPr lang="en-US" sz="2000" dirty="0"/>
-          </a:p>
-        </p:txBody>
-      </p:sp>
-      <p:sp>
-        <p:nvSpPr>
-          <p:cNvPr id="6" name="Text 4"/>
-          <p:cNvSpPr/>
-          <p:nvPr/>
-        </p:nvSpPr>
-        <p:spPr>
-          <a:xfrm>
-            <a:off x="822960" y="2423160"/>
-            <a:ext cx="4800600" cy="3017520"/>
+            <a:off x="768096" y="1655064"/>
+            <a:ext cx="10625328" cy="941832"/>
           </a:xfrm>
           <a:prstGeom prst="rect">
             <a:avLst/>
@@ -5887,149 +8117,89 @@
           <a:bodyPr wrap="square" lIns="0" tIns="0" rIns="0" bIns="0" rtlCol="0" anchor="t"/>
           <a:lstStyle/>
           <a:p>
-            <a:pPr marL="342900" indent="-342900">
+            <a:pPr algn="l" indent="0" marL="0">
               <a:lnSpc>
-                <a:spcPct val="105000"/>
+                <a:spcPct val="110000"/>
               </a:lnSpc>
-              <a:spcAft>
-                <a:spcPts val="1000"/>
-              </a:spcAft>
-              <a:buSzPct val="100000"/>
-              <a:buChar char="•"/>
-            </a:pPr>
-            <a:r>
-              <a:rPr lang="en-US" sz="1500" dirty="0">
+              <a:buNone/>
+            </a:pPr>
+            <a:r>
+              <a:rPr lang="en-US" sz="1350" dirty="0">
+                <a:solidFill>
+                  <a:srgbClr val="F2C079"/>
+                </a:solidFill>
+                <a:latin typeface="Courier New" pitchFamily="34" charset="0"/>
+                <a:ea typeface="Courier New" pitchFamily="34" charset="-122"/>
+                <a:cs typeface="Courier New" pitchFamily="34" charset="-120"/>
+              </a:rPr>
+              <a:t>./memtestG80                 # 기본: GPU 0, 128MB, 50 iters</a:t>
+            </a:r>
+            <a:endParaRPr lang="en-US" sz="1350" dirty="0"/>
+          </a:p>
+          <a:p>
+            <a:pPr algn="l" indent="0" marL="0">
+              <a:lnSpc>
+                <a:spcPct val="110000"/>
+              </a:lnSpc>
+              <a:buNone/>
+            </a:pPr>
+            <a:r>
+              <a:rPr lang="en-US" sz="1350" dirty="0">
                 <a:solidFill>
                   <a:srgbClr val="E7EDF5"/>
                 </a:solidFill>
-                <a:latin typeface="Malgun Gothic" pitchFamily="34" charset="0"/>
-                <a:ea typeface="Malgun Gothic" pitchFamily="34" charset="-122"/>
-                <a:cs typeface="Malgun Gothic" pitchFamily="34" charset="-120"/>
-              </a:rPr>
-              <a:t>항상 재현되는 물리적 결함</a:t>
-            </a:r>
-            <a:endParaRPr lang="en-US" sz="1500" dirty="0"/>
-          </a:p>
-          <a:p>
-            <a:pPr marL="342900" indent="-342900">
+                <a:latin typeface="Courier New" pitchFamily="34" charset="0"/>
+                <a:ea typeface="Courier New" pitchFamily="34" charset="-122"/>
+                <a:cs typeface="Courier New" pitchFamily="34" charset="-120"/>
+              </a:rPr>
+              <a:t>./memtestG80 256 100         # 256MB를 100회</a:t>
+            </a:r>
+            <a:endParaRPr lang="en-US" sz="1350" dirty="0"/>
+          </a:p>
+          <a:p>
+            <a:pPr algn="l" indent="0" marL="0">
               <a:lnSpc>
-                <a:spcPct val="105000"/>
+                <a:spcPct val="110000"/>
               </a:lnSpc>
-              <a:spcAft>
-                <a:spcPts val="1000"/>
-              </a:spcAft>
-              <a:buSzPct val="100000"/>
-              <a:buChar char="•"/>
-            </a:pPr>
-            <a:r>
-              <a:rPr lang="en-US" sz="1500" dirty="0">
-                <a:solidFill>
-                  <a:srgbClr val="E7EDF5"/>
-                </a:solidFill>
-                <a:latin typeface="Malgun Gothic" pitchFamily="34" charset="0"/>
-                <a:ea typeface="Malgun Gothic" pitchFamily="34" charset="-122"/>
-                <a:cs typeface="Malgun Gothic" pitchFamily="34" charset="-120"/>
-              </a:rPr>
-              <a:t>특정 셀이 stuck-at-0 / stuck-at-1</a:t>
-            </a:r>
-            <a:endParaRPr lang="en-US" sz="1500" dirty="0"/>
-          </a:p>
-          <a:p>
-            <a:pPr marL="342900" indent="-342900">
-              <a:lnSpc>
-                <a:spcPct val="105000"/>
-              </a:lnSpc>
-              <a:spcAft>
-                <a:spcPts val="1000"/>
-              </a:spcAft>
-              <a:buSzPct val="100000"/>
-              <a:buChar char="•"/>
-            </a:pPr>
-            <a:r>
-              <a:rPr lang="en-US" sz="1500" dirty="0">
-                <a:solidFill>
-                  <a:srgbClr val="E7EDF5"/>
-                </a:solidFill>
-                <a:latin typeface="Malgun Gothic" pitchFamily="34" charset="0"/>
-                <a:ea typeface="Malgun Gothic" pitchFamily="34" charset="-122"/>
-                <a:cs typeface="Malgun Gothic" pitchFamily="34" charset="-120"/>
-              </a:rPr>
-              <a:t>인접 셀·데이터 라인 단락</a:t>
-            </a:r>
-            <a:endParaRPr lang="en-US" sz="1500" dirty="0"/>
-          </a:p>
-          <a:p>
-            <a:pPr marL="342900" indent="-342900">
-              <a:lnSpc>
-                <a:spcPct val="105000"/>
-              </a:lnSpc>
-              <a:spcAft>
-                <a:spcPts val="1000"/>
-              </a:spcAft>
-              <a:buSzPct val="100000"/>
-              <a:buChar char="•"/>
-            </a:pPr>
-            <a:r>
-              <a:rPr lang="en-US" sz="1500" dirty="0">
-                <a:solidFill>
-                  <a:srgbClr val="E7EDF5"/>
-                </a:solidFill>
-                <a:latin typeface="Malgun Gothic" pitchFamily="34" charset="0"/>
-                <a:ea typeface="Malgun Gothic" pitchFamily="34" charset="-122"/>
-                <a:cs typeface="Malgun Gothic" pitchFamily="34" charset="-120"/>
-              </a:rPr>
-              <a:t>제조 결함, 영구 손상</a:t>
-            </a:r>
-            <a:endParaRPr lang="en-US" sz="1500" dirty="0"/>
-          </a:p>
-          <a:p>
-            <a:pPr marL="342900" indent="-342900">
-              <a:lnSpc>
-                <a:spcPct val="105000"/>
-              </a:lnSpc>
-              <a:spcAft>
-                <a:spcPts val="1000"/>
-              </a:spcAft>
-              <a:buSzPct val="100000"/>
-              <a:buChar char="•"/>
-            </a:pPr>
-            <a:r>
-              <a:rPr lang="en-US" sz="1500" dirty="0">
-                <a:solidFill>
-                  <a:srgbClr val="E7EDF5"/>
-                </a:solidFill>
-                <a:latin typeface="Malgun Gothic" pitchFamily="34" charset="0"/>
-                <a:ea typeface="Malgun Gothic" pitchFamily="34" charset="-122"/>
-                <a:cs typeface="Malgun Gothic" pitchFamily="34" charset="-120"/>
-              </a:rPr>
-              <a:t>→ Walking/Moving 패턴 테스트로 검출</a:t>
-            </a:r>
-            <a:endParaRPr lang="en-US" sz="1500" dirty="0"/>
-          </a:p>
-        </p:txBody>
-      </p:sp>
-      <p:sp>
-        <p:nvSpPr>
-          <p:cNvPr id="7" name="Shape 5"/>
-          <p:cNvSpPr/>
-          <p:nvPr/>
-        </p:nvSpPr>
-        <p:spPr>
-          <a:xfrm>
-            <a:off x="6263640" y="1645920"/>
-            <a:ext cx="5349240" cy="3931920"/>
+              <a:buNone/>
+            </a:pPr>
+            <a:r>
+              <a:rPr lang="en-US" sz="1350" dirty="0">
+                <a:solidFill>
+                  <a:srgbClr val="3FB8C4"/>
+                </a:solidFill>
+                <a:latin typeface="Courier New" pitchFamily="34" charset="0"/>
+                <a:ea typeface="Courier New" pitchFamily="34" charset="-122"/>
+                <a:cs typeface="Courier New" pitchFamily="34" charset="-120"/>
+              </a:rPr>
+              <a:t>./memtestG80 --gpu 2 512 20  # 3번째 GPU, 512MB, 20회</a:t>
+            </a:r>
+            <a:endParaRPr lang="en-US" sz="1350" dirty="0"/>
+          </a:p>
+        </p:txBody>
+      </p:sp>
+      <p:sp>
+        <p:nvSpPr>
+          <p:cNvPr id="6" name="Shape 4"/>
+          <p:cNvSpPr/>
+          <p:nvPr/>
+        </p:nvSpPr>
+        <p:spPr>
+          <a:xfrm>
+            <a:off x="548640" y="2926080"/>
+            <a:ext cx="11064240" cy="2743200"/>
           </a:xfrm>
           <a:prstGeom prst="roundRect">
             <a:avLst>
-              <a:gd name="adj" fmla="val 1860"/>
+              <a:gd name="adj" fmla="val 1667"/>
             </a:avLst>
           </a:prstGeom>
           <a:solidFill>
-            <a:srgbClr val="18212E"/>
+            <a:srgbClr val="0B1119"/>
           </a:solidFill>
-          <a:ln w="19050">
+          <a:ln w="12700">
             <a:solidFill>
-              <a:srgbClr val="E8A33D"/>
+              <a:srgbClr val="2C3A4E"/>
             </a:solidFill>
             <a:prstDash val="solid"/>
           </a:ln>
@@ -6037,14 +8207,176 @@
       </p:sp>
       <p:sp>
         <p:nvSpPr>
+          <p:cNvPr id="7" name="Text 5"/>
+          <p:cNvSpPr/>
+          <p:nvPr/>
+        </p:nvSpPr>
+        <p:spPr>
+          <a:xfrm>
+            <a:off x="768096" y="3072384"/>
+            <a:ext cx="10625328" cy="2450592"/>
+          </a:xfrm>
+          <a:prstGeom prst="rect">
+            <a:avLst/>
+          </a:prstGeom>
+          <a:noFill/>
+          <a:ln/>
+        </p:spPr>
+        <p:txBody>
+          <a:bodyPr wrap="square" lIns="0" tIns="0" rIns="0" bIns="0" rtlCol="0" anchor="t"/>
+          <a:lstStyle/>
+          <a:p>
+            <a:pPr algn="l" indent="0" marL="0">
+              <a:lnSpc>
+                <a:spcPct val="110000"/>
+              </a:lnSpc>
+              <a:buNone/>
+            </a:pPr>
+            <a:r>
+              <a:rPr lang="en-US" sz="1300" dirty="0">
+                <a:solidFill>
+                  <a:srgbClr val="6B7D94"/>
+                </a:solidFill>
+                <a:latin typeface="Courier New" pitchFamily="34" charset="0"/>
+                <a:ea typeface="Courier New" pitchFamily="34" charset="-122"/>
+                <a:cs typeface="Courier New" pitchFamily="34" charset="-120"/>
+              </a:rPr>
+              <a:t>Running 50 iterations of tests over 128 MB ...</a:t>
+            </a:r>
+            <a:endParaRPr lang="en-US" sz="1300" dirty="0"/>
+          </a:p>
+          <a:p>
+            <a:pPr algn="l" indent="0" marL="0">
+              <a:lnSpc>
+                <a:spcPct val="110000"/>
+              </a:lnSpc>
+              <a:buNone/>
+            </a:pPr>
+            <a:r>
+              <a:rPr lang="en-US" sz="1300" dirty="0">
+                <a:solidFill>
+                  <a:srgbClr val="3FB8C4"/>
+                </a:solidFill>
+                <a:latin typeface="Courier New" pitchFamily="34" charset="0"/>
+                <a:ea typeface="Courier New" pitchFamily="34" charset="-122"/>
+                <a:cs typeface="Courier New" pitchFamily="34" charset="-120"/>
+              </a:rPr>
+              <a:t>  Estimated bandwidth 142000.00 MB/s</a:t>
+            </a:r>
+            <a:endParaRPr lang="en-US" sz="1300" dirty="0"/>
+          </a:p>
+          <a:p>
+            <a:pPr algn="l" indent="0" marL="0">
+              <a:lnSpc>
+                <a:spcPct val="110000"/>
+              </a:lnSpc>
+              <a:buNone/>
+            </a:pPr>
+            <a:r>
+              <a:rPr lang="en-US" sz="1300" dirty="0">
+                <a:solidFill>
+                  <a:srgbClr val="E7EDF5"/>
+                </a:solidFill>
+                <a:latin typeface="Courier New" pitchFamily="34" charset="0"/>
+                <a:ea typeface="Courier New" pitchFamily="34" charset="-122"/>
+                <a:cs typeface="Courier New" pitchFamily="34" charset="-120"/>
+              </a:rPr>
+              <a:t>Test iteration 1 (GPU 0, 128 MiB): 0 errors so far</a:t>
+            </a:r>
+            <a:endParaRPr lang="en-US" sz="1300" dirty="0"/>
+          </a:p>
+          <a:p>
+            <a:pPr algn="l" indent="0" marL="0">
+              <a:lnSpc>
+                <a:spcPct val="110000"/>
+              </a:lnSpc>
+              <a:buNone/>
+            </a:pPr>
+            <a:r>
+              <a:rPr lang="en-US" sz="1300" dirty="0">
+                <a:solidFill>
+                  <a:srgbClr val="E7EDF5"/>
+                </a:solidFill>
+                <a:latin typeface="Courier New" pitchFamily="34" charset="0"/>
+                <a:ea typeface="Courier New" pitchFamily="34" charset="-122"/>
+                <a:cs typeface="Courier New" pitchFamily="34" charset="-120"/>
+              </a:rPr>
+              <a:t>  Moving Inversions (ones and zeros): 0 errors (12 ms)</a:t>
+            </a:r>
+            <a:endParaRPr lang="en-US" sz="1300" dirty="0"/>
+          </a:p>
+          <a:p>
+            <a:pPr algn="l" indent="0" marL="0">
+              <a:lnSpc>
+                <a:spcPct val="110000"/>
+              </a:lnSpc>
+              <a:buNone/>
+            </a:pPr>
+            <a:r>
+              <a:rPr lang="en-US" sz="1300" dirty="0">
+                <a:solidFill>
+                  <a:srgbClr val="E7EDF5"/>
+                </a:solidFill>
+                <a:latin typeface="Courier New" pitchFamily="34" charset="0"/>
+                <a:ea typeface="Courier New" pitchFamily="34" charset="-122"/>
+                <a:cs typeface="Courier New" pitchFamily="34" charset="-120"/>
+              </a:rPr>
+              <a:t>  Memtest86 Walking 8-bit: 0 errors (85 ms)</a:t>
+            </a:r>
+            <a:endParaRPr lang="en-US" sz="1300" dirty="0"/>
+          </a:p>
+          <a:p>
+            <a:pPr algn="l" indent="0" marL="0">
+              <a:lnSpc>
+                <a:spcPct val="110000"/>
+              </a:lnSpc>
+              <a:buNone/>
+            </a:pPr>
+            <a:r>
+              <a:rPr lang="en-US" sz="1300" dirty="0">
+                <a:solidFill>
+                  <a:srgbClr val="6B7D94"/>
+                </a:solidFill>
+                <a:latin typeface="Courier New" pitchFamily="34" charset="0"/>
+                <a:ea typeface="Courier New" pitchFamily="34" charset="-122"/>
+                <a:cs typeface="Courier New" pitchFamily="34" charset="-120"/>
+              </a:rPr>
+              <a:t>  ...  (한 iteration 당 13종 테스트)</a:t>
+            </a:r>
+            <a:endParaRPr lang="en-US" sz="1300" dirty="0"/>
+          </a:p>
+          <a:p>
+            <a:pPr algn="l" indent="0" marL="0">
+              <a:lnSpc>
+                <a:spcPct val="110000"/>
+              </a:lnSpc>
+              <a:buNone/>
+            </a:pPr>
+            <a:r>
+              <a:rPr lang="en-US" sz="1300" dirty="0">
+                <a:solidFill>
+                  <a:srgbClr val="F2C079"/>
+                </a:solidFill>
+                <a:latin typeface="Courier New" pitchFamily="34" charset="0"/>
+                <a:ea typeface="Courier New" pitchFamily="34" charset="-122"/>
+                <a:cs typeface="Courier New" pitchFamily="34" charset="-120"/>
+              </a:rPr>
+              <a:t>Final error count after 50 iterations ...: 0 errors</a:t>
+            </a:r>
+            <a:endParaRPr lang="en-US" sz="1300" dirty="0"/>
+          </a:p>
+        </p:txBody>
+      </p:sp>
+      <p:sp>
+        <p:nvSpPr>
           <p:cNvPr id="8" name="Text 6"/>
           <p:cNvSpPr/>
           <p:nvPr/>
         </p:nvSpPr>
         <p:spPr>
           <a:xfrm>
-            <a:off x="6537960" y="1828800"/>
-            <a:ext cx="4800600" cy="457200"/>
+            <a:off x="548640" y="5852160"/>
+            <a:ext cx="11064240" cy="457200"/>
           </a:xfrm>
           <a:prstGeom prst="rect">
             <a:avLst/>
@@ -6060,159 +8392,17 @@
               <a:buNone/>
             </a:pPr>
             <a:r>
-              <a:rPr lang="en-US" sz="2000" b="1" dirty="0">
-                <a:solidFill>
-                  <a:srgbClr val="E8A33D"/>
-                </a:solidFill>
-                <a:latin typeface="Malgun Gothic" pitchFamily="34" charset="0"/>
-                <a:ea typeface="Malgun Gothic" pitchFamily="34" charset="-122"/>
-                <a:cs typeface="Malgun Gothic" pitchFamily="34" charset="-120"/>
-              </a:rPr>
-              <a:t>소프트 오류 (soft error)</a:t>
-            </a:r>
-            <a:endParaRPr lang="en-US" sz="2000" dirty="0"/>
-          </a:p>
-        </p:txBody>
-      </p:sp>
-      <p:sp>
-        <p:nvSpPr>
-          <p:cNvPr id="9" name="Text 7"/>
-          <p:cNvSpPr/>
-          <p:nvPr/>
-        </p:nvSpPr>
-        <p:spPr>
-          <a:xfrm>
-            <a:off x="6537960" y="2423160"/>
-            <a:ext cx="4800600" cy="3017520"/>
-          </a:xfrm>
-          <a:prstGeom prst="rect">
-            <a:avLst/>
-          </a:prstGeom>
-          <a:noFill/>
-          <a:ln/>
-        </p:spPr>
-        <p:txBody>
-          <a:bodyPr wrap="square" lIns="0" tIns="0" rIns="0" bIns="0" rtlCol="0" anchor="t"/>
-          <a:lstStyle/>
-          <a:p>
-            <a:pPr marL="342900" indent="-342900">
-              <a:lnSpc>
-                <a:spcPct val="105000"/>
-              </a:lnSpc>
-              <a:spcAft>
-                <a:spcPts val="1000"/>
-              </a:spcAft>
-              <a:buSzPct val="100000"/>
-              <a:buChar char="•"/>
-            </a:pPr>
-            <a:r>
-              <a:rPr lang="en-US" sz="1500" dirty="0">
-                <a:solidFill>
-                  <a:srgbClr val="E7EDF5"/>
-                </a:solidFill>
-                <a:latin typeface="Malgun Gothic" pitchFamily="34" charset="0"/>
-                <a:ea typeface="Malgun Gothic" pitchFamily="34" charset="-122"/>
-                <a:cs typeface="Malgun Gothic" pitchFamily="34" charset="-120"/>
-              </a:rPr>
-              <a:t>간헐적으로만 나타나는 오류</a:t>
-            </a:r>
-            <a:endParaRPr lang="en-US" sz="1500" dirty="0"/>
-          </a:p>
-          <a:p>
-            <a:pPr marL="342900" indent="-342900">
-              <a:lnSpc>
-                <a:spcPct val="105000"/>
-              </a:lnSpc>
-              <a:spcAft>
-                <a:spcPts val="1000"/>
-              </a:spcAft>
-              <a:buSzPct val="100000"/>
-              <a:buChar char="•"/>
-            </a:pPr>
-            <a:r>
-              <a:rPr lang="en-US" sz="1500" dirty="0">
-                <a:solidFill>
-                  <a:srgbClr val="E7EDF5"/>
-                </a:solidFill>
-                <a:latin typeface="Malgun Gothic" pitchFamily="34" charset="0"/>
-                <a:ea typeface="Malgun Gothic" pitchFamily="34" charset="-122"/>
-                <a:cs typeface="Malgun Gothic" pitchFamily="34" charset="-120"/>
-              </a:rPr>
-              <a:t>오버클럭·발열·전압 마진 부족</a:t>
-            </a:r>
-            <a:endParaRPr lang="en-US" sz="1500" dirty="0"/>
-          </a:p>
-          <a:p>
-            <a:pPr marL="342900" indent="-342900">
-              <a:lnSpc>
-                <a:spcPct val="105000"/>
-              </a:lnSpc>
-              <a:spcAft>
-                <a:spcPts val="1000"/>
-              </a:spcAft>
-              <a:buSzPct val="100000"/>
-              <a:buChar char="•"/>
-            </a:pPr>
-            <a:r>
-              <a:rPr lang="en-US" sz="1500" dirty="0">
-                <a:solidFill>
-                  <a:srgbClr val="E7EDF5"/>
-                </a:solidFill>
-                <a:latin typeface="Malgun Gothic" pitchFamily="34" charset="0"/>
-                <a:ea typeface="Malgun Gothic" pitchFamily="34" charset="-122"/>
-                <a:cs typeface="Malgun Gothic" pitchFamily="34" charset="-120"/>
-              </a:rPr>
-              <a:t>우주선(cosmic ray) 비트 플립</a:t>
-            </a:r>
-            <a:endParaRPr lang="en-US" sz="1500" dirty="0"/>
-          </a:p>
-          <a:p>
-            <a:pPr marL="342900" indent="-342900">
-              <a:lnSpc>
-                <a:spcPct val="105000"/>
-              </a:lnSpc>
-              <a:spcAft>
-                <a:spcPts val="1000"/>
-              </a:spcAft>
-              <a:buSzPct val="100000"/>
-              <a:buChar char="•"/>
-            </a:pPr>
-            <a:r>
-              <a:rPr lang="en-US" sz="1500" dirty="0">
-                <a:solidFill>
-                  <a:srgbClr val="E7EDF5"/>
-                </a:solidFill>
-                <a:latin typeface="Malgun Gothic" pitchFamily="34" charset="0"/>
-                <a:ea typeface="Malgun Gothic" pitchFamily="34" charset="-122"/>
-                <a:cs typeface="Malgun Gothic" pitchFamily="34" charset="-120"/>
-              </a:rPr>
-              <a:t>5만 번에 한 번 꼴로도 발생 가능</a:t>
-            </a:r>
-            <a:endParaRPr lang="en-US" sz="1500" dirty="0"/>
-          </a:p>
-          <a:p>
-            <a:pPr marL="342900" indent="-342900">
-              <a:lnSpc>
-                <a:spcPct val="105000"/>
-              </a:lnSpc>
-              <a:spcAft>
-                <a:spcPts val="1000"/>
-              </a:spcAft>
-              <a:buSzPct val="100000"/>
-              <a:buChar char="•"/>
-            </a:pPr>
-            <a:r>
-              <a:rPr lang="en-US" sz="1500" dirty="0">
-                <a:solidFill>
-                  <a:srgbClr val="E7EDF5"/>
-                </a:solidFill>
-                <a:latin typeface="Malgun Gothic" pitchFamily="34" charset="0"/>
-                <a:ea typeface="Malgun Gothic" pitchFamily="34" charset="-122"/>
-                <a:cs typeface="Malgun Gothic" pitchFamily="34" charset="-120"/>
-              </a:rPr>
-              <a:t>→ 크게·오래 반복해야 잡힘</a:t>
-            </a:r>
-            <a:endParaRPr lang="en-US" sz="1500" dirty="0"/>
+              <a:rPr lang="en-US" sz="1350" i="1" dirty="0">
+                <a:solidFill>
+                  <a:srgbClr val="9FB0C4"/>
+                </a:solidFill>
+                <a:latin typeface="Malgun Gothic" pitchFamily="34" charset="0"/>
+                <a:ea typeface="Malgun Gothic" pitchFamily="34" charset="-122"/>
+                <a:cs typeface="Malgun Gothic" pitchFamily="34" charset="-120"/>
+              </a:rPr>
+              <a:t>테스트 영역은 2MB 단위로 반올림. 오류가 있으면 종료 코드가 non-zero → 스크립트 연동이 쉽습니다.</a:t>
+            </a:r>
+            <a:endParaRPr lang="en-US" sz="1350" dirty="0"/>
           </a:p>
         </p:txBody>
       </p:sp>
@@ -6265,7 +8455,7 @@
             </a:avLst>
           </a:prstGeom>
           <a:solidFill>
-            <a:srgbClr val="E8A33D"/>
+            <a:srgbClr val="3FB8C4"/>
           </a:solidFill>
           <a:ln/>
         </p:spPr>
@@ -6285,7 +8475,7 @@
                 <a:ea typeface="Courier New" pitchFamily="34" charset="-122"/>
                 <a:cs typeface="Courier New" pitchFamily="34" charset="-120"/>
               </a:rPr>
-              <a:t>8</a:t>
+              <a:t>6</a:t>
             </a:r>
             <a:endParaRPr lang="en-US" sz="2200" dirty="0"/>
           </a:p>
@@ -6324,7 +8514,7 @@
                 <a:ea typeface="Malgun Gothic" pitchFamily="34" charset="-122"/>
                 <a:cs typeface="Malgun Gothic" pitchFamily="34" charset="-120"/>
               </a:rPr>
-              <a:t>실습 미리보기 · Lab 0</a:t>
+              <a:t>프로그램의 큰 흐름</a:t>
             </a:r>
             <a:endParaRPr lang="en-US" sz="2900" dirty="0"/>
           </a:p>
@@ -6332,79 +8522,251 @@
       </p:sp>
       <p:sp>
         <p:nvSpPr>
-          <p:cNvPr id="4" name="Shape 2"/>
-          <p:cNvSpPr/>
-          <p:nvPr/>
-        </p:nvSpPr>
-        <p:spPr>
-          <a:xfrm>
-            <a:off x="548640" y="1600200"/>
-            <a:ext cx="5303520" cy="1920240"/>
+          <p:cNvPr id="4" name="Text 2"/>
+          <p:cNvSpPr/>
+          <p:nvPr/>
+        </p:nvSpPr>
+        <p:spPr>
+          <a:xfrm>
+            <a:off x="548640" y="1371600"/>
+            <a:ext cx="11064240" cy="411480"/>
+          </a:xfrm>
+          <a:prstGeom prst="rect">
+            <a:avLst/>
+          </a:prstGeom>
+          <a:noFill/>
+          <a:ln/>
+        </p:spPr>
+        <p:txBody>
+          <a:bodyPr wrap="square" lIns="0" tIns="0" rIns="0" bIns="0" rtlCol="0" anchor="ctr"/>
+          <a:lstStyle/>
+          <a:p>
+            <a:pPr indent="0" marL="0">
+              <a:buNone/>
+            </a:pPr>
+            <a:r>
+              <a:rPr lang="en-US" sz="1450" dirty="0">
+                <a:solidFill>
+                  <a:srgbClr val="9FB0C4"/>
+                </a:solidFill>
+                <a:latin typeface="Malgun Gothic" pitchFamily="34" charset="0"/>
+                <a:ea typeface="Malgun Gothic" pitchFamily="34" charset="-122"/>
+                <a:cs typeface="Malgun Gothic" pitchFamily="34" charset="-120"/>
+              </a:rPr>
+              <a:t>main()이 하는 일의 지도입니다. 앞으로 6회에 걸쳐 각 단계를 안쪽까지 파고듭니다.</a:t>
+            </a:r>
+            <a:endParaRPr lang="en-US" sz="1450" dirty="0"/>
+          </a:p>
+        </p:txBody>
+      </p:sp>
+      <p:sp>
+        <p:nvSpPr>
+          <p:cNvPr id="5" name="Shape 3"/>
+          <p:cNvSpPr/>
+          <p:nvPr/>
+        </p:nvSpPr>
+        <p:spPr>
+          <a:xfrm>
+            <a:off x="653796" y="2148840"/>
+            <a:ext cx="1965960" cy="1371600"/>
           </a:xfrm>
           <a:prstGeom prst="roundRect">
             <a:avLst>
-              <a:gd name="adj" fmla="val 3810"/>
+              <a:gd name="adj" fmla="val 5333"/>
             </a:avLst>
           </a:prstGeom>
           <a:solidFill>
             <a:srgbClr val="18212E"/>
           </a:solidFill>
-          <a:ln/>
-        </p:spPr>
-      </p:sp>
-      <p:sp>
-        <p:nvSpPr>
-          <p:cNvPr id="5" name="Text 3"/>
-          <p:cNvSpPr/>
-          <p:nvPr/>
-        </p:nvSpPr>
-        <p:spPr>
-          <a:xfrm>
-            <a:off x="804672" y="1801368"/>
-            <a:ext cx="1188720" cy="502920"/>
-          </a:xfrm>
-          <a:prstGeom prst="roundRect">
-            <a:avLst>
-              <a:gd name="adj" fmla="val 14545"/>
-            </a:avLst>
-          </a:prstGeom>
-          <a:solidFill>
-            <a:srgbClr val="E8A33D"/>
-          </a:solidFill>
-          <a:ln/>
-        </p:spPr>
-        <p:txBody>
-          <a:bodyPr wrap="square" rtlCol="0" anchor="ctr"/>
+          <a:ln w="19050">
+            <a:solidFill>
+              <a:srgbClr val="3FB8C4"/>
+            </a:solidFill>
+            <a:prstDash val="solid"/>
+          </a:ln>
+        </p:spPr>
+      </p:sp>
+      <p:sp>
+        <p:nvSpPr>
+          <p:cNvPr id="6" name="Text 4"/>
+          <p:cNvSpPr/>
+          <p:nvPr/>
+        </p:nvSpPr>
+        <p:spPr>
+          <a:xfrm>
+            <a:off x="763524" y="2313432"/>
+            <a:ext cx="1746504" cy="640080"/>
+          </a:xfrm>
+          <a:prstGeom prst="rect">
+            <a:avLst/>
+          </a:prstGeom>
+          <a:noFill/>
+          <a:ln/>
+        </p:spPr>
+        <p:txBody>
+          <a:bodyPr wrap="square" lIns="0" tIns="0" rIns="0" bIns="0" rtlCol="0" anchor="t"/>
           <a:lstStyle/>
           <a:p>
             <a:pPr algn="ctr" indent="0" marL="0">
-              <a:buNone/>
-            </a:pPr>
-            <a:r>
-              <a:rPr lang="en-US" sz="1700" b="1" dirty="0">
-                <a:solidFill>
-                  <a:srgbClr val="101722"/>
+              <a:lnSpc>
+                <a:spcPct val="105000"/>
+              </a:lnSpc>
+              <a:buNone/>
+            </a:pPr>
+            <a:r>
+              <a:rPr lang="en-US" sz="1400" b="1" dirty="0">
+                <a:solidFill>
+                  <a:srgbClr val="E7EDF5"/>
+                </a:solidFill>
+                <a:latin typeface="Malgun Gothic" pitchFamily="34" charset="0"/>
+                <a:ea typeface="Malgun Gothic" pitchFamily="34" charset="-122"/>
+                <a:cs typeface="Malgun Gothic" pitchFamily="34" charset="-120"/>
+              </a:rPr>
+              <a:t>① GPU 선택·초기화</a:t>
+            </a:r>
+            <a:endParaRPr lang="en-US" sz="1400" dirty="0"/>
+          </a:p>
+        </p:txBody>
+      </p:sp>
+      <p:sp>
+        <p:nvSpPr>
+          <p:cNvPr id="7" name="Text 5"/>
+          <p:cNvSpPr/>
+          <p:nvPr/>
+        </p:nvSpPr>
+        <p:spPr>
+          <a:xfrm>
+            <a:off x="763524" y="2926080"/>
+            <a:ext cx="1746504" cy="320040"/>
+          </a:xfrm>
+          <a:prstGeom prst="rect">
+            <a:avLst/>
+          </a:prstGeom>
+          <a:noFill/>
+          <a:ln/>
+        </p:spPr>
+        <p:txBody>
+          <a:bodyPr wrap="square" lIns="0" tIns="0" rIns="0" bIns="0" rtlCol="0" anchor="ctr"/>
+          <a:lstStyle/>
+          <a:p>
+            <a:pPr algn="ctr" indent="0" marL="0">
+              <a:buNone/>
+            </a:pPr>
+            <a:r>
+              <a:rPr lang="en-US" sz="950" dirty="0">
+                <a:solidFill>
+                  <a:srgbClr val="9FB0C4"/>
                 </a:solidFill>
                 <a:latin typeface="Courier New" pitchFamily="34" charset="0"/>
                 <a:ea typeface="Courier New" pitchFamily="34" charset="-122"/>
                 <a:cs typeface="Courier New" pitchFamily="34" charset="-120"/>
               </a:rPr>
-              <a:t>Ex 1</a:t>
-            </a:r>
-            <a:endParaRPr lang="en-US" sz="1700" dirty="0"/>
-          </a:p>
-        </p:txBody>
-      </p:sp>
-      <p:sp>
-        <p:nvSpPr>
-          <p:cNvPr id="6" name="Text 4"/>
-          <p:cNvSpPr/>
-          <p:nvPr/>
-        </p:nvSpPr>
-        <p:spPr>
-          <a:xfrm>
-            <a:off x="2148840" y="1819656"/>
-            <a:ext cx="3474720" cy="822960"/>
+              <a:t>cudaSetDevice, deviceProps</a:t>
+            </a:r>
+            <a:endParaRPr lang="en-US" sz="950" dirty="0"/>
+          </a:p>
+        </p:txBody>
+      </p:sp>
+      <p:sp>
+        <p:nvSpPr>
+          <p:cNvPr id="8" name="Text 6"/>
+          <p:cNvSpPr/>
+          <p:nvPr/>
+        </p:nvSpPr>
+        <p:spPr>
+          <a:xfrm>
+            <a:off x="763524" y="3227832"/>
+            <a:ext cx="1746504" cy="256032"/>
+          </a:xfrm>
+          <a:prstGeom prst="rect">
+            <a:avLst/>
+          </a:prstGeom>
+          <a:noFill/>
+          <a:ln/>
+        </p:spPr>
+        <p:txBody>
+          <a:bodyPr wrap="square" lIns="0" tIns="0" rIns="0" bIns="0" rtlCol="0" anchor="ctr"/>
+          <a:lstStyle/>
+          <a:p>
+            <a:pPr algn="ctr" indent="0" marL="0">
+              <a:buNone/>
+            </a:pPr>
+            <a:r>
+              <a:rPr lang="en-US" sz="1000" i="1" dirty="0">
+                <a:solidFill>
+                  <a:srgbClr val="3FB8C4"/>
+                </a:solidFill>
+                <a:latin typeface="Malgun Gothic" pitchFamily="34" charset="0"/>
+                <a:ea typeface="Malgun Gothic" pitchFamily="34" charset="-122"/>
+                <a:cs typeface="Malgun Gothic" pitchFamily="34" charset="-120"/>
+              </a:rPr>
+              <a:t>세션 0</a:t>
+            </a:r>
+            <a:endParaRPr lang="en-US" sz="1000" dirty="0"/>
+          </a:p>
+        </p:txBody>
+      </p:sp>
+      <p:sp>
+        <p:nvSpPr>
+          <p:cNvPr id="9" name="Shape 7"/>
+          <p:cNvSpPr/>
+          <p:nvPr/>
+        </p:nvSpPr>
+        <p:spPr>
+          <a:xfrm>
+            <a:off x="2638044" y="2834640"/>
+            <a:ext cx="219456" cy="0"/>
+          </a:xfrm>
+          <a:prstGeom prst="line">
+            <a:avLst/>
+          </a:prstGeom>
+          <a:noFill/>
+          <a:ln w="25400">
+            <a:solidFill>
+              <a:srgbClr val="3FB8C4"/>
+            </a:solidFill>
+            <a:prstDash val="solid"/>
+            <a:tailEnd type="triangle"/>
+          </a:ln>
+        </p:spPr>
+      </p:sp>
+      <p:sp>
+        <p:nvSpPr>
+          <p:cNvPr id="10" name="Shape 8"/>
+          <p:cNvSpPr/>
+          <p:nvPr/>
+        </p:nvSpPr>
+        <p:spPr>
+          <a:xfrm>
+            <a:off x="2875788" y="2148840"/>
+            <a:ext cx="1965960" cy="1371600"/>
+          </a:xfrm>
+          <a:prstGeom prst="roundRect">
+            <a:avLst>
+              <a:gd name="adj" fmla="val 5333"/>
+            </a:avLst>
+          </a:prstGeom>
+          <a:solidFill>
+            <a:srgbClr val="18212E"/>
+          </a:solidFill>
+          <a:ln w="19050">
+            <a:solidFill>
+              <a:srgbClr val="E8A33D"/>
+            </a:solidFill>
+            <a:prstDash val="solid"/>
+          </a:ln>
+        </p:spPr>
+      </p:sp>
+      <p:sp>
+        <p:nvSpPr>
+          <p:cNvPr id="11" name="Text 9"/>
+          <p:cNvSpPr/>
+          <p:nvPr/>
+        </p:nvSpPr>
+        <p:spPr>
+          <a:xfrm>
+            <a:off x="2985516" y="2313432"/>
+            <a:ext cx="1746504" cy="640080"/>
           </a:xfrm>
           <a:prstGeom prst="rect">
             <a:avLst/>
@@ -6416,11 +8778,14 @@
           <a:bodyPr wrap="square" lIns="0" tIns="0" rIns="0" bIns="0" rtlCol="0" anchor="t"/>
           <a:lstStyle/>
           <a:p>
-            <a:pPr indent="0" marL="0">
-              <a:buNone/>
-            </a:pPr>
-            <a:r>
-              <a:rPr lang="en-US" sz="1800" b="1" dirty="0">
+            <a:pPr algn="ctr" indent="0" marL="0">
+              <a:lnSpc>
+                <a:spcPct val="105000"/>
+              </a:lnSpc>
+              <a:buNone/>
+            </a:pPr>
+            <a:r>
+              <a:rPr lang="en-US" sz="1400" b="1" dirty="0">
                 <a:solidFill>
                   <a:srgbClr val="E7EDF5"/>
                 </a:solidFill>
@@ -6428,22 +8793,703 @@
                 <a:ea typeface="Malgun Gothic" pitchFamily="34" charset="-122"/>
                 <a:cs typeface="Malgun Gothic" pitchFamily="34" charset="-120"/>
               </a:rPr>
-              <a:t>빌드하기</a:t>
-            </a:r>
-            <a:endParaRPr lang="en-US" sz="1800" dirty="0"/>
-          </a:p>
-        </p:txBody>
-      </p:sp>
-      <p:sp>
-        <p:nvSpPr>
-          <p:cNvPr id="7" name="Text 5"/>
-          <p:cNvSpPr/>
-          <p:nvPr/>
-        </p:nvSpPr>
-        <p:spPr>
-          <a:xfrm>
-            <a:off x="804672" y="2697480"/>
-            <a:ext cx="4791456" cy="731520"/>
+              <a:t>② 메모리 할당</a:t>
+            </a:r>
+            <a:endParaRPr lang="en-US" sz="1400" dirty="0"/>
+          </a:p>
+        </p:txBody>
+      </p:sp>
+      <p:sp>
+        <p:nvSpPr>
+          <p:cNvPr id="12" name="Text 10"/>
+          <p:cNvSpPr/>
+          <p:nvPr/>
+        </p:nvSpPr>
+        <p:spPr>
+          <a:xfrm>
+            <a:off x="2985516" y="2926080"/>
+            <a:ext cx="1746504" cy="320040"/>
+          </a:xfrm>
+          <a:prstGeom prst="rect">
+            <a:avLst/>
+          </a:prstGeom>
+          <a:noFill/>
+          <a:ln/>
+        </p:spPr>
+        <p:txBody>
+          <a:bodyPr wrap="square" lIns="0" tIns="0" rIns="0" bIns="0" rtlCol="0" anchor="ctr"/>
+          <a:lstStyle/>
+          <a:p>
+            <a:pPr algn="ctr" indent="0" marL="0">
+              <a:buNone/>
+            </a:pPr>
+            <a:r>
+              <a:rPr lang="en-US" sz="950" dirty="0">
+                <a:solidFill>
+                  <a:srgbClr val="9FB0C4"/>
+                </a:solidFill>
+                <a:latin typeface="Courier New" pitchFamily="34" charset="0"/>
+                <a:ea typeface="Courier New" pitchFamily="34" charset="-122"/>
+                <a:cs typeface="Courier New" pitchFamily="34" charset="-120"/>
+              </a:rPr>
+              <a:t>tester.allocate(MB)</a:t>
+            </a:r>
+            <a:endParaRPr lang="en-US" sz="950" dirty="0"/>
+          </a:p>
+        </p:txBody>
+      </p:sp>
+      <p:sp>
+        <p:nvSpPr>
+          <p:cNvPr id="13" name="Text 11"/>
+          <p:cNvSpPr/>
+          <p:nvPr/>
+        </p:nvSpPr>
+        <p:spPr>
+          <a:xfrm>
+            <a:off x="2985516" y="3227832"/>
+            <a:ext cx="1746504" cy="256032"/>
+          </a:xfrm>
+          <a:prstGeom prst="rect">
+            <a:avLst/>
+          </a:prstGeom>
+          <a:noFill/>
+          <a:ln/>
+        </p:spPr>
+        <p:txBody>
+          <a:bodyPr wrap="square" lIns="0" tIns="0" rIns="0" bIns="0" rtlCol="0" anchor="ctr"/>
+          <a:lstStyle/>
+          <a:p>
+            <a:pPr algn="ctr" indent="0" marL="0">
+              <a:buNone/>
+            </a:pPr>
+            <a:r>
+              <a:rPr lang="en-US" sz="1000" i="1" dirty="0">
+                <a:solidFill>
+                  <a:srgbClr val="E8A33D"/>
+                </a:solidFill>
+                <a:latin typeface="Malgun Gothic" pitchFamily="34" charset="0"/>
+                <a:ea typeface="Malgun Gothic" pitchFamily="34" charset="-122"/>
+                <a:cs typeface="Malgun Gothic" pitchFamily="34" charset="-120"/>
+              </a:rPr>
+              <a:t>세션 2</a:t>
+            </a:r>
+            <a:endParaRPr lang="en-US" sz="1000" dirty="0"/>
+          </a:p>
+        </p:txBody>
+      </p:sp>
+      <p:sp>
+        <p:nvSpPr>
+          <p:cNvPr id="14" name="Shape 12"/>
+          <p:cNvSpPr/>
+          <p:nvPr/>
+        </p:nvSpPr>
+        <p:spPr>
+          <a:xfrm>
+            <a:off x="4860036" y="2834640"/>
+            <a:ext cx="219456" cy="0"/>
+          </a:xfrm>
+          <a:prstGeom prst="line">
+            <a:avLst/>
+          </a:prstGeom>
+          <a:noFill/>
+          <a:ln w="25400">
+            <a:solidFill>
+              <a:srgbClr val="E8A33D"/>
+            </a:solidFill>
+            <a:prstDash val="solid"/>
+            <a:tailEnd type="triangle"/>
+          </a:ln>
+        </p:spPr>
+      </p:sp>
+      <p:sp>
+        <p:nvSpPr>
+          <p:cNvPr id="15" name="Shape 13"/>
+          <p:cNvSpPr/>
+          <p:nvPr/>
+        </p:nvSpPr>
+        <p:spPr>
+          <a:xfrm>
+            <a:off x="5097780" y="2148840"/>
+            <a:ext cx="1965960" cy="1371600"/>
+          </a:xfrm>
+          <a:prstGeom prst="roundRect">
+            <a:avLst>
+              <a:gd name="adj" fmla="val 5333"/>
+            </a:avLst>
+          </a:prstGeom>
+          <a:solidFill>
+            <a:srgbClr val="18212E"/>
+          </a:solidFill>
+          <a:ln w="19050">
+            <a:solidFill>
+              <a:srgbClr val="3FB8C4"/>
+            </a:solidFill>
+            <a:prstDash val="solid"/>
+          </a:ln>
+        </p:spPr>
+      </p:sp>
+      <p:sp>
+        <p:nvSpPr>
+          <p:cNvPr id="16" name="Text 14"/>
+          <p:cNvSpPr/>
+          <p:nvPr/>
+        </p:nvSpPr>
+        <p:spPr>
+          <a:xfrm>
+            <a:off x="5207508" y="2313432"/>
+            <a:ext cx="1746504" cy="640080"/>
+          </a:xfrm>
+          <a:prstGeom prst="rect">
+            <a:avLst/>
+          </a:prstGeom>
+          <a:noFill/>
+          <a:ln/>
+        </p:spPr>
+        <p:txBody>
+          <a:bodyPr wrap="square" lIns="0" tIns="0" rIns="0" bIns="0" rtlCol="0" anchor="t"/>
+          <a:lstStyle/>
+          <a:p>
+            <a:pPr algn="ctr" indent="0" marL="0">
+              <a:lnSpc>
+                <a:spcPct val="105000"/>
+              </a:lnSpc>
+              <a:buNone/>
+            </a:pPr>
+            <a:r>
+              <a:rPr lang="en-US" sz="1400" b="1" dirty="0">
+                <a:solidFill>
+                  <a:srgbClr val="E7EDF5"/>
+                </a:solidFill>
+                <a:latin typeface="Malgun Gothic" pitchFamily="34" charset="0"/>
+                <a:ea typeface="Malgun Gothic" pitchFamily="34" charset="-122"/>
+                <a:cs typeface="Malgun Gothic" pitchFamily="34" charset="-120"/>
+              </a:rPr>
+              <a:t>③ 대역폭 측정</a:t>
+            </a:r>
+            <a:endParaRPr lang="en-US" sz="1400" dirty="0"/>
+          </a:p>
+        </p:txBody>
+      </p:sp>
+      <p:sp>
+        <p:nvSpPr>
+          <p:cNvPr id="17" name="Text 15"/>
+          <p:cNvSpPr/>
+          <p:nvPr/>
+        </p:nvSpPr>
+        <p:spPr>
+          <a:xfrm>
+            <a:off x="5207508" y="2926080"/>
+            <a:ext cx="1746504" cy="320040"/>
+          </a:xfrm>
+          <a:prstGeom prst="rect">
+            <a:avLst/>
+          </a:prstGeom>
+          <a:noFill/>
+          <a:ln/>
+        </p:spPr>
+        <p:txBody>
+          <a:bodyPr wrap="square" lIns="0" tIns="0" rIns="0" bIns="0" rtlCol="0" anchor="ctr"/>
+          <a:lstStyle/>
+          <a:p>
+            <a:pPr algn="ctr" indent="0" marL="0">
+              <a:buNone/>
+            </a:pPr>
+            <a:r>
+              <a:rPr lang="en-US" sz="950" dirty="0">
+                <a:solidFill>
+                  <a:srgbClr val="9FB0C4"/>
+                </a:solidFill>
+                <a:latin typeface="Courier New" pitchFamily="34" charset="0"/>
+                <a:ea typeface="Courier New" pitchFamily="34" charset="-122"/>
+                <a:cs typeface="Courier New" pitchFamily="34" charset="-120"/>
+              </a:rPr>
+              <a:t>gpuMemoryBandwidth</a:t>
+            </a:r>
+            <a:endParaRPr lang="en-US" sz="950" dirty="0"/>
+          </a:p>
+        </p:txBody>
+      </p:sp>
+      <p:sp>
+        <p:nvSpPr>
+          <p:cNvPr id="18" name="Text 16"/>
+          <p:cNvSpPr/>
+          <p:nvPr/>
+        </p:nvSpPr>
+        <p:spPr>
+          <a:xfrm>
+            <a:off x="5207508" y="3227832"/>
+            <a:ext cx="1746504" cy="256032"/>
+          </a:xfrm>
+          <a:prstGeom prst="rect">
+            <a:avLst/>
+          </a:prstGeom>
+          <a:noFill/>
+          <a:ln/>
+        </p:spPr>
+        <p:txBody>
+          <a:bodyPr wrap="square" lIns="0" tIns="0" rIns="0" bIns="0" rtlCol="0" anchor="ctr"/>
+          <a:lstStyle/>
+          <a:p>
+            <a:pPr algn="ctr" indent="0" marL="0">
+              <a:buNone/>
+            </a:pPr>
+            <a:r>
+              <a:rPr lang="en-US" sz="1000" i="1" dirty="0">
+                <a:solidFill>
+                  <a:srgbClr val="3FB8C4"/>
+                </a:solidFill>
+                <a:latin typeface="Malgun Gothic" pitchFamily="34" charset="0"/>
+                <a:ea typeface="Malgun Gothic" pitchFamily="34" charset="-122"/>
+                <a:cs typeface="Malgun Gothic" pitchFamily="34" charset="-120"/>
+              </a:rPr>
+              <a:t>세션 4</a:t>
+            </a:r>
+            <a:endParaRPr lang="en-US" sz="1000" dirty="0"/>
+          </a:p>
+        </p:txBody>
+      </p:sp>
+      <p:sp>
+        <p:nvSpPr>
+          <p:cNvPr id="19" name="Shape 17"/>
+          <p:cNvSpPr/>
+          <p:nvPr/>
+        </p:nvSpPr>
+        <p:spPr>
+          <a:xfrm>
+            <a:off x="7082028" y="2834640"/>
+            <a:ext cx="219456" cy="0"/>
+          </a:xfrm>
+          <a:prstGeom prst="line">
+            <a:avLst/>
+          </a:prstGeom>
+          <a:noFill/>
+          <a:ln w="25400">
+            <a:solidFill>
+              <a:srgbClr val="3FB8C4"/>
+            </a:solidFill>
+            <a:prstDash val="solid"/>
+            <a:tailEnd type="triangle"/>
+          </a:ln>
+        </p:spPr>
+      </p:sp>
+      <p:sp>
+        <p:nvSpPr>
+          <p:cNvPr id="20" name="Shape 18"/>
+          <p:cNvSpPr/>
+          <p:nvPr/>
+        </p:nvSpPr>
+        <p:spPr>
+          <a:xfrm>
+            <a:off x="7319772" y="2148840"/>
+            <a:ext cx="1965960" cy="1371600"/>
+          </a:xfrm>
+          <a:prstGeom prst="roundRect">
+            <a:avLst>
+              <a:gd name="adj" fmla="val 5333"/>
+            </a:avLst>
+          </a:prstGeom>
+          <a:solidFill>
+            <a:srgbClr val="18212E"/>
+          </a:solidFill>
+          <a:ln w="19050">
+            <a:solidFill>
+              <a:srgbClr val="E8A33D"/>
+            </a:solidFill>
+            <a:prstDash val="solid"/>
+          </a:ln>
+        </p:spPr>
+      </p:sp>
+      <p:sp>
+        <p:nvSpPr>
+          <p:cNvPr id="21" name="Text 19"/>
+          <p:cNvSpPr/>
+          <p:nvPr/>
+        </p:nvSpPr>
+        <p:spPr>
+          <a:xfrm>
+            <a:off x="7429500" y="2313432"/>
+            <a:ext cx="1746504" cy="640080"/>
+          </a:xfrm>
+          <a:prstGeom prst="rect">
+            <a:avLst/>
+          </a:prstGeom>
+          <a:noFill/>
+          <a:ln/>
+        </p:spPr>
+        <p:txBody>
+          <a:bodyPr wrap="square" lIns="0" tIns="0" rIns="0" bIns="0" rtlCol="0" anchor="t"/>
+          <a:lstStyle/>
+          <a:p>
+            <a:pPr algn="ctr" indent="0" marL="0">
+              <a:lnSpc>
+                <a:spcPct val="105000"/>
+              </a:lnSpc>
+              <a:buNone/>
+            </a:pPr>
+            <a:r>
+              <a:rPr lang="en-US" sz="1400" b="1" dirty="0">
+                <a:solidFill>
+                  <a:srgbClr val="E7EDF5"/>
+                </a:solidFill>
+                <a:latin typeface="Malgun Gothic" pitchFamily="34" charset="0"/>
+                <a:ea typeface="Malgun Gothic" pitchFamily="34" charset="-122"/>
+                <a:cs typeface="Malgun Gothic" pitchFamily="34" charset="-120"/>
+              </a:rPr>
+              <a:t>④ iteration 루프</a:t>
+            </a:r>
+            <a:endParaRPr lang="en-US" sz="1400" dirty="0"/>
+          </a:p>
+        </p:txBody>
+      </p:sp>
+      <p:sp>
+        <p:nvSpPr>
+          <p:cNvPr id="22" name="Text 20"/>
+          <p:cNvSpPr/>
+          <p:nvPr/>
+        </p:nvSpPr>
+        <p:spPr>
+          <a:xfrm>
+            <a:off x="7429500" y="2926080"/>
+            <a:ext cx="1746504" cy="320040"/>
+          </a:xfrm>
+          <a:prstGeom prst="rect">
+            <a:avLst/>
+          </a:prstGeom>
+          <a:noFill/>
+          <a:ln/>
+        </p:spPr>
+        <p:txBody>
+          <a:bodyPr wrap="square" lIns="0" tIns="0" rIns="0" bIns="0" rtlCol="0" anchor="ctr"/>
+          <a:lstStyle/>
+          <a:p>
+            <a:pPr algn="ctr" indent="0" marL="0">
+              <a:buNone/>
+            </a:pPr>
+            <a:r>
+              <a:rPr lang="en-US" sz="950" dirty="0">
+                <a:solidFill>
+                  <a:srgbClr val="9FB0C4"/>
+                </a:solidFill>
+                <a:latin typeface="Courier New" pitchFamily="34" charset="0"/>
+                <a:ea typeface="Courier New" pitchFamily="34" charset="-122"/>
+                <a:cs typeface="Courier New" pitchFamily="34" charset="-120"/>
+              </a:rPr>
+              <a:t>13종 테스트 × maxIters</a:t>
+            </a:r>
+            <a:endParaRPr lang="en-US" sz="950" dirty="0"/>
+          </a:p>
+        </p:txBody>
+      </p:sp>
+      <p:sp>
+        <p:nvSpPr>
+          <p:cNvPr id="23" name="Text 21"/>
+          <p:cNvSpPr/>
+          <p:nvPr/>
+        </p:nvSpPr>
+        <p:spPr>
+          <a:xfrm>
+            <a:off x="7429500" y="3227832"/>
+            <a:ext cx="1746504" cy="256032"/>
+          </a:xfrm>
+          <a:prstGeom prst="rect">
+            <a:avLst/>
+          </a:prstGeom>
+          <a:noFill/>
+          <a:ln/>
+        </p:spPr>
+        <p:txBody>
+          <a:bodyPr wrap="square" lIns="0" tIns="0" rIns="0" bIns="0" rtlCol="0" anchor="ctr"/>
+          <a:lstStyle/>
+          <a:p>
+            <a:pPr algn="ctr" indent="0" marL="0">
+              <a:buNone/>
+            </a:pPr>
+            <a:r>
+              <a:rPr lang="en-US" sz="1000" i="1" dirty="0">
+                <a:solidFill>
+                  <a:srgbClr val="E8A33D"/>
+                </a:solidFill>
+                <a:latin typeface="Malgun Gothic" pitchFamily="34" charset="0"/>
+                <a:ea typeface="Malgun Gothic" pitchFamily="34" charset="-122"/>
+                <a:cs typeface="Malgun Gothic" pitchFamily="34" charset="-120"/>
+              </a:rPr>
+              <a:t>세션 1~4</a:t>
+            </a:r>
+            <a:endParaRPr lang="en-US" sz="1000" dirty="0"/>
+          </a:p>
+        </p:txBody>
+      </p:sp>
+      <p:sp>
+        <p:nvSpPr>
+          <p:cNvPr id="24" name="Shape 22"/>
+          <p:cNvSpPr/>
+          <p:nvPr/>
+        </p:nvSpPr>
+        <p:spPr>
+          <a:xfrm>
+            <a:off x="9304020" y="2834640"/>
+            <a:ext cx="219456" cy="0"/>
+          </a:xfrm>
+          <a:prstGeom prst="line">
+            <a:avLst/>
+          </a:prstGeom>
+          <a:noFill/>
+          <a:ln w="25400">
+            <a:solidFill>
+              <a:srgbClr val="E8A33D"/>
+            </a:solidFill>
+            <a:prstDash val="solid"/>
+            <a:tailEnd type="triangle"/>
+          </a:ln>
+        </p:spPr>
+      </p:sp>
+      <p:sp>
+        <p:nvSpPr>
+          <p:cNvPr id="25" name="Shape 23"/>
+          <p:cNvSpPr/>
+          <p:nvPr/>
+        </p:nvSpPr>
+        <p:spPr>
+          <a:xfrm>
+            <a:off x="9541764" y="2148840"/>
+            <a:ext cx="1965960" cy="1371600"/>
+          </a:xfrm>
+          <a:prstGeom prst="roundRect">
+            <a:avLst>
+              <a:gd name="adj" fmla="val 5333"/>
+            </a:avLst>
+          </a:prstGeom>
+          <a:solidFill>
+            <a:srgbClr val="18212E"/>
+          </a:solidFill>
+          <a:ln w="19050">
+            <a:solidFill>
+              <a:srgbClr val="3FB8C4"/>
+            </a:solidFill>
+            <a:prstDash val="solid"/>
+          </a:ln>
+        </p:spPr>
+      </p:sp>
+      <p:sp>
+        <p:nvSpPr>
+          <p:cNvPr id="26" name="Text 24"/>
+          <p:cNvSpPr/>
+          <p:nvPr/>
+        </p:nvSpPr>
+        <p:spPr>
+          <a:xfrm>
+            <a:off x="9651492" y="2313432"/>
+            <a:ext cx="1746504" cy="640080"/>
+          </a:xfrm>
+          <a:prstGeom prst="rect">
+            <a:avLst/>
+          </a:prstGeom>
+          <a:noFill/>
+          <a:ln/>
+        </p:spPr>
+        <p:txBody>
+          <a:bodyPr wrap="square" lIns="0" tIns="0" rIns="0" bIns="0" rtlCol="0" anchor="t"/>
+          <a:lstStyle/>
+          <a:p>
+            <a:pPr algn="ctr" indent="0" marL="0">
+              <a:lnSpc>
+                <a:spcPct val="105000"/>
+              </a:lnSpc>
+              <a:buNone/>
+            </a:pPr>
+            <a:r>
+              <a:rPr lang="en-US" sz="1400" b="1" dirty="0">
+                <a:solidFill>
+                  <a:srgbClr val="E7EDF5"/>
+                </a:solidFill>
+                <a:latin typeface="Malgun Gothic" pitchFamily="34" charset="0"/>
+                <a:ea typeface="Malgun Gothic" pitchFamily="34" charset="-122"/>
+                <a:cs typeface="Malgun Gothic" pitchFamily="34" charset="-120"/>
+              </a:rPr>
+              <a:t>⑤ 오류 합산·종료</a:t>
+            </a:r>
+            <a:endParaRPr lang="en-US" sz="1400" dirty="0"/>
+          </a:p>
+        </p:txBody>
+      </p:sp>
+      <p:sp>
+        <p:nvSpPr>
+          <p:cNvPr id="27" name="Text 25"/>
+          <p:cNvSpPr/>
+          <p:nvPr/>
+        </p:nvSpPr>
+        <p:spPr>
+          <a:xfrm>
+            <a:off x="9651492" y="2926080"/>
+            <a:ext cx="1746504" cy="320040"/>
+          </a:xfrm>
+          <a:prstGeom prst="rect">
+            <a:avLst/>
+          </a:prstGeom>
+          <a:noFill/>
+          <a:ln/>
+        </p:spPr>
+        <p:txBody>
+          <a:bodyPr wrap="square" lIns="0" tIns="0" rIns="0" bIns="0" rtlCol="0" anchor="ctr"/>
+          <a:lstStyle/>
+          <a:p>
+            <a:pPr algn="ctr" indent="0" marL="0">
+              <a:buNone/>
+            </a:pPr>
+            <a:r>
+              <a:rPr lang="en-US" sz="950" dirty="0">
+                <a:solidFill>
+                  <a:srgbClr val="9FB0C4"/>
+                </a:solidFill>
+                <a:latin typeface="Courier New" pitchFamily="34" charset="0"/>
+                <a:ea typeface="Courier New" pitchFamily="34" charset="-122"/>
+                <a:cs typeface="Courier New" pitchFamily="34" charset="-120"/>
+              </a:rPr>
+              <a:t>Final error count</a:t>
+            </a:r>
+            <a:endParaRPr lang="en-US" sz="950" dirty="0"/>
+          </a:p>
+        </p:txBody>
+      </p:sp>
+      <p:sp>
+        <p:nvSpPr>
+          <p:cNvPr id="28" name="Text 26"/>
+          <p:cNvSpPr/>
+          <p:nvPr/>
+        </p:nvSpPr>
+        <p:spPr>
+          <a:xfrm>
+            <a:off x="9651492" y="3227832"/>
+            <a:ext cx="1746504" cy="256032"/>
+          </a:xfrm>
+          <a:prstGeom prst="rect">
+            <a:avLst/>
+          </a:prstGeom>
+          <a:noFill/>
+          <a:ln/>
+        </p:spPr>
+        <p:txBody>
+          <a:bodyPr wrap="square" lIns="0" tIns="0" rIns="0" bIns="0" rtlCol="0" anchor="ctr"/>
+          <a:lstStyle/>
+          <a:p>
+            <a:pPr algn="ctr" indent="0" marL="0">
+              <a:buNone/>
+            </a:pPr>
+            <a:r>
+              <a:rPr lang="en-US" sz="1000" i="1" dirty="0">
+                <a:solidFill>
+                  <a:srgbClr val="3FB8C4"/>
+                </a:solidFill>
+                <a:latin typeface="Malgun Gothic" pitchFamily="34" charset="0"/>
+                <a:ea typeface="Malgun Gothic" pitchFamily="34" charset="-122"/>
+                <a:cs typeface="Malgun Gothic" pitchFamily="34" charset="-120"/>
+              </a:rPr>
+              <a:t>세션 3·5</a:t>
+            </a:r>
+            <a:endParaRPr lang="en-US" sz="1000" dirty="0"/>
+          </a:p>
+        </p:txBody>
+      </p:sp>
+      <p:sp>
+        <p:nvSpPr>
+          <p:cNvPr id="29" name="Shape 27"/>
+          <p:cNvSpPr/>
+          <p:nvPr/>
+        </p:nvSpPr>
+        <p:spPr>
+          <a:xfrm>
+            <a:off x="8302752" y="4023360"/>
+            <a:ext cx="0" cy="-457200"/>
+          </a:xfrm>
+          <a:prstGeom prst="line">
+            <a:avLst/>
+          </a:prstGeom>
+          <a:noFill/>
+          <a:ln w="25400">
+            <a:solidFill>
+              <a:srgbClr val="E8A33D"/>
+            </a:solidFill>
+            <a:prstDash val="solid"/>
+            <a:tailEnd type="triangle"/>
+          </a:ln>
+        </p:spPr>
+      </p:sp>
+      <p:sp>
+        <p:nvSpPr>
+          <p:cNvPr id="30" name="Text 28"/>
+          <p:cNvSpPr/>
+          <p:nvPr/>
+        </p:nvSpPr>
+        <p:spPr>
+          <a:xfrm>
+            <a:off x="7205472" y="4023360"/>
+            <a:ext cx="2194560" cy="320040"/>
+          </a:xfrm>
+          <a:prstGeom prst="rect">
+            <a:avLst/>
+          </a:prstGeom>
+          <a:noFill/>
+          <a:ln/>
+        </p:spPr>
+        <p:txBody>
+          <a:bodyPr wrap="square" lIns="0" tIns="0" rIns="0" bIns="0" rtlCol="0" anchor="ctr"/>
+          <a:lstStyle/>
+          <a:p>
+            <a:pPr algn="ctr" indent="0" marL="0">
+              <a:buNone/>
+            </a:pPr>
+            <a:r>
+              <a:rPr lang="en-US" sz="1100" i="1" dirty="0">
+                <a:solidFill>
+                  <a:srgbClr val="E8A33D"/>
+                </a:solidFill>
+                <a:latin typeface="Malgun Gothic" pitchFamily="34" charset="0"/>
+                <a:ea typeface="Malgun Gothic" pitchFamily="34" charset="-122"/>
+                <a:cs typeface="Malgun Gothic" pitchFamily="34" charset="-120"/>
+              </a:rPr>
+              <a:t>maxIters회 반복</a:t>
+            </a:r>
+            <a:endParaRPr lang="en-US" sz="1100" dirty="0"/>
+          </a:p>
+        </p:txBody>
+      </p:sp>
+      <p:sp>
+        <p:nvSpPr>
+          <p:cNvPr id="31" name="Shape 29"/>
+          <p:cNvSpPr/>
+          <p:nvPr/>
+        </p:nvSpPr>
+        <p:spPr>
+          <a:xfrm>
+            <a:off x="548640" y="4846320"/>
+            <a:ext cx="11064240" cy="1005840"/>
+          </a:xfrm>
+          <a:prstGeom prst="roundRect">
+            <a:avLst>
+              <a:gd name="adj" fmla="val 7273"/>
+            </a:avLst>
+          </a:prstGeom>
+          <a:solidFill>
+            <a:srgbClr val="241A16"/>
+          </a:solidFill>
+          <a:ln w="19050">
+            <a:solidFill>
+              <a:srgbClr val="E8A33D"/>
+            </a:solidFill>
+            <a:prstDash val="solid"/>
+          </a:ln>
+        </p:spPr>
+      </p:sp>
+      <p:sp>
+        <p:nvSpPr>
+          <p:cNvPr id="32" name="Text 30"/>
+          <p:cNvSpPr/>
+          <p:nvPr/>
+        </p:nvSpPr>
+        <p:spPr>
+          <a:xfrm>
+            <a:off x="822960" y="5029200"/>
+            <a:ext cx="10515600" cy="640080"/>
           </a:xfrm>
           <a:prstGeom prst="rect">
             <a:avLst/>
@@ -6462,145 +9508,16 @@
               <a:buNone/>
             </a:pPr>
             <a:r>
-              <a:rPr lang="en-US" sz="1400" dirty="0">
-                <a:solidFill>
-                  <a:srgbClr val="9FB0C4"/>
-                </a:solidFill>
-                <a:latin typeface="Malgun Gothic" pitchFamily="34" charset="0"/>
-                <a:ea typeface="Malgun Gothic" pitchFamily="34" charset="-122"/>
-                <a:cs typeface="Malgun Gothic" pitchFamily="34" charset="-120"/>
-              </a:rPr>
-              <a:t>Makefile로 memtestG80를 빌드한다</a:t>
-            </a:r>
-            <a:endParaRPr lang="en-US" sz="1400" dirty="0"/>
-          </a:p>
-        </p:txBody>
-      </p:sp>
-      <p:sp>
-        <p:nvSpPr>
-          <p:cNvPr id="8" name="Shape 6"/>
-          <p:cNvSpPr/>
-          <p:nvPr/>
-        </p:nvSpPr>
-        <p:spPr>
-          <a:xfrm>
-            <a:off x="6309360" y="1600200"/>
-            <a:ext cx="5303520" cy="1920240"/>
-          </a:xfrm>
-          <a:prstGeom prst="roundRect">
-            <a:avLst>
-              <a:gd name="adj" fmla="val 3810"/>
-            </a:avLst>
-          </a:prstGeom>
-          <a:solidFill>
-            <a:srgbClr val="18212E"/>
-          </a:solidFill>
-          <a:ln/>
-        </p:spPr>
-      </p:sp>
-      <p:sp>
-        <p:nvSpPr>
-          <p:cNvPr id="9" name="Text 7"/>
-          <p:cNvSpPr/>
-          <p:nvPr/>
-        </p:nvSpPr>
-        <p:spPr>
-          <a:xfrm>
-            <a:off x="6565392" y="1801368"/>
-            <a:ext cx="1188720" cy="502920"/>
-          </a:xfrm>
-          <a:prstGeom prst="roundRect">
-            <a:avLst>
-              <a:gd name="adj" fmla="val 14545"/>
-            </a:avLst>
-          </a:prstGeom>
-          <a:solidFill>
-            <a:srgbClr val="3FB8C4"/>
-          </a:solidFill>
-          <a:ln/>
-        </p:spPr>
-        <p:txBody>
-          <a:bodyPr wrap="square" rtlCol="0" anchor="ctr"/>
-          <a:lstStyle/>
-          <a:p>
-            <a:pPr algn="ctr" indent="0" marL="0">
-              <a:buNone/>
-            </a:pPr>
-            <a:r>
-              <a:rPr lang="en-US" sz="1700" b="1" dirty="0">
-                <a:solidFill>
-                  <a:srgbClr val="101722"/>
-                </a:solidFill>
-                <a:latin typeface="Courier New" pitchFamily="34" charset="0"/>
-                <a:ea typeface="Courier New" pitchFamily="34" charset="-122"/>
-                <a:cs typeface="Courier New" pitchFamily="34" charset="-120"/>
-              </a:rPr>
-              <a:t>Ex 2</a:t>
-            </a:r>
-            <a:endParaRPr lang="en-US" sz="1700" dirty="0"/>
-          </a:p>
-        </p:txBody>
-      </p:sp>
-      <p:sp>
-        <p:nvSpPr>
-          <p:cNvPr id="10" name="Text 8"/>
-          <p:cNvSpPr/>
-          <p:nvPr/>
-        </p:nvSpPr>
-        <p:spPr>
-          <a:xfrm>
-            <a:off x="7909560" y="1819656"/>
-            <a:ext cx="3474720" cy="822960"/>
-          </a:xfrm>
-          <a:prstGeom prst="rect">
-            <a:avLst/>
-          </a:prstGeom>
-          <a:noFill/>
-          <a:ln/>
-        </p:spPr>
-        <p:txBody>
-          <a:bodyPr wrap="square" lIns="0" tIns="0" rIns="0" bIns="0" rtlCol="0" anchor="t"/>
-          <a:lstStyle/>
-          <a:p>
-            <a:pPr indent="0" marL="0">
-              <a:buNone/>
-            </a:pPr>
-            <a:r>
-              <a:rPr lang="en-US" sz="1800" b="1" dirty="0">
-                <a:solidFill>
-                  <a:srgbClr val="E7EDF5"/>
-                </a:solidFill>
-                <a:latin typeface="Malgun Gothic" pitchFamily="34" charset="0"/>
-                <a:ea typeface="Malgun Gothic" pitchFamily="34" charset="-122"/>
-                <a:cs typeface="Malgun Gothic" pitchFamily="34" charset="-120"/>
-              </a:rPr>
-              <a:t>기본 실행</a:t>
-            </a:r>
-            <a:endParaRPr lang="en-US" sz="1800" dirty="0"/>
-          </a:p>
-        </p:txBody>
-      </p:sp>
-      <p:sp>
-        <p:nvSpPr>
-          <p:cNvPr id="11" name="Text 9"/>
-          <p:cNvSpPr/>
-          <p:nvPr/>
-        </p:nvSpPr>
-        <p:spPr>
-          <a:xfrm>
-            <a:off x="6565392" y="2697480"/>
-            <a:ext cx="4791456" cy="731520"/>
-          </a:xfrm>
-          <a:prstGeom prst="rect">
-            <a:avLst/>
-          </a:prstGeom>
-          <a:noFill/>
-          <a:ln/>
-        </p:spPr>
-        <p:txBody>
-          <a:bodyPr wrap="square" lIns="0" tIns="0" rIns="0" bIns="0" rtlCol="0" anchor="t"/>
-          <a:lstStyle/>
-          <a:p>
+              <a:rPr lang="en-US" sz="1450" b="1" dirty="0">
+                <a:solidFill>
+                  <a:srgbClr val="E8A33D"/>
+                </a:solidFill>
+                <a:latin typeface="Malgun Gothic" pitchFamily="34" charset="0"/>
+                <a:ea typeface="Malgun Gothic" pitchFamily="34" charset="-122"/>
+                <a:cs typeface="Malgun Gothic" pitchFamily="34" charset="-120"/>
+              </a:rPr>
+              <a:t>핵심: ④번 iteration 루프가 이 도구의 심장입니다. </a:t>
+            </a:r>
             <a:pPr indent="0" marL="0">
               <a:lnSpc>
                 <a:spcPct val="110000"/>
@@ -6608,111 +9525,7 @@
               <a:buNone/>
             </a:pPr>
             <a:r>
-              <a:rPr lang="en-US" sz="1400" dirty="0">
-                <a:solidFill>
-                  <a:srgbClr val="9FB0C4"/>
-                </a:solidFill>
-                <a:latin typeface="Malgun Gothic" pitchFamily="34" charset="0"/>
-                <a:ea typeface="Malgun Gothic" pitchFamily="34" charset="-122"/>
-                <a:cs typeface="Malgun Gothic" pitchFamily="34" charset="-120"/>
-              </a:rPr>
-              <a:t>./memtestG80 로 128MB 테스트를 돌린다</a:t>
-            </a:r>
-            <a:endParaRPr lang="en-US" sz="1400" dirty="0"/>
-          </a:p>
-        </p:txBody>
-      </p:sp>
-      <p:sp>
-        <p:nvSpPr>
-          <p:cNvPr id="12" name="Shape 10"/>
-          <p:cNvSpPr/>
-          <p:nvPr/>
-        </p:nvSpPr>
-        <p:spPr>
-          <a:xfrm>
-            <a:off x="548640" y="3840480"/>
-            <a:ext cx="5303520" cy="1920240"/>
-          </a:xfrm>
-          <a:prstGeom prst="roundRect">
-            <a:avLst>
-              <a:gd name="adj" fmla="val 3810"/>
-            </a:avLst>
-          </a:prstGeom>
-          <a:solidFill>
-            <a:srgbClr val="18212E"/>
-          </a:solidFill>
-          <a:ln/>
-        </p:spPr>
-      </p:sp>
-      <p:sp>
-        <p:nvSpPr>
-          <p:cNvPr id="13" name="Text 11"/>
-          <p:cNvSpPr/>
-          <p:nvPr/>
-        </p:nvSpPr>
-        <p:spPr>
-          <a:xfrm>
-            <a:off x="804672" y="4041648"/>
-            <a:ext cx="1188720" cy="502920"/>
-          </a:xfrm>
-          <a:prstGeom prst="roundRect">
-            <a:avLst>
-              <a:gd name="adj" fmla="val 14545"/>
-            </a:avLst>
-          </a:prstGeom>
-          <a:solidFill>
-            <a:srgbClr val="E8A33D"/>
-          </a:solidFill>
-          <a:ln/>
-        </p:spPr>
-        <p:txBody>
-          <a:bodyPr wrap="square" rtlCol="0" anchor="ctr"/>
-          <a:lstStyle/>
-          <a:p>
-            <a:pPr algn="ctr" indent="0" marL="0">
-              <a:buNone/>
-            </a:pPr>
-            <a:r>
-              <a:rPr lang="en-US" sz="1700" b="1" dirty="0">
-                <a:solidFill>
-                  <a:srgbClr val="101722"/>
-                </a:solidFill>
-                <a:latin typeface="Courier New" pitchFamily="34" charset="0"/>
-                <a:ea typeface="Courier New" pitchFamily="34" charset="-122"/>
-                <a:cs typeface="Courier New" pitchFamily="34" charset="-120"/>
-              </a:rPr>
-              <a:t>Ex 3</a:t>
-            </a:r>
-            <a:endParaRPr lang="en-US" sz="1700" dirty="0"/>
-          </a:p>
-        </p:txBody>
-      </p:sp>
-      <p:sp>
-        <p:nvSpPr>
-          <p:cNvPr id="14" name="Text 12"/>
-          <p:cNvSpPr/>
-          <p:nvPr/>
-        </p:nvSpPr>
-        <p:spPr>
-          <a:xfrm>
-            <a:off x="2148840" y="4059936"/>
-            <a:ext cx="3474720" cy="822960"/>
-          </a:xfrm>
-          <a:prstGeom prst="rect">
-            <a:avLst/>
-          </a:prstGeom>
-          <a:noFill/>
-          <a:ln/>
-        </p:spPr>
-        <p:txBody>
-          <a:bodyPr wrap="square" lIns="0" tIns="0" rIns="0" bIns="0" rtlCol="0" anchor="t"/>
-          <a:lstStyle/>
-          <a:p>
-            <a:pPr indent="0" marL="0">
-              <a:buNone/>
-            </a:pPr>
-            <a:r>
-              <a:rPr lang="en-US" sz="1800" b="1" dirty="0">
+              <a:rPr lang="en-US" sz="1450" dirty="0">
                 <a:solidFill>
                   <a:srgbClr val="E7EDF5"/>
                 </a:solidFill>
@@ -6720,197 +9533,9 @@
                 <a:ea typeface="Malgun Gothic" pitchFamily="34" charset="-122"/>
                 <a:cs typeface="Malgun Gothic" pitchFamily="34" charset="-120"/>
               </a:rPr>
-              <a:t>GPU 관찰</a:t>
-            </a:r>
-            <a:endParaRPr lang="en-US" sz="1800" dirty="0"/>
-          </a:p>
-        </p:txBody>
-      </p:sp>
-      <p:sp>
-        <p:nvSpPr>
-          <p:cNvPr id="15" name="Text 13"/>
-          <p:cNvSpPr/>
-          <p:nvPr/>
-        </p:nvSpPr>
-        <p:spPr>
-          <a:xfrm>
-            <a:off x="804672" y="4937760"/>
-            <a:ext cx="4791456" cy="731520"/>
-          </a:xfrm>
-          <a:prstGeom prst="rect">
-            <a:avLst/>
-          </a:prstGeom>
-          <a:noFill/>
-          <a:ln/>
-        </p:spPr>
-        <p:txBody>
-          <a:bodyPr wrap="square" lIns="0" tIns="0" rIns="0" bIns="0" rtlCol="0" anchor="t"/>
-          <a:lstStyle/>
-          <a:p>
-            <a:pPr indent="0" marL="0">
-              <a:lnSpc>
-                <a:spcPct val="110000"/>
-              </a:lnSpc>
-              <a:buNone/>
-            </a:pPr>
-            <a:r>
-              <a:rPr lang="en-US" sz="1400" dirty="0">
-                <a:solidFill>
-                  <a:srgbClr val="9FB0C4"/>
-                </a:solidFill>
-                <a:latin typeface="Malgun Gothic" pitchFamily="34" charset="0"/>
-                <a:ea typeface="Malgun Gothic" pitchFamily="34" charset="-122"/>
-                <a:cs typeface="Malgun Gothic" pitchFamily="34" charset="-120"/>
-              </a:rPr>
-              <a:t>nvidia-smi로 사용률·메모리를 관찰한다</a:t>
-            </a:r>
-            <a:endParaRPr lang="en-US" sz="1400" dirty="0"/>
-          </a:p>
-        </p:txBody>
-      </p:sp>
-      <p:sp>
-        <p:nvSpPr>
-          <p:cNvPr id="16" name="Shape 14"/>
-          <p:cNvSpPr/>
-          <p:nvPr/>
-        </p:nvSpPr>
-        <p:spPr>
-          <a:xfrm>
-            <a:off x="6309360" y="3840480"/>
-            <a:ext cx="5303520" cy="1920240"/>
-          </a:xfrm>
-          <a:prstGeom prst="roundRect">
-            <a:avLst>
-              <a:gd name="adj" fmla="val 3810"/>
-            </a:avLst>
-          </a:prstGeom>
-          <a:solidFill>
-            <a:srgbClr val="18212E"/>
-          </a:solidFill>
-          <a:ln/>
-        </p:spPr>
-      </p:sp>
-      <p:sp>
-        <p:nvSpPr>
-          <p:cNvPr id="17" name="Text 15"/>
-          <p:cNvSpPr/>
-          <p:nvPr/>
-        </p:nvSpPr>
-        <p:spPr>
-          <a:xfrm>
-            <a:off x="6565392" y="4041648"/>
-            <a:ext cx="1188720" cy="502920"/>
-          </a:xfrm>
-          <a:prstGeom prst="roundRect">
-            <a:avLst>
-              <a:gd name="adj" fmla="val 14545"/>
-            </a:avLst>
-          </a:prstGeom>
-          <a:solidFill>
-            <a:srgbClr val="3FB8C4"/>
-          </a:solidFill>
-          <a:ln/>
-        </p:spPr>
-        <p:txBody>
-          <a:bodyPr wrap="square" rtlCol="0" anchor="ctr"/>
-          <a:lstStyle/>
-          <a:p>
-            <a:pPr algn="ctr" indent="0" marL="0">
-              <a:buNone/>
-            </a:pPr>
-            <a:r>
-              <a:rPr lang="en-US" sz="1700" b="1" dirty="0">
-                <a:solidFill>
-                  <a:srgbClr val="101722"/>
-                </a:solidFill>
-                <a:latin typeface="Courier New" pitchFamily="34" charset="0"/>
-                <a:ea typeface="Courier New" pitchFamily="34" charset="-122"/>
-                <a:cs typeface="Courier New" pitchFamily="34" charset="-120"/>
-              </a:rPr>
-              <a:t>Ex 4</a:t>
-            </a:r>
-            <a:endParaRPr lang="en-US" sz="1700" dirty="0"/>
-          </a:p>
-        </p:txBody>
-      </p:sp>
-      <p:sp>
-        <p:nvSpPr>
-          <p:cNvPr id="18" name="Text 16"/>
-          <p:cNvSpPr/>
-          <p:nvPr/>
-        </p:nvSpPr>
-        <p:spPr>
-          <a:xfrm>
-            <a:off x="7909560" y="4059936"/>
-            <a:ext cx="3474720" cy="822960"/>
-          </a:xfrm>
-          <a:prstGeom prst="rect">
-            <a:avLst/>
-          </a:prstGeom>
-          <a:noFill/>
-          <a:ln/>
-        </p:spPr>
-        <p:txBody>
-          <a:bodyPr wrap="square" lIns="0" tIns="0" rIns="0" bIns="0" rtlCol="0" anchor="t"/>
-          <a:lstStyle/>
-          <a:p>
-            <a:pPr indent="0" marL="0">
-              <a:buNone/>
-            </a:pPr>
-            <a:r>
-              <a:rPr lang="en-US" sz="1800" b="1" dirty="0">
-                <a:solidFill>
-                  <a:srgbClr val="E7EDF5"/>
-                </a:solidFill>
-                <a:latin typeface="Malgun Gothic" pitchFamily="34" charset="0"/>
-                <a:ea typeface="Malgun Gothic" pitchFamily="34" charset="-122"/>
-                <a:cs typeface="Malgun Gothic" pitchFamily="34" charset="-120"/>
-              </a:rPr>
-              <a:t>인자 실험</a:t>
-            </a:r>
-            <a:endParaRPr lang="en-US" sz="1800" dirty="0"/>
-          </a:p>
-        </p:txBody>
-      </p:sp>
-      <p:sp>
-        <p:nvSpPr>
-          <p:cNvPr id="19" name="Text 17"/>
-          <p:cNvSpPr/>
-          <p:nvPr/>
-        </p:nvSpPr>
-        <p:spPr>
-          <a:xfrm>
-            <a:off x="6565392" y="4937760"/>
-            <a:ext cx="4791456" cy="731520"/>
-          </a:xfrm>
-          <a:prstGeom prst="rect">
-            <a:avLst/>
-          </a:prstGeom>
-          <a:noFill/>
-          <a:ln/>
-        </p:spPr>
-        <p:txBody>
-          <a:bodyPr wrap="square" lIns="0" tIns="0" rIns="0" bIns="0" rtlCol="0" anchor="t"/>
-          <a:lstStyle/>
-          <a:p>
-            <a:pPr indent="0" marL="0">
-              <a:lnSpc>
-                <a:spcPct val="110000"/>
-              </a:lnSpc>
-              <a:buNone/>
-            </a:pPr>
-            <a:r>
-              <a:rPr lang="en-US" sz="1400" dirty="0">
-                <a:solidFill>
-                  <a:srgbClr val="9FB0C4"/>
-                </a:solidFill>
-                <a:latin typeface="Malgun Gothic" pitchFamily="34" charset="0"/>
-                <a:ea typeface="Malgun Gothic" pitchFamily="34" charset="-122"/>
-                <a:cs typeface="Malgun Gothic" pitchFamily="34" charset="-120"/>
-              </a:rPr>
-              <a:t>메모리 크기·반복 수를 바꿔 실행 시간 비교</a:t>
-            </a:r>
-            <a:endParaRPr lang="en-US" sz="1400" dirty="0"/>
+              <a:t>한 번 돌 때마다 13종 테스트가 순서대로 실행되고, 오류 수가 누적됩니다.</a:t>
+            </a:r>
+            <a:endParaRPr lang="en-US" sz="1450" dirty="0"/>
           </a:p>
         </p:txBody>
       </p:sp>
